--- a/output/wordlabs-meter-3day.pptx
+++ b/output/wordlabs-meter-3day.pptx
@@ -6040,7 +6040,7 @@
                 <a:ea typeface="Calibri" pitchFamily="34" charset="-122"/>
                 <a:cs typeface="Calibri" pitchFamily="34" charset="-120"/>
               </a:rPr>
-              <a:t>We used a </a:t>
+              <a:t>The </a:t>
             </a:r>
             <a:pPr algn="l" indent="0" marL="0">
               <a:buNone/>
@@ -6071,7 +6071,7 @@
                 <a:ea typeface="Calibri" pitchFamily="34" charset="-122"/>
                 <a:cs typeface="Calibri" pitchFamily="34" charset="-120"/>
               </a:rPr>
-              <a:t> to record the temperature, then calculated the </a:t>
+              <a:t> showed it was too hot outside, so we used the </a:t>
             </a:r>
             <a:pPr algn="l" indent="0" marL="0">
               <a:buNone/>
@@ -6088,7 +6088,7 @@
                 <a:ea typeface="Calibri" pitchFamily="34" charset="-122"/>
                 <a:cs typeface="Calibri" pitchFamily="34" charset="-120"/>
               </a:rPr>
-              <a:t>perimeter</a:t>
+              <a:t>speedometer</a:t>
             </a:r>
             <a:pPr algn="l" indent="0" marL="0">
               <a:buNone/>
@@ -6102,7 +6102,7 @@
                 <a:ea typeface="Calibri" pitchFamily="34" charset="-122"/>
                 <a:cs typeface="Calibri" pitchFamily="34" charset="-120"/>
               </a:rPr>
-              <a:t> of the garden.</a:t>
+              <a:t> to check we were driving slowly to the shaded park.</a:t>
             </a:r>
             <a:endParaRPr lang="en-US" sz="1800" dirty="0"/>
           </a:p>
@@ -6385,7 +6385,7 @@
                 <a:ea typeface="Trebuchet MS" pitchFamily="34" charset="-122"/>
                 <a:cs typeface="Trebuchet MS" pitchFamily="34" charset="-120"/>
               </a:rPr>
-              <a:t>perimeter</a:t>
+              <a:t>speedometer</a:t>
             </a:r>
             <a:endParaRPr lang="en-US" sz="1400" dirty="0"/>
           </a:p>
@@ -9221,7 +9221,7 @@
                 <a:ea typeface="Trebuchet MS" pitchFamily="34" charset="-122"/>
                 <a:cs typeface="Trebuchet MS" pitchFamily="34" charset="-120"/>
               </a:rPr>
-              <a:t>mo</a:t>
+              <a:t>mom</a:t>
             </a:r>
             <a:endParaRPr lang="en-US" sz="1400" dirty="0"/>
           </a:p>
@@ -9326,7 +9326,7 @@
                 <a:ea typeface="Trebuchet MS" pitchFamily="34" charset="-122"/>
                 <a:cs typeface="Trebuchet MS" pitchFamily="34" charset="-120"/>
               </a:rPr>
-              <a:t>me</a:t>
+              <a:t>e</a:t>
             </a:r>
             <a:endParaRPr lang="en-US" sz="1400" dirty="0"/>
           </a:p>
@@ -10548,7 +10548,7 @@
                 <a:ea typeface="Trebuchet MS" pitchFamily="34" charset="-122"/>
                 <a:cs typeface="Trebuchet MS" pitchFamily="34" charset="-120"/>
               </a:rPr>
-              <a:t>mo</a:t>
+              <a:t>mom</a:t>
             </a:r>
             <a:endParaRPr lang="en-US" sz="1400" dirty="0"/>
           </a:p>
@@ -10653,7 +10653,7 @@
                 <a:ea typeface="Trebuchet MS" pitchFamily="34" charset="-122"/>
                 <a:cs typeface="Trebuchet MS" pitchFamily="34" charset="-120"/>
               </a:rPr>
-              <a:t>me</a:t>
+              <a:t>e</a:t>
             </a:r>
             <a:endParaRPr lang="en-US" sz="1400" dirty="0"/>
           </a:p>
@@ -11810,7 +11810,7 @@
                 <a:ea typeface="Trebuchet MS" pitchFamily="34" charset="-122"/>
                 <a:cs typeface="Trebuchet MS" pitchFamily="34" charset="-120"/>
               </a:rPr>
-              <a:t>perimeter</a:t>
+              <a:t>speedometer</a:t>
             </a:r>
             <a:endParaRPr lang="en-US" sz="2800" dirty="0"/>
           </a:p>
@@ -12637,7 +12637,7 @@
                 <a:ea typeface="Trebuchet MS" pitchFamily="34" charset="-122"/>
                 <a:cs typeface="Trebuchet MS" pitchFamily="34" charset="-120"/>
               </a:rPr>
-              <a:t>perimeter</a:t>
+              <a:t>speedometer</a:t>
             </a:r>
             <a:endParaRPr lang="en-US" sz="2800" dirty="0"/>
           </a:p>
@@ -12717,7 +12717,7 @@
         </p:nvSpPr>
         <p:spPr>
           <a:xfrm>
-            <a:off x="2938272" y="2258568"/>
+            <a:off x="2221992" y="2258568"/>
             <a:ext cx="1828800" cy="292608"/>
           </a:xfrm>
           <a:prstGeom prst="rect">
@@ -12751,7 +12751,7 @@
         </p:nvSpPr>
         <p:spPr>
           <a:xfrm>
-            <a:off x="2938272" y="2258568"/>
+            <a:off x="2221992" y="2258568"/>
             <a:ext cx="1828800" cy="292608"/>
           </a:xfrm>
           <a:prstGeom prst="rect">
@@ -12776,7 +12776,7 @@
                 <a:ea typeface="Trebuchet MS" pitchFamily="34" charset="-122"/>
                 <a:cs typeface="Trebuchet MS" pitchFamily="34" charset="-120"/>
               </a:rPr>
-              <a:t>peri</a:t>
+              <a:t>speed</a:t>
             </a:r>
             <a:endParaRPr lang="en-US" sz="1300" dirty="0"/>
           </a:p>
@@ -12790,7 +12790,7 @@
         </p:nvSpPr>
         <p:spPr>
           <a:xfrm>
-            <a:off x="2938272" y="2569464"/>
+            <a:off x="2221992" y="2569464"/>
             <a:ext cx="1828800" cy="201168"/>
           </a:xfrm>
           <a:prstGeom prst="rect">
@@ -12815,7 +12815,7 @@
                 <a:ea typeface="Calibri" pitchFamily="34" charset="-122"/>
                 <a:cs typeface="Calibri" pitchFamily="34" charset="-120"/>
               </a:rPr>
-              <a:t>around</a:t>
+              <a:t>how fast</a:t>
             </a:r>
             <a:endParaRPr lang="en-US" sz="850" dirty="0"/>
           </a:p>
@@ -12829,7 +12829,7 @@
         </p:nvSpPr>
         <p:spPr>
           <a:xfrm>
-            <a:off x="5803392" y="2258568"/>
+            <a:off x="4370832" y="2258568"/>
             <a:ext cx="1828800" cy="292608"/>
           </a:xfrm>
           <a:prstGeom prst="rect">
@@ -12838,11 +12838,11 @@
             </a:avLst>
           </a:prstGeom>
           <a:solidFill>
-            <a:srgbClr val="CCFBF1"/>
+            <a:srgbClr val="FCE7F3"/>
           </a:solidFill>
           <a:ln w="19050">
             <a:solidFill>
-              <a:srgbClr val="0D9488"/>
+              <a:srgbClr val="DB2777"/>
             </a:solidFill>
             <a:prstDash val="solid"/>
           </a:ln>
@@ -12863,7 +12863,7 @@
         </p:nvSpPr>
         <p:spPr>
           <a:xfrm>
-            <a:off x="5803392" y="2258568"/>
+            <a:off x="4370832" y="2258568"/>
             <a:ext cx="1828800" cy="292608"/>
           </a:xfrm>
           <a:prstGeom prst="rect">
@@ -12882,13 +12882,13 @@
             <a:r>
               <a:rPr lang="en-US" sz="1300" b="1" dirty="0">
                 <a:solidFill>
-                  <a:srgbClr val="0F766E"/>
+                  <a:srgbClr val="9D174D"/>
                 </a:solidFill>
                 <a:latin typeface="Trebuchet MS" pitchFamily="34" charset="0"/>
                 <a:ea typeface="Trebuchet MS" pitchFamily="34" charset="-122"/>
                 <a:cs typeface="Trebuchet MS" pitchFamily="34" charset="-120"/>
               </a:rPr>
-              <a:t>meter</a:t>
+              <a:t>o</a:t>
             </a:r>
             <a:endParaRPr lang="en-US" sz="1300" dirty="0"/>
           </a:p>
@@ -12902,7 +12902,7 @@
         </p:nvSpPr>
         <p:spPr>
           <a:xfrm>
-            <a:off x="5803392" y="2569464"/>
+            <a:off x="4370832" y="2569464"/>
             <a:ext cx="1828800" cy="201168"/>
           </a:xfrm>
           <a:prstGeom prst="rect">
@@ -12927,7 +12927,7 @@
                 <a:ea typeface="Calibri" pitchFamily="34" charset="-122"/>
                 <a:cs typeface="Calibri" pitchFamily="34" charset="-120"/>
               </a:rPr>
-              <a:t>measure</a:t>
+              <a:t>connecting vowel</a:t>
             </a:r>
             <a:endParaRPr lang="en-US" sz="850" dirty="0"/>
           </a:p>
@@ -12935,7 +12935,158 @@
       </p:sp>
       <p:sp>
         <p:nvSpPr>
-          <p:cNvPr id="22" name="Shape 20"/>
+          <p:cNvPr id="22" name="Text 20"/>
+          <p:cNvSpPr/>
+          <p:nvPr/>
+        </p:nvSpPr>
+        <p:spPr>
+          <a:xfrm>
+            <a:off x="4370832" y="2752344"/>
+            <a:ext cx="1828800" cy="182880"/>
+          </a:xfrm>
+          <a:prstGeom prst="rect">
+            <a:avLst/>
+          </a:prstGeom>
+          <a:noFill/>
+          <a:ln/>
+        </p:spPr>
+        <p:txBody>
+          <a:bodyPr wrap="square" lIns="0" tIns="0" rIns="0" bIns="0" rtlCol="0" anchor="t"/>
+          <a:lstStyle/>
+          <a:p>
+            <a:pPr algn="ctr" indent="0" marL="0">
+              <a:buNone/>
+            </a:pPr>
+            <a:r>
+              <a:rPr lang="en-US" sz="700" i="1" dirty="0">
+                <a:solidFill>
+                  <a:srgbClr val="94A3B8"/>
+                </a:solidFill>
+                <a:latin typeface="Calibri" pitchFamily="34" charset="0"/>
+                <a:ea typeface="Calibri" pitchFamily="34" charset="-122"/>
+                <a:cs typeface="Calibri" pitchFamily="34" charset="-120"/>
+              </a:rPr>
+              <a:t>links base to root</a:t>
+            </a:r>
+            <a:endParaRPr lang="en-US" sz="700" dirty="0"/>
+          </a:p>
+        </p:txBody>
+      </p:sp>
+      <p:sp>
+        <p:nvSpPr>
+          <p:cNvPr id="23" name="Shape 21"/>
+          <p:cNvSpPr/>
+          <p:nvPr/>
+        </p:nvSpPr>
+        <p:spPr>
+          <a:xfrm>
+            <a:off x="6519672" y="2258568"/>
+            <a:ext cx="1828800" cy="292608"/>
+          </a:xfrm>
+          <a:prstGeom prst="rect">
+            <a:avLst>
+              <a:gd name="adj" fmla="val 25000"/>
+            </a:avLst>
+          </a:prstGeom>
+          <a:solidFill>
+            <a:srgbClr val="CCFBF1"/>
+          </a:solidFill>
+          <a:ln w="19050">
+            <a:solidFill>
+              <a:srgbClr val="0D9488"/>
+            </a:solidFill>
+            <a:prstDash val="solid"/>
+          </a:ln>
+          <a:effectLst>
+            <a:outerShdw sx="100000" sy="100000" kx="0" ky="0" algn="bl" rotWithShape="0" blurRad="101600" dist="38100" dir="8100000">
+              <a:srgbClr val="000000">
+                <a:alpha val="12000"/>
+              </a:srgbClr>
+            </a:outerShdw>
+          </a:effectLst>
+        </p:spPr>
+      </p:sp>
+      <p:sp>
+        <p:nvSpPr>
+          <p:cNvPr id="24" name="Text 22"/>
+          <p:cNvSpPr/>
+          <p:nvPr/>
+        </p:nvSpPr>
+        <p:spPr>
+          <a:xfrm>
+            <a:off x="6519672" y="2258568"/>
+            <a:ext cx="1828800" cy="292608"/>
+          </a:xfrm>
+          <a:prstGeom prst="rect">
+            <a:avLst/>
+          </a:prstGeom>
+          <a:noFill/>
+          <a:ln/>
+        </p:spPr>
+        <p:txBody>
+          <a:bodyPr wrap="square" lIns="0" tIns="0" rIns="0" bIns="0" rtlCol="0" anchor="ctr"/>
+          <a:lstStyle/>
+          <a:p>
+            <a:pPr algn="ctr" indent="0" marL="0">
+              <a:buNone/>
+            </a:pPr>
+            <a:r>
+              <a:rPr lang="en-US" sz="1300" b="1" dirty="0">
+                <a:solidFill>
+                  <a:srgbClr val="0F766E"/>
+                </a:solidFill>
+                <a:latin typeface="Trebuchet MS" pitchFamily="34" charset="0"/>
+                <a:ea typeface="Trebuchet MS" pitchFamily="34" charset="-122"/>
+                <a:cs typeface="Trebuchet MS" pitchFamily="34" charset="-120"/>
+              </a:rPr>
+              <a:t>meter</a:t>
+            </a:r>
+            <a:endParaRPr lang="en-US" sz="1300" dirty="0"/>
+          </a:p>
+        </p:txBody>
+      </p:sp>
+      <p:sp>
+        <p:nvSpPr>
+          <p:cNvPr id="25" name="Text 23"/>
+          <p:cNvSpPr/>
+          <p:nvPr/>
+        </p:nvSpPr>
+        <p:spPr>
+          <a:xfrm>
+            <a:off x="6519672" y="2569464"/>
+            <a:ext cx="1828800" cy="201168"/>
+          </a:xfrm>
+          <a:prstGeom prst="rect">
+            <a:avLst/>
+          </a:prstGeom>
+          <a:noFill/>
+          <a:ln/>
+        </p:spPr>
+        <p:txBody>
+          <a:bodyPr wrap="square" lIns="0" tIns="0" rIns="0" bIns="0" rtlCol="0" anchor="t"/>
+          <a:lstStyle/>
+          <a:p>
+            <a:pPr algn="ctr" indent="0" marL="0">
+              <a:buNone/>
+            </a:pPr>
+            <a:r>
+              <a:rPr lang="en-US" sz="850" dirty="0">
+                <a:solidFill>
+                  <a:srgbClr val="475569"/>
+                </a:solidFill>
+                <a:latin typeface="Calibri" pitchFamily="34" charset="0"/>
+                <a:ea typeface="Calibri" pitchFamily="34" charset="-122"/>
+                <a:cs typeface="Calibri" pitchFamily="34" charset="-120"/>
+              </a:rPr>
+              <a:t>measuring instrument</a:t>
+            </a:r>
+            <a:endParaRPr lang="en-US" sz="850" dirty="0"/>
+          </a:p>
+        </p:txBody>
+      </p:sp>
+      <p:sp>
+        <p:nvSpPr>
+          <p:cNvPr id="26" name="Shape 24"/>
           <p:cNvSpPr/>
           <p:nvPr/>
         </p:nvSpPr>
@@ -12962,7 +13113,7 @@
       </p:sp>
       <p:sp>
         <p:nvSpPr>
-          <p:cNvPr id="23" name="Text 21"/>
+          <p:cNvPr id="27" name="Text 25"/>
           <p:cNvSpPr/>
           <p:nvPr/>
         </p:nvSpPr>
@@ -13001,7 +13152,7 @@
       </p:sp>
       <p:sp>
         <p:nvSpPr>
-          <p:cNvPr id="24" name="Shape 22"/>
+          <p:cNvPr id="28" name="Shape 26"/>
           <p:cNvSpPr/>
           <p:nvPr/>
         </p:nvSpPr>
@@ -13028,7 +13179,7 @@
       </p:sp>
       <p:sp>
         <p:nvSpPr>
-          <p:cNvPr id="25" name="Text 23"/>
+          <p:cNvPr id="29" name="Text 27"/>
           <p:cNvSpPr/>
           <p:nvPr/>
         </p:nvSpPr>
@@ -13067,7 +13218,7 @@
       </p:sp>
       <p:sp>
         <p:nvSpPr>
-          <p:cNvPr id="26" name="Shape 24"/>
+          <p:cNvPr id="30" name="Shape 28"/>
           <p:cNvSpPr/>
           <p:nvPr/>
         </p:nvSpPr>
@@ -13094,7 +13245,7 @@
       </p:sp>
       <p:sp>
         <p:nvSpPr>
-          <p:cNvPr id="27" name="Text 25"/>
+          <p:cNvPr id="31" name="Text 29"/>
           <p:cNvSpPr/>
           <p:nvPr/>
         </p:nvSpPr>
@@ -13133,7 +13284,7 @@
       </p:sp>
       <p:sp>
         <p:nvSpPr>
-          <p:cNvPr id="28" name="Shape 26"/>
+          <p:cNvPr id="32" name="Shape 30"/>
           <p:cNvSpPr/>
           <p:nvPr/>
         </p:nvSpPr>
@@ -13160,7 +13311,7 @@
       </p:sp>
       <p:sp>
         <p:nvSpPr>
-          <p:cNvPr id="29" name="Text 27"/>
+          <p:cNvPr id="33" name="Text 31"/>
           <p:cNvSpPr/>
           <p:nvPr/>
         </p:nvSpPr>
@@ -13622,7 +13773,7 @@
                 <a:ea typeface="Trebuchet MS" pitchFamily="34" charset="-122"/>
                 <a:cs typeface="Trebuchet MS" pitchFamily="34" charset="-120"/>
               </a:rPr>
-              <a:t>perimeter</a:t>
+              <a:t>speedometer</a:t>
             </a:r>
             <a:endParaRPr lang="en-US" sz="2800" dirty="0"/>
           </a:p>
@@ -13702,7 +13853,7 @@
         </p:nvSpPr>
         <p:spPr>
           <a:xfrm>
-            <a:off x="2938272" y="2258568"/>
+            <a:off x="2221992" y="2258568"/>
             <a:ext cx="1828800" cy="292608"/>
           </a:xfrm>
           <a:prstGeom prst="rect">
@@ -13736,7 +13887,7 @@
         </p:nvSpPr>
         <p:spPr>
           <a:xfrm>
-            <a:off x="2938272" y="2258568"/>
+            <a:off x="2221992" y="2258568"/>
             <a:ext cx="1828800" cy="292608"/>
           </a:xfrm>
           <a:prstGeom prst="rect">
@@ -13761,7 +13912,7 @@
                 <a:ea typeface="Trebuchet MS" pitchFamily="34" charset="-122"/>
                 <a:cs typeface="Trebuchet MS" pitchFamily="34" charset="-120"/>
               </a:rPr>
-              <a:t>peri</a:t>
+              <a:t>speed</a:t>
             </a:r>
             <a:endParaRPr lang="en-US" sz="1300" dirty="0"/>
           </a:p>
@@ -13775,7 +13926,7 @@
         </p:nvSpPr>
         <p:spPr>
           <a:xfrm>
-            <a:off x="2938272" y="2569464"/>
+            <a:off x="2221992" y="2569464"/>
             <a:ext cx="1828800" cy="201168"/>
           </a:xfrm>
           <a:prstGeom prst="rect">
@@ -13800,7 +13951,7 @@
                 <a:ea typeface="Calibri" pitchFamily="34" charset="-122"/>
                 <a:cs typeface="Calibri" pitchFamily="34" charset="-120"/>
               </a:rPr>
-              <a:t>around</a:t>
+              <a:t>how fast</a:t>
             </a:r>
             <a:endParaRPr lang="en-US" sz="850" dirty="0"/>
           </a:p>
@@ -13814,7 +13965,7 @@
         </p:nvSpPr>
         <p:spPr>
           <a:xfrm>
-            <a:off x="5803392" y="2258568"/>
+            <a:off x="4370832" y="2258568"/>
             <a:ext cx="1828800" cy="292608"/>
           </a:xfrm>
           <a:prstGeom prst="rect">
@@ -13823,11 +13974,11 @@
             </a:avLst>
           </a:prstGeom>
           <a:solidFill>
-            <a:srgbClr val="CCFBF1"/>
+            <a:srgbClr val="FCE7F3"/>
           </a:solidFill>
           <a:ln w="19050">
             <a:solidFill>
-              <a:srgbClr val="0D9488"/>
+              <a:srgbClr val="DB2777"/>
             </a:solidFill>
             <a:prstDash val="solid"/>
           </a:ln>
@@ -13848,7 +13999,7 @@
         </p:nvSpPr>
         <p:spPr>
           <a:xfrm>
-            <a:off x="5803392" y="2258568"/>
+            <a:off x="4370832" y="2258568"/>
             <a:ext cx="1828800" cy="292608"/>
           </a:xfrm>
           <a:prstGeom prst="rect">
@@ -13867,13 +14018,13 @@
             <a:r>
               <a:rPr lang="en-US" sz="1300" b="1" dirty="0">
                 <a:solidFill>
-                  <a:srgbClr val="0F766E"/>
+                  <a:srgbClr val="9D174D"/>
                 </a:solidFill>
                 <a:latin typeface="Trebuchet MS" pitchFamily="34" charset="0"/>
                 <a:ea typeface="Trebuchet MS" pitchFamily="34" charset="-122"/>
                 <a:cs typeface="Trebuchet MS" pitchFamily="34" charset="-120"/>
               </a:rPr>
-              <a:t>meter</a:t>
+              <a:t>o</a:t>
             </a:r>
             <a:endParaRPr lang="en-US" sz="1300" dirty="0"/>
           </a:p>
@@ -13887,7 +14038,7 @@
         </p:nvSpPr>
         <p:spPr>
           <a:xfrm>
-            <a:off x="5803392" y="2569464"/>
+            <a:off x="4370832" y="2569464"/>
             <a:ext cx="1828800" cy="201168"/>
           </a:xfrm>
           <a:prstGeom prst="rect">
@@ -13912,7 +14063,7 @@
                 <a:ea typeface="Calibri" pitchFamily="34" charset="-122"/>
                 <a:cs typeface="Calibri" pitchFamily="34" charset="-120"/>
               </a:rPr>
-              <a:t>measure</a:t>
+              <a:t>connecting vowel</a:t>
             </a:r>
             <a:endParaRPr lang="en-US" sz="850" dirty="0"/>
           </a:p>
@@ -13920,7 +14071,158 @@
       </p:sp>
       <p:sp>
         <p:nvSpPr>
-          <p:cNvPr id="22" name="Shape 20"/>
+          <p:cNvPr id="22" name="Text 20"/>
+          <p:cNvSpPr/>
+          <p:nvPr/>
+        </p:nvSpPr>
+        <p:spPr>
+          <a:xfrm>
+            <a:off x="4370832" y="2752344"/>
+            <a:ext cx="1828800" cy="182880"/>
+          </a:xfrm>
+          <a:prstGeom prst="rect">
+            <a:avLst/>
+          </a:prstGeom>
+          <a:noFill/>
+          <a:ln/>
+        </p:spPr>
+        <p:txBody>
+          <a:bodyPr wrap="square" lIns="0" tIns="0" rIns="0" bIns="0" rtlCol="0" anchor="t"/>
+          <a:lstStyle/>
+          <a:p>
+            <a:pPr algn="ctr" indent="0" marL="0">
+              <a:buNone/>
+            </a:pPr>
+            <a:r>
+              <a:rPr lang="en-US" sz="700" i="1" dirty="0">
+                <a:solidFill>
+                  <a:srgbClr val="94A3B8"/>
+                </a:solidFill>
+                <a:latin typeface="Calibri" pitchFamily="34" charset="0"/>
+                <a:ea typeface="Calibri" pitchFamily="34" charset="-122"/>
+                <a:cs typeface="Calibri" pitchFamily="34" charset="-120"/>
+              </a:rPr>
+              <a:t>links base to root</a:t>
+            </a:r>
+            <a:endParaRPr lang="en-US" sz="700" dirty="0"/>
+          </a:p>
+        </p:txBody>
+      </p:sp>
+      <p:sp>
+        <p:nvSpPr>
+          <p:cNvPr id="23" name="Shape 21"/>
+          <p:cNvSpPr/>
+          <p:nvPr/>
+        </p:nvSpPr>
+        <p:spPr>
+          <a:xfrm>
+            <a:off x="6519672" y="2258568"/>
+            <a:ext cx="1828800" cy="292608"/>
+          </a:xfrm>
+          <a:prstGeom prst="rect">
+            <a:avLst>
+              <a:gd name="adj" fmla="val 25000"/>
+            </a:avLst>
+          </a:prstGeom>
+          <a:solidFill>
+            <a:srgbClr val="CCFBF1"/>
+          </a:solidFill>
+          <a:ln w="19050">
+            <a:solidFill>
+              <a:srgbClr val="0D9488"/>
+            </a:solidFill>
+            <a:prstDash val="solid"/>
+          </a:ln>
+          <a:effectLst>
+            <a:outerShdw sx="100000" sy="100000" kx="0" ky="0" algn="bl" rotWithShape="0" blurRad="101600" dist="38100" dir="8100000">
+              <a:srgbClr val="000000">
+                <a:alpha val="12000"/>
+              </a:srgbClr>
+            </a:outerShdw>
+          </a:effectLst>
+        </p:spPr>
+      </p:sp>
+      <p:sp>
+        <p:nvSpPr>
+          <p:cNvPr id="24" name="Text 22"/>
+          <p:cNvSpPr/>
+          <p:nvPr/>
+        </p:nvSpPr>
+        <p:spPr>
+          <a:xfrm>
+            <a:off x="6519672" y="2258568"/>
+            <a:ext cx="1828800" cy="292608"/>
+          </a:xfrm>
+          <a:prstGeom prst="rect">
+            <a:avLst/>
+          </a:prstGeom>
+          <a:noFill/>
+          <a:ln/>
+        </p:spPr>
+        <p:txBody>
+          <a:bodyPr wrap="square" lIns="0" tIns="0" rIns="0" bIns="0" rtlCol="0" anchor="ctr"/>
+          <a:lstStyle/>
+          <a:p>
+            <a:pPr algn="ctr" indent="0" marL="0">
+              <a:buNone/>
+            </a:pPr>
+            <a:r>
+              <a:rPr lang="en-US" sz="1300" b="1" dirty="0">
+                <a:solidFill>
+                  <a:srgbClr val="0F766E"/>
+                </a:solidFill>
+                <a:latin typeface="Trebuchet MS" pitchFamily="34" charset="0"/>
+                <a:ea typeface="Trebuchet MS" pitchFamily="34" charset="-122"/>
+                <a:cs typeface="Trebuchet MS" pitchFamily="34" charset="-120"/>
+              </a:rPr>
+              <a:t>meter</a:t>
+            </a:r>
+            <a:endParaRPr lang="en-US" sz="1300" dirty="0"/>
+          </a:p>
+        </p:txBody>
+      </p:sp>
+      <p:sp>
+        <p:nvSpPr>
+          <p:cNvPr id="25" name="Text 23"/>
+          <p:cNvSpPr/>
+          <p:nvPr/>
+        </p:nvSpPr>
+        <p:spPr>
+          <a:xfrm>
+            <a:off x="6519672" y="2569464"/>
+            <a:ext cx="1828800" cy="201168"/>
+          </a:xfrm>
+          <a:prstGeom prst="rect">
+            <a:avLst/>
+          </a:prstGeom>
+          <a:noFill/>
+          <a:ln/>
+        </p:spPr>
+        <p:txBody>
+          <a:bodyPr wrap="square" lIns="0" tIns="0" rIns="0" bIns="0" rtlCol="0" anchor="t"/>
+          <a:lstStyle/>
+          <a:p>
+            <a:pPr algn="ctr" indent="0" marL="0">
+              <a:buNone/>
+            </a:pPr>
+            <a:r>
+              <a:rPr lang="en-US" sz="850" dirty="0">
+                <a:solidFill>
+                  <a:srgbClr val="475569"/>
+                </a:solidFill>
+                <a:latin typeface="Calibri" pitchFamily="34" charset="0"/>
+                <a:ea typeface="Calibri" pitchFamily="34" charset="-122"/>
+                <a:cs typeface="Calibri" pitchFamily="34" charset="-120"/>
+              </a:rPr>
+              <a:t>measuring instrument</a:t>
+            </a:r>
+            <a:endParaRPr lang="en-US" sz="850" dirty="0"/>
+          </a:p>
+        </p:txBody>
+      </p:sp>
+      <p:sp>
+        <p:nvSpPr>
+          <p:cNvPr id="26" name="Shape 24"/>
           <p:cNvSpPr/>
           <p:nvPr/>
         </p:nvSpPr>
@@ -13947,7 +14249,7 @@
       </p:sp>
       <p:sp>
         <p:nvSpPr>
-          <p:cNvPr id="23" name="Text 21"/>
+          <p:cNvPr id="27" name="Text 25"/>
           <p:cNvSpPr/>
           <p:nvPr/>
         </p:nvSpPr>
@@ -13986,7 +14288,7 @@
       </p:sp>
       <p:sp>
         <p:nvSpPr>
-          <p:cNvPr id="24" name="Shape 22"/>
+          <p:cNvPr id="28" name="Shape 26"/>
           <p:cNvSpPr/>
           <p:nvPr/>
         </p:nvSpPr>
@@ -14013,7 +14315,7 @@
       </p:sp>
       <p:sp>
         <p:nvSpPr>
-          <p:cNvPr id="25" name="Shape 23"/>
+          <p:cNvPr id="29" name="Shape 27"/>
           <p:cNvSpPr/>
           <p:nvPr/>
         </p:nvSpPr>
@@ -14040,7 +14342,7 @@
       </p:sp>
       <p:sp>
         <p:nvSpPr>
-          <p:cNvPr id="26" name="Text 24"/>
+          <p:cNvPr id="30" name="Text 28"/>
           <p:cNvSpPr/>
           <p:nvPr/>
         </p:nvSpPr>
@@ -14071,7 +14373,7 @@
                 <a:ea typeface="Trebuchet MS" pitchFamily="34" charset="-122"/>
                 <a:cs typeface="Trebuchet MS" pitchFamily="34" charset="-120"/>
               </a:rPr>
-              <a:t>per</a:t>
+              <a:t>speed</a:t>
             </a:r>
             <a:endParaRPr lang="en-US" sz="1400" dirty="0"/>
           </a:p>
@@ -14079,7 +14381,7 @@
       </p:sp>
       <p:sp>
         <p:nvSpPr>
-          <p:cNvPr id="27" name="Text 25"/>
+          <p:cNvPr id="31" name="Text 29"/>
           <p:cNvSpPr/>
           <p:nvPr/>
         </p:nvSpPr>
@@ -14118,7 +14420,7 @@
       </p:sp>
       <p:sp>
         <p:nvSpPr>
-          <p:cNvPr id="28" name="Shape 26"/>
+          <p:cNvPr id="32" name="Shape 30"/>
           <p:cNvSpPr/>
           <p:nvPr/>
         </p:nvSpPr>
@@ -14145,7 +14447,7 @@
       </p:sp>
       <p:sp>
         <p:nvSpPr>
-          <p:cNvPr id="29" name="Text 27"/>
+          <p:cNvPr id="33" name="Text 31"/>
           <p:cNvSpPr/>
           <p:nvPr/>
         </p:nvSpPr>
@@ -14176,7 +14478,7 @@
                 <a:ea typeface="Trebuchet MS" pitchFamily="34" charset="-122"/>
                 <a:cs typeface="Trebuchet MS" pitchFamily="34" charset="-120"/>
               </a:rPr>
-              <a:t>i</a:t>
+              <a:t>om</a:t>
             </a:r>
             <a:endParaRPr lang="en-US" sz="1400" dirty="0"/>
           </a:p>
@@ -14184,7 +14486,7 @@
       </p:sp>
       <p:sp>
         <p:nvSpPr>
-          <p:cNvPr id="30" name="Text 28"/>
+          <p:cNvPr id="34" name="Text 32"/>
           <p:cNvSpPr/>
           <p:nvPr/>
         </p:nvSpPr>
@@ -14223,7 +14525,7 @@
       </p:sp>
       <p:sp>
         <p:nvSpPr>
-          <p:cNvPr id="31" name="Shape 29"/>
+          <p:cNvPr id="35" name="Shape 33"/>
           <p:cNvSpPr/>
           <p:nvPr/>
         </p:nvSpPr>
@@ -14250,7 +14552,7 @@
       </p:sp>
       <p:sp>
         <p:nvSpPr>
-          <p:cNvPr id="32" name="Text 30"/>
+          <p:cNvPr id="36" name="Text 34"/>
           <p:cNvSpPr/>
           <p:nvPr/>
         </p:nvSpPr>
@@ -14281,7 +14583,7 @@
                 <a:ea typeface="Trebuchet MS" pitchFamily="34" charset="-122"/>
                 <a:cs typeface="Trebuchet MS" pitchFamily="34" charset="-120"/>
               </a:rPr>
-              <a:t>me</a:t>
+              <a:t>e</a:t>
             </a:r>
             <a:endParaRPr lang="en-US" sz="1400" dirty="0"/>
           </a:p>
@@ -14289,7 +14591,7 @@
       </p:sp>
       <p:sp>
         <p:nvSpPr>
-          <p:cNvPr id="33" name="Text 31"/>
+          <p:cNvPr id="37" name="Text 35"/>
           <p:cNvSpPr/>
           <p:nvPr/>
         </p:nvSpPr>
@@ -14328,7 +14630,7 @@
       </p:sp>
       <p:sp>
         <p:nvSpPr>
-          <p:cNvPr id="34" name="Shape 32"/>
+          <p:cNvPr id="38" name="Shape 36"/>
           <p:cNvSpPr/>
           <p:nvPr/>
         </p:nvSpPr>
@@ -14355,7 +14657,7 @@
       </p:sp>
       <p:sp>
         <p:nvSpPr>
-          <p:cNvPr id="35" name="Text 33"/>
+          <p:cNvPr id="39" name="Text 37"/>
           <p:cNvSpPr/>
           <p:nvPr/>
         </p:nvSpPr>
@@ -14394,7 +14696,7 @@
       </p:sp>
       <p:sp>
         <p:nvSpPr>
-          <p:cNvPr id="36" name="Shape 34"/>
+          <p:cNvPr id="40" name="Shape 38"/>
           <p:cNvSpPr/>
           <p:nvPr/>
         </p:nvSpPr>
@@ -14421,7 +14723,7 @@
       </p:sp>
       <p:sp>
         <p:nvSpPr>
-          <p:cNvPr id="37" name="Text 35"/>
+          <p:cNvPr id="41" name="Text 39"/>
           <p:cNvSpPr/>
           <p:nvPr/>
         </p:nvSpPr>
@@ -14460,7 +14762,7 @@
       </p:sp>
       <p:sp>
         <p:nvSpPr>
-          <p:cNvPr id="38" name="Shape 36"/>
+          <p:cNvPr id="42" name="Shape 40"/>
           <p:cNvSpPr/>
           <p:nvPr/>
         </p:nvSpPr>
@@ -14487,7 +14789,7 @@
       </p:sp>
       <p:sp>
         <p:nvSpPr>
-          <p:cNvPr id="39" name="Text 37"/>
+          <p:cNvPr id="43" name="Text 41"/>
           <p:cNvSpPr/>
           <p:nvPr/>
         </p:nvSpPr>
@@ -15214,7 +15516,7 @@
                 <a:ea typeface="Trebuchet MS" pitchFamily="34" charset="-122"/>
                 <a:cs typeface="Trebuchet MS" pitchFamily="34" charset="-120"/>
               </a:rPr>
-              <a:t>perimeter</a:t>
+              <a:t>speedometer</a:t>
             </a:r>
             <a:endParaRPr lang="en-US" sz="2800" dirty="0"/>
           </a:p>
@@ -15294,7 +15596,7 @@
         </p:nvSpPr>
         <p:spPr>
           <a:xfrm>
-            <a:off x="2938272" y="2258568"/>
+            <a:off x="2221992" y="2258568"/>
             <a:ext cx="1828800" cy="292608"/>
           </a:xfrm>
           <a:prstGeom prst="rect">
@@ -15328,7 +15630,7 @@
         </p:nvSpPr>
         <p:spPr>
           <a:xfrm>
-            <a:off x="2938272" y="2258568"/>
+            <a:off x="2221992" y="2258568"/>
             <a:ext cx="1828800" cy="292608"/>
           </a:xfrm>
           <a:prstGeom prst="rect">
@@ -15353,7 +15655,7 @@
                 <a:ea typeface="Trebuchet MS" pitchFamily="34" charset="-122"/>
                 <a:cs typeface="Trebuchet MS" pitchFamily="34" charset="-120"/>
               </a:rPr>
-              <a:t>peri</a:t>
+              <a:t>speed</a:t>
             </a:r>
             <a:endParaRPr lang="en-US" sz="1300" dirty="0"/>
           </a:p>
@@ -15367,7 +15669,7 @@
         </p:nvSpPr>
         <p:spPr>
           <a:xfrm>
-            <a:off x="2938272" y="2569464"/>
+            <a:off x="2221992" y="2569464"/>
             <a:ext cx="1828800" cy="201168"/>
           </a:xfrm>
           <a:prstGeom prst="rect">
@@ -15392,7 +15694,7 @@
                 <a:ea typeface="Calibri" pitchFamily="34" charset="-122"/>
                 <a:cs typeface="Calibri" pitchFamily="34" charset="-120"/>
               </a:rPr>
-              <a:t>around</a:t>
+              <a:t>how fast</a:t>
             </a:r>
             <a:endParaRPr lang="en-US" sz="850" dirty="0"/>
           </a:p>
@@ -15406,7 +15708,7 @@
         </p:nvSpPr>
         <p:spPr>
           <a:xfrm>
-            <a:off x="5803392" y="2258568"/>
+            <a:off x="4370832" y="2258568"/>
             <a:ext cx="1828800" cy="292608"/>
           </a:xfrm>
           <a:prstGeom prst="rect">
@@ -15415,11 +15717,11 @@
             </a:avLst>
           </a:prstGeom>
           <a:solidFill>
-            <a:srgbClr val="CCFBF1"/>
+            <a:srgbClr val="FCE7F3"/>
           </a:solidFill>
           <a:ln w="19050">
             <a:solidFill>
-              <a:srgbClr val="0D9488"/>
+              <a:srgbClr val="DB2777"/>
             </a:solidFill>
             <a:prstDash val="solid"/>
           </a:ln>
@@ -15440,7 +15742,7 @@
         </p:nvSpPr>
         <p:spPr>
           <a:xfrm>
-            <a:off x="5803392" y="2258568"/>
+            <a:off x="4370832" y="2258568"/>
             <a:ext cx="1828800" cy="292608"/>
           </a:xfrm>
           <a:prstGeom prst="rect">
@@ -15459,13 +15761,13 @@
             <a:r>
               <a:rPr lang="en-US" sz="1300" b="1" dirty="0">
                 <a:solidFill>
-                  <a:srgbClr val="0F766E"/>
+                  <a:srgbClr val="9D174D"/>
                 </a:solidFill>
                 <a:latin typeface="Trebuchet MS" pitchFamily="34" charset="0"/>
                 <a:ea typeface="Trebuchet MS" pitchFamily="34" charset="-122"/>
                 <a:cs typeface="Trebuchet MS" pitchFamily="34" charset="-120"/>
               </a:rPr>
-              <a:t>meter</a:t>
+              <a:t>o</a:t>
             </a:r>
             <a:endParaRPr lang="en-US" sz="1300" dirty="0"/>
           </a:p>
@@ -15479,7 +15781,7 @@
         </p:nvSpPr>
         <p:spPr>
           <a:xfrm>
-            <a:off x="5803392" y="2569464"/>
+            <a:off x="4370832" y="2569464"/>
             <a:ext cx="1828800" cy="201168"/>
           </a:xfrm>
           <a:prstGeom prst="rect">
@@ -15504,7 +15806,7 @@
                 <a:ea typeface="Calibri" pitchFamily="34" charset="-122"/>
                 <a:cs typeface="Calibri" pitchFamily="34" charset="-120"/>
               </a:rPr>
-              <a:t>measure</a:t>
+              <a:t>connecting vowel</a:t>
             </a:r>
             <a:endParaRPr lang="en-US" sz="850" dirty="0"/>
           </a:p>
@@ -15512,7 +15814,158 @@
       </p:sp>
       <p:sp>
         <p:nvSpPr>
-          <p:cNvPr id="22" name="Shape 20"/>
+          <p:cNvPr id="22" name="Text 20"/>
+          <p:cNvSpPr/>
+          <p:nvPr/>
+        </p:nvSpPr>
+        <p:spPr>
+          <a:xfrm>
+            <a:off x="4370832" y="2752344"/>
+            <a:ext cx="1828800" cy="182880"/>
+          </a:xfrm>
+          <a:prstGeom prst="rect">
+            <a:avLst/>
+          </a:prstGeom>
+          <a:noFill/>
+          <a:ln/>
+        </p:spPr>
+        <p:txBody>
+          <a:bodyPr wrap="square" lIns="0" tIns="0" rIns="0" bIns="0" rtlCol="0" anchor="t"/>
+          <a:lstStyle/>
+          <a:p>
+            <a:pPr algn="ctr" indent="0" marL="0">
+              <a:buNone/>
+            </a:pPr>
+            <a:r>
+              <a:rPr lang="en-US" sz="700" i="1" dirty="0">
+                <a:solidFill>
+                  <a:srgbClr val="94A3B8"/>
+                </a:solidFill>
+                <a:latin typeface="Calibri" pitchFamily="34" charset="0"/>
+                <a:ea typeface="Calibri" pitchFamily="34" charset="-122"/>
+                <a:cs typeface="Calibri" pitchFamily="34" charset="-120"/>
+              </a:rPr>
+              <a:t>links base to root</a:t>
+            </a:r>
+            <a:endParaRPr lang="en-US" sz="700" dirty="0"/>
+          </a:p>
+        </p:txBody>
+      </p:sp>
+      <p:sp>
+        <p:nvSpPr>
+          <p:cNvPr id="23" name="Shape 21"/>
+          <p:cNvSpPr/>
+          <p:nvPr/>
+        </p:nvSpPr>
+        <p:spPr>
+          <a:xfrm>
+            <a:off x="6519672" y="2258568"/>
+            <a:ext cx="1828800" cy="292608"/>
+          </a:xfrm>
+          <a:prstGeom prst="rect">
+            <a:avLst>
+              <a:gd name="adj" fmla="val 25000"/>
+            </a:avLst>
+          </a:prstGeom>
+          <a:solidFill>
+            <a:srgbClr val="CCFBF1"/>
+          </a:solidFill>
+          <a:ln w="19050">
+            <a:solidFill>
+              <a:srgbClr val="0D9488"/>
+            </a:solidFill>
+            <a:prstDash val="solid"/>
+          </a:ln>
+          <a:effectLst>
+            <a:outerShdw sx="100000" sy="100000" kx="0" ky="0" algn="bl" rotWithShape="0" blurRad="101600" dist="38100" dir="8100000">
+              <a:srgbClr val="000000">
+                <a:alpha val="12000"/>
+              </a:srgbClr>
+            </a:outerShdw>
+          </a:effectLst>
+        </p:spPr>
+      </p:sp>
+      <p:sp>
+        <p:nvSpPr>
+          <p:cNvPr id="24" name="Text 22"/>
+          <p:cNvSpPr/>
+          <p:nvPr/>
+        </p:nvSpPr>
+        <p:spPr>
+          <a:xfrm>
+            <a:off x="6519672" y="2258568"/>
+            <a:ext cx="1828800" cy="292608"/>
+          </a:xfrm>
+          <a:prstGeom prst="rect">
+            <a:avLst/>
+          </a:prstGeom>
+          <a:noFill/>
+          <a:ln/>
+        </p:spPr>
+        <p:txBody>
+          <a:bodyPr wrap="square" lIns="0" tIns="0" rIns="0" bIns="0" rtlCol="0" anchor="ctr"/>
+          <a:lstStyle/>
+          <a:p>
+            <a:pPr algn="ctr" indent="0" marL="0">
+              <a:buNone/>
+            </a:pPr>
+            <a:r>
+              <a:rPr lang="en-US" sz="1300" b="1" dirty="0">
+                <a:solidFill>
+                  <a:srgbClr val="0F766E"/>
+                </a:solidFill>
+                <a:latin typeface="Trebuchet MS" pitchFamily="34" charset="0"/>
+                <a:ea typeface="Trebuchet MS" pitchFamily="34" charset="-122"/>
+                <a:cs typeface="Trebuchet MS" pitchFamily="34" charset="-120"/>
+              </a:rPr>
+              <a:t>meter</a:t>
+            </a:r>
+            <a:endParaRPr lang="en-US" sz="1300" dirty="0"/>
+          </a:p>
+        </p:txBody>
+      </p:sp>
+      <p:sp>
+        <p:nvSpPr>
+          <p:cNvPr id="25" name="Text 23"/>
+          <p:cNvSpPr/>
+          <p:nvPr/>
+        </p:nvSpPr>
+        <p:spPr>
+          <a:xfrm>
+            <a:off x="6519672" y="2569464"/>
+            <a:ext cx="1828800" cy="201168"/>
+          </a:xfrm>
+          <a:prstGeom prst="rect">
+            <a:avLst/>
+          </a:prstGeom>
+          <a:noFill/>
+          <a:ln/>
+        </p:spPr>
+        <p:txBody>
+          <a:bodyPr wrap="square" lIns="0" tIns="0" rIns="0" bIns="0" rtlCol="0" anchor="t"/>
+          <a:lstStyle/>
+          <a:p>
+            <a:pPr algn="ctr" indent="0" marL="0">
+              <a:buNone/>
+            </a:pPr>
+            <a:r>
+              <a:rPr lang="en-US" sz="850" dirty="0">
+                <a:solidFill>
+                  <a:srgbClr val="475569"/>
+                </a:solidFill>
+                <a:latin typeface="Calibri" pitchFamily="34" charset="0"/>
+                <a:ea typeface="Calibri" pitchFamily="34" charset="-122"/>
+                <a:cs typeface="Calibri" pitchFamily="34" charset="-120"/>
+              </a:rPr>
+              <a:t>measuring instrument</a:t>
+            </a:r>
+            <a:endParaRPr lang="en-US" sz="850" dirty="0"/>
+          </a:p>
+        </p:txBody>
+      </p:sp>
+      <p:sp>
+        <p:nvSpPr>
+          <p:cNvPr id="26" name="Shape 24"/>
           <p:cNvSpPr/>
           <p:nvPr/>
         </p:nvSpPr>
@@ -15539,7 +15992,7 @@
       </p:sp>
       <p:sp>
         <p:nvSpPr>
-          <p:cNvPr id="23" name="Text 21"/>
+          <p:cNvPr id="27" name="Text 25"/>
           <p:cNvSpPr/>
           <p:nvPr/>
         </p:nvSpPr>
@@ -15578,7 +16031,7 @@
       </p:sp>
       <p:sp>
         <p:nvSpPr>
-          <p:cNvPr id="24" name="Shape 22"/>
+          <p:cNvPr id="28" name="Shape 26"/>
           <p:cNvSpPr/>
           <p:nvPr/>
         </p:nvSpPr>
@@ -15605,7 +16058,7 @@
       </p:sp>
       <p:sp>
         <p:nvSpPr>
-          <p:cNvPr id="25" name="Shape 23"/>
+          <p:cNvPr id="29" name="Shape 27"/>
           <p:cNvSpPr/>
           <p:nvPr/>
         </p:nvSpPr>
@@ -15632,7 +16085,7 @@
       </p:sp>
       <p:sp>
         <p:nvSpPr>
-          <p:cNvPr id="26" name="Text 24"/>
+          <p:cNvPr id="30" name="Text 28"/>
           <p:cNvSpPr/>
           <p:nvPr/>
         </p:nvSpPr>
@@ -15663,7 +16116,7 @@
                 <a:ea typeface="Trebuchet MS" pitchFamily="34" charset="-122"/>
                 <a:cs typeface="Trebuchet MS" pitchFamily="34" charset="-120"/>
               </a:rPr>
-              <a:t>per</a:t>
+              <a:t>speed</a:t>
             </a:r>
             <a:endParaRPr lang="en-US" sz="1400" dirty="0"/>
           </a:p>
@@ -15671,7 +16124,7 @@
       </p:sp>
       <p:sp>
         <p:nvSpPr>
-          <p:cNvPr id="27" name="Text 25"/>
+          <p:cNvPr id="31" name="Text 29"/>
           <p:cNvSpPr/>
           <p:nvPr/>
         </p:nvSpPr>
@@ -15710,7 +16163,7 @@
       </p:sp>
       <p:sp>
         <p:nvSpPr>
-          <p:cNvPr id="28" name="Shape 26"/>
+          <p:cNvPr id="32" name="Shape 30"/>
           <p:cNvSpPr/>
           <p:nvPr/>
         </p:nvSpPr>
@@ -15737,7 +16190,7 @@
       </p:sp>
       <p:sp>
         <p:nvSpPr>
-          <p:cNvPr id="29" name="Text 27"/>
+          <p:cNvPr id="33" name="Text 31"/>
           <p:cNvSpPr/>
           <p:nvPr/>
         </p:nvSpPr>
@@ -15768,7 +16221,7 @@
                 <a:ea typeface="Trebuchet MS" pitchFamily="34" charset="-122"/>
                 <a:cs typeface="Trebuchet MS" pitchFamily="34" charset="-120"/>
               </a:rPr>
-              <a:t>i</a:t>
+              <a:t>om</a:t>
             </a:r>
             <a:endParaRPr lang="en-US" sz="1400" dirty="0"/>
           </a:p>
@@ -15776,7 +16229,7 @@
       </p:sp>
       <p:sp>
         <p:nvSpPr>
-          <p:cNvPr id="30" name="Text 28"/>
+          <p:cNvPr id="34" name="Text 32"/>
           <p:cNvSpPr/>
           <p:nvPr/>
         </p:nvSpPr>
@@ -15815,7 +16268,7 @@
       </p:sp>
       <p:sp>
         <p:nvSpPr>
-          <p:cNvPr id="31" name="Shape 29"/>
+          <p:cNvPr id="35" name="Shape 33"/>
           <p:cNvSpPr/>
           <p:nvPr/>
         </p:nvSpPr>
@@ -15842,7 +16295,7 @@
       </p:sp>
       <p:sp>
         <p:nvSpPr>
-          <p:cNvPr id="32" name="Text 30"/>
+          <p:cNvPr id="36" name="Text 34"/>
           <p:cNvSpPr/>
           <p:nvPr/>
         </p:nvSpPr>
@@ -15873,7 +16326,7 @@
                 <a:ea typeface="Trebuchet MS" pitchFamily="34" charset="-122"/>
                 <a:cs typeface="Trebuchet MS" pitchFamily="34" charset="-120"/>
               </a:rPr>
-              <a:t>me</a:t>
+              <a:t>e</a:t>
             </a:r>
             <a:endParaRPr lang="en-US" sz="1400" dirty="0"/>
           </a:p>
@@ -15881,7 +16334,7 @@
       </p:sp>
       <p:sp>
         <p:nvSpPr>
-          <p:cNvPr id="33" name="Text 31"/>
+          <p:cNvPr id="37" name="Text 35"/>
           <p:cNvSpPr/>
           <p:nvPr/>
         </p:nvSpPr>
@@ -15920,7 +16373,7 @@
       </p:sp>
       <p:sp>
         <p:nvSpPr>
-          <p:cNvPr id="34" name="Shape 32"/>
+          <p:cNvPr id="38" name="Shape 36"/>
           <p:cNvSpPr/>
           <p:nvPr/>
         </p:nvSpPr>
@@ -15947,7 +16400,7 @@
       </p:sp>
       <p:sp>
         <p:nvSpPr>
-          <p:cNvPr id="35" name="Text 33"/>
+          <p:cNvPr id="39" name="Text 37"/>
           <p:cNvSpPr/>
           <p:nvPr/>
         </p:nvSpPr>
@@ -15986,7 +16439,7 @@
       </p:sp>
       <p:sp>
         <p:nvSpPr>
-          <p:cNvPr id="36" name="Shape 34"/>
+          <p:cNvPr id="40" name="Shape 38"/>
           <p:cNvSpPr/>
           <p:nvPr/>
         </p:nvSpPr>
@@ -16013,7 +16466,7 @@
       </p:sp>
       <p:sp>
         <p:nvSpPr>
-          <p:cNvPr id="37" name="Text 35"/>
+          <p:cNvPr id="41" name="Text 39"/>
           <p:cNvSpPr/>
           <p:nvPr/>
         </p:nvSpPr>
@@ -16052,7 +16505,7 @@
       </p:sp>
       <p:sp>
         <p:nvSpPr>
-          <p:cNvPr id="38" name="Shape 36"/>
+          <p:cNvPr id="42" name="Shape 40"/>
           <p:cNvSpPr/>
           <p:nvPr/>
         </p:nvSpPr>
@@ -16079,14 +16532,14 @@
       </p:sp>
       <p:sp>
         <p:nvSpPr>
-          <p:cNvPr id="39" name="Shape 37"/>
-          <p:cNvSpPr/>
-          <p:nvPr/>
-        </p:nvSpPr>
-        <p:spPr>
-          <a:xfrm>
-            <a:off x="2124837" y="4169664"/>
-            <a:ext cx="685800" cy="475488"/>
+          <p:cNvPr id="43" name="Shape 41"/>
+          <p:cNvSpPr/>
+          <p:nvPr/>
+        </p:nvSpPr>
+        <p:spPr>
+          <a:xfrm>
+            <a:off x="1951330" y="4169664"/>
+            <a:ext cx="676656" cy="475488"/>
           </a:xfrm>
           <a:prstGeom prst="rect">
             <a:avLst>
@@ -16106,14 +16559,14 @@
       </p:sp>
       <p:sp>
         <p:nvSpPr>
-          <p:cNvPr id="40" name="Text 38"/>
-          <p:cNvSpPr/>
-          <p:nvPr/>
-        </p:nvSpPr>
-        <p:spPr>
-          <a:xfrm>
-            <a:off x="2124837" y="4169664"/>
-            <a:ext cx="685800" cy="475488"/>
+          <p:cNvPr id="44" name="Text 42"/>
+          <p:cNvSpPr/>
+          <p:nvPr/>
+        </p:nvSpPr>
+        <p:spPr>
+          <a:xfrm>
+            <a:off x="1951330" y="4169664"/>
+            <a:ext cx="676656" cy="475488"/>
           </a:xfrm>
           <a:prstGeom prst="rect">
             <a:avLst/>
@@ -16137,7 +16590,7 @@
                 <a:ea typeface="Trebuchet MS" pitchFamily="34" charset="-122"/>
                 <a:cs typeface="Trebuchet MS" pitchFamily="34" charset="-120"/>
               </a:rPr>
-              <a:t>p</a:t>
+              <a:t>s</a:t>
             </a:r>
             <a:endParaRPr lang="en-US" sz="900" dirty="0"/>
           </a:p>
@@ -16145,14 +16598,14 @@
       </p:sp>
       <p:sp>
         <p:nvSpPr>
-          <p:cNvPr id="41" name="Shape 39"/>
-          <p:cNvSpPr/>
-          <p:nvPr/>
-        </p:nvSpPr>
-        <p:spPr>
-          <a:xfrm>
-            <a:off x="3033522" y="4169664"/>
-            <a:ext cx="685800" cy="475488"/>
+          <p:cNvPr id="45" name="Shape 43"/>
+          <p:cNvSpPr/>
+          <p:nvPr/>
+        </p:nvSpPr>
+        <p:spPr>
+          <a:xfrm>
+            <a:off x="2677363" y="4169664"/>
+            <a:ext cx="676656" cy="475488"/>
           </a:xfrm>
           <a:prstGeom prst="rect">
             <a:avLst>
@@ -16172,14 +16625,14 @@
       </p:sp>
       <p:sp>
         <p:nvSpPr>
-          <p:cNvPr id="42" name="Text 40"/>
-          <p:cNvSpPr/>
-          <p:nvPr/>
-        </p:nvSpPr>
-        <p:spPr>
-          <a:xfrm>
-            <a:off x="3033522" y="4169664"/>
-            <a:ext cx="685800" cy="475488"/>
+          <p:cNvPr id="46" name="Text 44"/>
+          <p:cNvSpPr/>
+          <p:nvPr/>
+        </p:nvSpPr>
+        <p:spPr>
+          <a:xfrm>
+            <a:off x="2677363" y="4169664"/>
+            <a:ext cx="676656" cy="475488"/>
           </a:xfrm>
           <a:prstGeom prst="rect">
             <a:avLst/>
@@ -16203,7 +16656,7 @@
                 <a:ea typeface="Trebuchet MS" pitchFamily="34" charset="-122"/>
                 <a:cs typeface="Trebuchet MS" pitchFamily="34" charset="-120"/>
               </a:rPr>
-              <a:t>er</a:t>
+              <a:t>p</a:t>
             </a:r>
             <a:endParaRPr lang="en-US" sz="900" dirty="0"/>
           </a:p>
@@ -16211,14 +16664,14 @@
       </p:sp>
       <p:sp>
         <p:nvSpPr>
-          <p:cNvPr id="43" name="Shape 41"/>
-          <p:cNvSpPr/>
-          <p:nvPr/>
-        </p:nvSpPr>
-        <p:spPr>
-          <a:xfrm>
-            <a:off x="3942207" y="4169664"/>
-            <a:ext cx="685800" cy="475488"/>
+          <p:cNvPr id="47" name="Shape 45"/>
+          <p:cNvSpPr/>
+          <p:nvPr/>
+        </p:nvSpPr>
+        <p:spPr>
+          <a:xfrm>
+            <a:off x="3403397" y="4169664"/>
+            <a:ext cx="676656" cy="475488"/>
           </a:xfrm>
           <a:prstGeom prst="rect">
             <a:avLst>
@@ -16238,14 +16691,14 @@
       </p:sp>
       <p:sp>
         <p:nvSpPr>
-          <p:cNvPr id="44" name="Text 42"/>
-          <p:cNvSpPr/>
-          <p:nvPr/>
-        </p:nvSpPr>
-        <p:spPr>
-          <a:xfrm>
-            <a:off x="3942207" y="4169664"/>
-            <a:ext cx="685800" cy="475488"/>
+          <p:cNvPr id="48" name="Text 46"/>
+          <p:cNvSpPr/>
+          <p:nvPr/>
+        </p:nvSpPr>
+        <p:spPr>
+          <a:xfrm>
+            <a:off x="3403397" y="4169664"/>
+            <a:ext cx="676656" cy="475488"/>
           </a:xfrm>
           <a:prstGeom prst="rect">
             <a:avLst/>
@@ -16269,7 +16722,7 @@
                 <a:ea typeface="Trebuchet MS" pitchFamily="34" charset="-122"/>
                 <a:cs typeface="Trebuchet MS" pitchFamily="34" charset="-120"/>
               </a:rPr>
-              <a:t>i</a:t>
+              <a:t>ee</a:t>
             </a:r>
             <a:endParaRPr lang="en-US" sz="900" dirty="0"/>
           </a:p>
@@ -16277,14 +16730,14 @@
       </p:sp>
       <p:sp>
         <p:nvSpPr>
-          <p:cNvPr id="45" name="Shape 43"/>
-          <p:cNvSpPr/>
-          <p:nvPr/>
-        </p:nvSpPr>
-        <p:spPr>
-          <a:xfrm>
-            <a:off x="4850892" y="4169664"/>
-            <a:ext cx="685800" cy="475488"/>
+          <p:cNvPr id="49" name="Shape 47"/>
+          <p:cNvSpPr/>
+          <p:nvPr/>
+        </p:nvSpPr>
+        <p:spPr>
+          <a:xfrm>
+            <a:off x="4129430" y="4169664"/>
+            <a:ext cx="676656" cy="475488"/>
           </a:xfrm>
           <a:prstGeom prst="rect">
             <a:avLst>
@@ -16304,14 +16757,14 @@
       </p:sp>
       <p:sp>
         <p:nvSpPr>
-          <p:cNvPr id="46" name="Text 44"/>
-          <p:cNvSpPr/>
-          <p:nvPr/>
-        </p:nvSpPr>
-        <p:spPr>
-          <a:xfrm>
-            <a:off x="4850892" y="4169664"/>
-            <a:ext cx="685800" cy="475488"/>
+          <p:cNvPr id="50" name="Text 48"/>
+          <p:cNvSpPr/>
+          <p:nvPr/>
+        </p:nvSpPr>
+        <p:spPr>
+          <a:xfrm>
+            <a:off x="4129430" y="4169664"/>
+            <a:ext cx="676656" cy="475488"/>
           </a:xfrm>
           <a:prstGeom prst="rect">
             <a:avLst/>
@@ -16335,7 +16788,7 @@
                 <a:ea typeface="Trebuchet MS" pitchFamily="34" charset="-122"/>
                 <a:cs typeface="Trebuchet MS" pitchFamily="34" charset="-120"/>
               </a:rPr>
-              <a:t>m</a:t>
+              <a:t>d</a:t>
             </a:r>
             <a:endParaRPr lang="en-US" sz="900" dirty="0"/>
           </a:p>
@@ -16343,14 +16796,14 @@
       </p:sp>
       <p:sp>
         <p:nvSpPr>
-          <p:cNvPr id="47" name="Shape 45"/>
-          <p:cNvSpPr/>
-          <p:nvPr/>
-        </p:nvSpPr>
-        <p:spPr>
-          <a:xfrm>
-            <a:off x="5759577" y="4169664"/>
-            <a:ext cx="685800" cy="475488"/>
+          <p:cNvPr id="51" name="Shape 49"/>
+          <p:cNvSpPr/>
+          <p:nvPr/>
+        </p:nvSpPr>
+        <p:spPr>
+          <a:xfrm>
+            <a:off x="4855464" y="4169664"/>
+            <a:ext cx="676656" cy="475488"/>
           </a:xfrm>
           <a:prstGeom prst="rect">
             <a:avLst>
@@ -16370,14 +16823,14 @@
       </p:sp>
       <p:sp>
         <p:nvSpPr>
-          <p:cNvPr id="48" name="Text 46"/>
-          <p:cNvSpPr/>
-          <p:nvPr/>
-        </p:nvSpPr>
-        <p:spPr>
-          <a:xfrm>
-            <a:off x="5759577" y="4169664"/>
-            <a:ext cx="685800" cy="475488"/>
+          <p:cNvPr id="52" name="Text 50"/>
+          <p:cNvSpPr/>
+          <p:nvPr/>
+        </p:nvSpPr>
+        <p:spPr>
+          <a:xfrm>
+            <a:off x="4855464" y="4169664"/>
+            <a:ext cx="676656" cy="475488"/>
           </a:xfrm>
           <a:prstGeom prst="rect">
             <a:avLst/>
@@ -16401,7 +16854,7 @@
                 <a:ea typeface="Trebuchet MS" pitchFamily="34" charset="-122"/>
                 <a:cs typeface="Trebuchet MS" pitchFamily="34" charset="-120"/>
               </a:rPr>
-              <a:t>e</a:t>
+              <a:t>o</a:t>
             </a:r>
             <a:endParaRPr lang="en-US" sz="900" dirty="0"/>
           </a:p>
@@ -16409,14 +16862,14 @@
       </p:sp>
       <p:sp>
         <p:nvSpPr>
-          <p:cNvPr id="49" name="Shape 47"/>
-          <p:cNvSpPr/>
-          <p:nvPr/>
-        </p:nvSpPr>
-        <p:spPr>
-          <a:xfrm>
-            <a:off x="6668262" y="4169664"/>
-            <a:ext cx="685800" cy="475488"/>
+          <p:cNvPr id="53" name="Shape 51"/>
+          <p:cNvSpPr/>
+          <p:nvPr/>
+        </p:nvSpPr>
+        <p:spPr>
+          <a:xfrm>
+            <a:off x="5581498" y="4169664"/>
+            <a:ext cx="676656" cy="475488"/>
           </a:xfrm>
           <a:prstGeom prst="rect">
             <a:avLst>
@@ -16436,14 +16889,14 @@
       </p:sp>
       <p:sp>
         <p:nvSpPr>
-          <p:cNvPr id="50" name="Text 48"/>
-          <p:cNvSpPr/>
-          <p:nvPr/>
-        </p:nvSpPr>
-        <p:spPr>
-          <a:xfrm>
-            <a:off x="6668262" y="4169664"/>
-            <a:ext cx="685800" cy="475488"/>
+          <p:cNvPr id="54" name="Text 52"/>
+          <p:cNvSpPr/>
+          <p:nvPr/>
+        </p:nvSpPr>
+        <p:spPr>
+          <a:xfrm>
+            <a:off x="5581498" y="4169664"/>
+            <a:ext cx="676656" cy="475488"/>
           </a:xfrm>
           <a:prstGeom prst="rect">
             <a:avLst/>
@@ -16467,7 +16920,7 @@
                 <a:ea typeface="Trebuchet MS" pitchFamily="34" charset="-122"/>
                 <a:cs typeface="Trebuchet MS" pitchFamily="34" charset="-120"/>
               </a:rPr>
-              <a:t>t</a:t>
+              <a:t>m</a:t>
             </a:r>
             <a:endParaRPr lang="en-US" sz="900" dirty="0"/>
           </a:p>
@@ -16475,14 +16928,14 @@
       </p:sp>
       <p:sp>
         <p:nvSpPr>
-          <p:cNvPr id="51" name="Shape 49"/>
-          <p:cNvSpPr/>
-          <p:nvPr/>
-        </p:nvSpPr>
-        <p:spPr>
-          <a:xfrm>
-            <a:off x="7576947" y="4169664"/>
-            <a:ext cx="685800" cy="475488"/>
+          <p:cNvPr id="55" name="Shape 53"/>
+          <p:cNvSpPr/>
+          <p:nvPr/>
+        </p:nvSpPr>
+        <p:spPr>
+          <a:xfrm>
+            <a:off x="6307531" y="4169664"/>
+            <a:ext cx="676656" cy="475488"/>
           </a:xfrm>
           <a:prstGeom prst="rect">
             <a:avLst>
@@ -16502,14 +16955,146 @@
       </p:sp>
       <p:sp>
         <p:nvSpPr>
-          <p:cNvPr id="52" name="Text 50"/>
-          <p:cNvSpPr/>
-          <p:nvPr/>
-        </p:nvSpPr>
-        <p:spPr>
-          <a:xfrm>
-            <a:off x="7576947" y="4169664"/>
-            <a:ext cx="685800" cy="475488"/>
+          <p:cNvPr id="56" name="Text 54"/>
+          <p:cNvSpPr/>
+          <p:nvPr/>
+        </p:nvSpPr>
+        <p:spPr>
+          <a:xfrm>
+            <a:off x="6307531" y="4169664"/>
+            <a:ext cx="676656" cy="475488"/>
+          </a:xfrm>
+          <a:prstGeom prst="rect">
+            <a:avLst/>
+          </a:prstGeom>
+          <a:noFill/>
+          <a:ln/>
+        </p:spPr>
+        <p:txBody>
+          <a:bodyPr wrap="square" lIns="0" tIns="0" rIns="0" bIns="0" rtlCol="0" anchor="ctr"/>
+          <a:lstStyle/>
+          <a:p>
+            <a:pPr algn="ctr" indent="0" marL="0">
+              <a:buNone/>
+            </a:pPr>
+            <a:r>
+              <a:rPr lang="en-US" sz="900" b="1" dirty="0">
+                <a:solidFill>
+                  <a:srgbClr val="9D174D"/>
+                </a:solidFill>
+                <a:latin typeface="Trebuchet MS" pitchFamily="34" charset="0"/>
+                <a:ea typeface="Trebuchet MS" pitchFamily="34" charset="-122"/>
+                <a:cs typeface="Trebuchet MS" pitchFamily="34" charset="-120"/>
+              </a:rPr>
+              <a:t>e</a:t>
+            </a:r>
+            <a:endParaRPr lang="en-US" sz="900" dirty="0"/>
+          </a:p>
+        </p:txBody>
+      </p:sp>
+      <p:sp>
+        <p:nvSpPr>
+          <p:cNvPr id="57" name="Shape 55"/>
+          <p:cNvSpPr/>
+          <p:nvPr/>
+        </p:nvSpPr>
+        <p:spPr>
+          <a:xfrm>
+            <a:off x="7033565" y="4169664"/>
+            <a:ext cx="676656" cy="475488"/>
+          </a:xfrm>
+          <a:prstGeom prst="rect">
+            <a:avLst>
+              <a:gd name="adj" fmla="val 7692"/>
+            </a:avLst>
+          </a:prstGeom>
+          <a:solidFill>
+            <a:srgbClr val="FFFFFF"/>
+          </a:solidFill>
+          <a:ln w="12700">
+            <a:solidFill>
+              <a:srgbClr val="DB2777"/>
+            </a:solidFill>
+            <a:prstDash val="solid"/>
+          </a:ln>
+        </p:spPr>
+      </p:sp>
+      <p:sp>
+        <p:nvSpPr>
+          <p:cNvPr id="58" name="Text 56"/>
+          <p:cNvSpPr/>
+          <p:nvPr/>
+        </p:nvSpPr>
+        <p:spPr>
+          <a:xfrm>
+            <a:off x="7033565" y="4169664"/>
+            <a:ext cx="676656" cy="475488"/>
+          </a:xfrm>
+          <a:prstGeom prst="rect">
+            <a:avLst/>
+          </a:prstGeom>
+          <a:noFill/>
+          <a:ln/>
+        </p:spPr>
+        <p:txBody>
+          <a:bodyPr wrap="square" lIns="0" tIns="0" rIns="0" bIns="0" rtlCol="0" anchor="ctr"/>
+          <a:lstStyle/>
+          <a:p>
+            <a:pPr algn="ctr" indent="0" marL="0">
+              <a:buNone/>
+            </a:pPr>
+            <a:r>
+              <a:rPr lang="en-US" sz="900" b="1" dirty="0">
+                <a:solidFill>
+                  <a:srgbClr val="9D174D"/>
+                </a:solidFill>
+                <a:latin typeface="Trebuchet MS" pitchFamily="34" charset="0"/>
+                <a:ea typeface="Trebuchet MS" pitchFamily="34" charset="-122"/>
+                <a:cs typeface="Trebuchet MS" pitchFamily="34" charset="-120"/>
+              </a:rPr>
+              <a:t>t</a:t>
+            </a:r>
+            <a:endParaRPr lang="en-US" sz="900" dirty="0"/>
+          </a:p>
+        </p:txBody>
+      </p:sp>
+      <p:sp>
+        <p:nvSpPr>
+          <p:cNvPr id="59" name="Shape 57"/>
+          <p:cNvSpPr/>
+          <p:nvPr/>
+        </p:nvSpPr>
+        <p:spPr>
+          <a:xfrm>
+            <a:off x="7759598" y="4169664"/>
+            <a:ext cx="676656" cy="475488"/>
+          </a:xfrm>
+          <a:prstGeom prst="rect">
+            <a:avLst>
+              <a:gd name="adj" fmla="val 7692"/>
+            </a:avLst>
+          </a:prstGeom>
+          <a:solidFill>
+            <a:srgbClr val="FFFFFF"/>
+          </a:solidFill>
+          <a:ln w="12700">
+            <a:solidFill>
+              <a:srgbClr val="DB2777"/>
+            </a:solidFill>
+            <a:prstDash val="solid"/>
+          </a:ln>
+        </p:spPr>
+      </p:sp>
+      <p:sp>
+        <p:nvSpPr>
+          <p:cNvPr id="60" name="Text 58"/>
+          <p:cNvSpPr/>
+          <p:nvPr/>
+        </p:nvSpPr>
+        <p:spPr>
+          <a:xfrm>
+            <a:off x="7759598" y="4169664"/>
+            <a:ext cx="676656" cy="475488"/>
           </a:xfrm>
           <a:prstGeom prst="rect">
             <a:avLst/>
@@ -17859,7 +18444,7 @@
                 <a:ea typeface="Calibri" pitchFamily="34" charset="-122"/>
                 <a:cs typeface="Calibri" pitchFamily="34" charset="-120"/>
               </a:rPr>
-              <a:t>The scientist checked the </a:t>
+              <a:t>Using a </a:t>
             </a:r>
             <a:pPr algn="l" indent="0" marL="0">
               <a:buNone/>
@@ -17890,7 +18475,7 @@
                 <a:ea typeface="Calibri" pitchFamily="34" charset="-122"/>
                 <a:cs typeface="Calibri" pitchFamily="34" charset="-120"/>
               </a:rPr>
-              <a:t>, recorded the </a:t>
+              <a:t>, </a:t>
             </a:r>
             <a:pPr algn="l" indent="0" marL="0">
               <a:buNone/>
@@ -17907,7 +18492,7 @@
                 <a:ea typeface="Calibri" pitchFamily="34" charset="-122"/>
                 <a:cs typeface="Calibri" pitchFamily="34" charset="-120"/>
               </a:rPr>
-              <a:t>diameter</a:t>
+              <a:t>altimeter</a:t>
             </a:r>
             <a:pPr algn="l" indent="0" marL="0">
               <a:buNone/>
@@ -17921,7 +18506,7 @@
                 <a:ea typeface="Calibri" pitchFamily="34" charset="-122"/>
                 <a:cs typeface="Calibri" pitchFamily="34" charset="-120"/>
               </a:rPr>
-              <a:t> of the lens, and read the </a:t>
+              <a:t>, and </a:t>
             </a:r>
             <a:pPr algn="l" indent="0" marL="0">
               <a:buNone/>
@@ -17938,7 +18523,7 @@
                 <a:ea typeface="Calibri" pitchFamily="34" charset="-122"/>
                 <a:cs typeface="Calibri" pitchFamily="34" charset="-120"/>
               </a:rPr>
-              <a:t>altimeter</a:t>
+              <a:t>perimeter</a:t>
             </a:r>
             <a:pPr algn="l" indent="0" marL="0">
               <a:buNone/>
@@ -17952,7 +18537,7 @@
                 <a:ea typeface="Calibri" pitchFamily="34" charset="-122"/>
                 <a:cs typeface="Calibri" pitchFamily="34" charset="-120"/>
               </a:rPr>
-              <a:t> before the flight.</a:t>
+              <a:t> measurement, the scientist recorded all the data carefully.</a:t>
             </a:r>
             <a:endParaRPr lang="en-US" sz="1800" dirty="0"/>
           </a:p>
@@ -18235,7 +18820,7 @@
                 <a:ea typeface="Trebuchet MS" pitchFamily="34" charset="-122"/>
                 <a:cs typeface="Trebuchet MS" pitchFamily="34" charset="-120"/>
               </a:rPr>
-              <a:t>diameter</a:t>
+              <a:t>altimeter</a:t>
             </a:r>
             <a:endParaRPr lang="en-US" sz="1400" dirty="0"/>
           </a:p>
@@ -18363,7 +18948,7 @@
                 <a:ea typeface="Trebuchet MS" pitchFamily="34" charset="-122"/>
                 <a:cs typeface="Trebuchet MS" pitchFamily="34" charset="-120"/>
               </a:rPr>
-              <a:t>altimeter</a:t>
+              <a:t>perimeter</a:t>
             </a:r>
             <a:endParaRPr lang="en-US" sz="1400" dirty="0"/>
           </a:p>
@@ -19838,7 +20423,7 @@
                 <a:ea typeface="Calibri" pitchFamily="34" charset="-122"/>
                 <a:cs typeface="Calibri" pitchFamily="34" charset="-120"/>
               </a:rPr>
-              <a:t>pressure</a:t>
+              <a:t>weight or pressure</a:t>
             </a:r>
             <a:endParaRPr lang="en-US" sz="850" dirty="0"/>
           </a:p>
@@ -20823,7 +21408,7 @@
                 <a:ea typeface="Calibri" pitchFamily="34" charset="-122"/>
                 <a:cs typeface="Calibri" pitchFamily="34" charset="-120"/>
               </a:rPr>
-              <a:t>pressure</a:t>
+              <a:t>weight or pressure</a:t>
             </a:r>
             <a:endParaRPr lang="en-US" sz="850" dirty="0"/>
           </a:p>
@@ -22150,7 +22735,7 @@
                 <a:ea typeface="Calibri" pitchFamily="34" charset="-122"/>
                 <a:cs typeface="Calibri" pitchFamily="34" charset="-120"/>
               </a:rPr>
-              <a:t>pressure</a:t>
+              <a:t>weight or pressure</a:t>
             </a:r>
             <a:endParaRPr lang="en-US" sz="850" dirty="0"/>
           </a:p>
@@ -23788,7 +24373,7 @@
                 <a:ea typeface="Trebuchet MS" pitchFamily="34" charset="-122"/>
                 <a:cs typeface="Trebuchet MS" pitchFamily="34" charset="-120"/>
               </a:rPr>
-              <a:t>diameter</a:t>
+              <a:t>altimeter</a:t>
             </a:r>
             <a:endParaRPr lang="en-US" sz="2800" dirty="0"/>
           </a:p>
@@ -24615,7 +25200,7 @@
                 <a:ea typeface="Trebuchet MS" pitchFamily="34" charset="-122"/>
                 <a:cs typeface="Trebuchet MS" pitchFamily="34" charset="-120"/>
               </a:rPr>
-              <a:t>diameter</a:t>
+              <a:t>altimeter</a:t>
             </a:r>
             <a:endParaRPr lang="en-US" sz="2800" dirty="0"/>
           </a:p>
@@ -24754,7 +25339,7 @@
                 <a:ea typeface="Trebuchet MS" pitchFamily="34" charset="-122"/>
                 <a:cs typeface="Trebuchet MS" pitchFamily="34" charset="-120"/>
               </a:rPr>
-              <a:t>dia</a:t>
+              <a:t>alti</a:t>
             </a:r>
             <a:endParaRPr lang="en-US" sz="1300" dirty="0"/>
           </a:p>
@@ -24793,7 +25378,7 @@
                 <a:ea typeface="Calibri" pitchFamily="34" charset="-122"/>
                 <a:cs typeface="Calibri" pitchFamily="34" charset="-120"/>
               </a:rPr>
-              <a:t>through or across</a:t>
+              <a:t>high</a:t>
             </a:r>
             <a:endParaRPr lang="en-US" sz="850" dirty="0"/>
           </a:p>
@@ -24905,7 +25490,7 @@
                 <a:ea typeface="Calibri" pitchFamily="34" charset="-122"/>
                 <a:cs typeface="Calibri" pitchFamily="34" charset="-120"/>
               </a:rPr>
-              <a:t>measure</a:t>
+              <a:t>measuring instrument</a:t>
             </a:r>
             <a:endParaRPr lang="en-US" sz="850" dirty="0"/>
           </a:p>
@@ -26319,7 +26904,7 @@
                 <a:ea typeface="Trebuchet MS" pitchFamily="34" charset="-122"/>
                 <a:cs typeface="Trebuchet MS" pitchFamily="34" charset="-120"/>
               </a:rPr>
-              <a:t>diameter</a:t>
+              <a:t>altimeter</a:t>
             </a:r>
             <a:endParaRPr lang="en-US" sz="2800" dirty="0"/>
           </a:p>
@@ -26458,7 +27043,7 @@
                 <a:ea typeface="Trebuchet MS" pitchFamily="34" charset="-122"/>
                 <a:cs typeface="Trebuchet MS" pitchFamily="34" charset="-120"/>
               </a:rPr>
-              <a:t>dia</a:t>
+              <a:t>alti</a:t>
             </a:r>
             <a:endParaRPr lang="en-US" sz="1300" dirty="0"/>
           </a:p>
@@ -26497,7 +27082,7 @@
                 <a:ea typeface="Calibri" pitchFamily="34" charset="-122"/>
                 <a:cs typeface="Calibri" pitchFamily="34" charset="-120"/>
               </a:rPr>
-              <a:t>through or across</a:t>
+              <a:t>high</a:t>
             </a:r>
             <a:endParaRPr lang="en-US" sz="850" dirty="0"/>
           </a:p>
@@ -26609,7 +27194,7 @@
                 <a:ea typeface="Calibri" pitchFamily="34" charset="-122"/>
                 <a:cs typeface="Calibri" pitchFamily="34" charset="-120"/>
               </a:rPr>
-              <a:t>measure</a:t>
+              <a:t>measuring instrument</a:t>
             </a:r>
             <a:endParaRPr lang="en-US" sz="850" dirty="0"/>
           </a:p>
@@ -26768,7 +27353,7 @@
                 <a:ea typeface="Trebuchet MS" pitchFamily="34" charset="-122"/>
                 <a:cs typeface="Trebuchet MS" pitchFamily="34" charset="-120"/>
               </a:rPr>
-              <a:t>di</a:t>
+              <a:t>al</a:t>
             </a:r>
             <a:endParaRPr lang="en-US" sz="1400" dirty="0"/>
           </a:p>
@@ -26873,7 +27458,7 @@
                 <a:ea typeface="Trebuchet MS" pitchFamily="34" charset="-122"/>
                 <a:cs typeface="Trebuchet MS" pitchFamily="34" charset="-120"/>
               </a:rPr>
-              <a:t>am</a:t>
+              <a:t>tim</a:t>
             </a:r>
             <a:endParaRPr lang="en-US" sz="1400" dirty="0"/>
           </a:p>
@@ -27646,7 +28231,7 @@
                 <a:ea typeface="Trebuchet MS" pitchFamily="34" charset="-122"/>
                 <a:cs typeface="Trebuchet MS" pitchFamily="34" charset="-120"/>
               </a:rPr>
-              <a:t>diameter</a:t>
+              <a:t>altimeter</a:t>
             </a:r>
             <a:endParaRPr lang="en-US" sz="2800" dirty="0"/>
           </a:p>
@@ -27785,7 +28370,7 @@
                 <a:ea typeface="Trebuchet MS" pitchFamily="34" charset="-122"/>
                 <a:cs typeface="Trebuchet MS" pitchFamily="34" charset="-120"/>
               </a:rPr>
-              <a:t>dia</a:t>
+              <a:t>alti</a:t>
             </a:r>
             <a:endParaRPr lang="en-US" sz="1300" dirty="0"/>
           </a:p>
@@ -27824,7 +28409,7 @@
                 <a:ea typeface="Calibri" pitchFamily="34" charset="-122"/>
                 <a:cs typeface="Calibri" pitchFamily="34" charset="-120"/>
               </a:rPr>
-              <a:t>through or across</a:t>
+              <a:t>high</a:t>
             </a:r>
             <a:endParaRPr lang="en-US" sz="850" dirty="0"/>
           </a:p>
@@ -27936,7 +28521,7 @@
                 <a:ea typeface="Calibri" pitchFamily="34" charset="-122"/>
                 <a:cs typeface="Calibri" pitchFamily="34" charset="-120"/>
               </a:rPr>
-              <a:t>measure</a:t>
+              <a:t>measuring instrument</a:t>
             </a:r>
             <a:endParaRPr lang="en-US" sz="850" dirty="0"/>
           </a:p>
@@ -28095,7 +28680,7 @@
                 <a:ea typeface="Trebuchet MS" pitchFamily="34" charset="-122"/>
                 <a:cs typeface="Trebuchet MS" pitchFamily="34" charset="-120"/>
               </a:rPr>
-              <a:t>di</a:t>
+              <a:t>al</a:t>
             </a:r>
             <a:endParaRPr lang="en-US" sz="1400" dirty="0"/>
           </a:p>
@@ -28200,7 +28785,7 @@
                 <a:ea typeface="Trebuchet MS" pitchFamily="34" charset="-122"/>
                 <a:cs typeface="Trebuchet MS" pitchFamily="34" charset="-120"/>
               </a:rPr>
-              <a:t>am</a:t>
+              <a:t>tim</a:t>
             </a:r>
             <a:endParaRPr lang="en-US" sz="1400" dirty="0"/>
           </a:p>
@@ -28517,7 +29102,7 @@
         </p:nvSpPr>
         <p:spPr>
           <a:xfrm>
-            <a:off x="2124837" y="4169664"/>
+            <a:off x="2023872" y="4169664"/>
             <a:ext cx="685800" cy="475488"/>
           </a:xfrm>
           <a:prstGeom prst="rect">
@@ -28544,7 +29129,7 @@
         </p:nvSpPr>
         <p:spPr>
           <a:xfrm>
-            <a:off x="2124837" y="4169664"/>
+            <a:off x="2023872" y="4169664"/>
             <a:ext cx="685800" cy="475488"/>
           </a:xfrm>
           <a:prstGeom prst="rect">
@@ -28569,7 +29154,7 @@
                 <a:ea typeface="Trebuchet MS" pitchFamily="34" charset="-122"/>
                 <a:cs typeface="Trebuchet MS" pitchFamily="34" charset="-120"/>
               </a:rPr>
-              <a:t>d</a:t>
+              <a:t>a</a:t>
             </a:r>
             <a:endParaRPr lang="en-US" sz="900" dirty="0"/>
           </a:p>
@@ -28583,7 +29168,7 @@
         </p:nvSpPr>
         <p:spPr>
           <a:xfrm>
-            <a:off x="3033522" y="4169664"/>
+            <a:off x="2831592" y="4169664"/>
             <a:ext cx="685800" cy="475488"/>
           </a:xfrm>
           <a:prstGeom prst="rect">
@@ -28610,7 +29195,7 @@
         </p:nvSpPr>
         <p:spPr>
           <a:xfrm>
-            <a:off x="3033522" y="4169664"/>
+            <a:off x="2831592" y="4169664"/>
             <a:ext cx="685800" cy="475488"/>
           </a:xfrm>
           <a:prstGeom prst="rect">
@@ -28635,7 +29220,7 @@
                 <a:ea typeface="Trebuchet MS" pitchFamily="34" charset="-122"/>
                 <a:cs typeface="Trebuchet MS" pitchFamily="34" charset="-120"/>
               </a:rPr>
-              <a:t>i</a:t>
+              <a:t>l</a:t>
             </a:r>
             <a:endParaRPr lang="en-US" sz="900" dirty="0"/>
           </a:p>
@@ -28649,7 +29234,7 @@
         </p:nvSpPr>
         <p:spPr>
           <a:xfrm>
-            <a:off x="3942207" y="4169664"/>
+            <a:off x="3639312" y="4169664"/>
             <a:ext cx="685800" cy="475488"/>
           </a:xfrm>
           <a:prstGeom prst="rect">
@@ -28676,7 +29261,7 @@
         </p:nvSpPr>
         <p:spPr>
           <a:xfrm>
-            <a:off x="3942207" y="4169664"/>
+            <a:off x="3639312" y="4169664"/>
             <a:ext cx="685800" cy="475488"/>
           </a:xfrm>
           <a:prstGeom prst="rect">
@@ -28701,7 +29286,7 @@
                 <a:ea typeface="Trebuchet MS" pitchFamily="34" charset="-122"/>
                 <a:cs typeface="Trebuchet MS" pitchFamily="34" charset="-120"/>
               </a:rPr>
-              <a:t>a</a:t>
+              <a:t>t</a:t>
             </a:r>
             <a:endParaRPr lang="en-US" sz="900" dirty="0"/>
           </a:p>
@@ -28715,7 +29300,7 @@
         </p:nvSpPr>
         <p:spPr>
           <a:xfrm>
-            <a:off x="4850892" y="4169664"/>
+            <a:off x="4447032" y="4169664"/>
             <a:ext cx="685800" cy="475488"/>
           </a:xfrm>
           <a:prstGeom prst="rect">
@@ -28742,7 +29327,7 @@
         </p:nvSpPr>
         <p:spPr>
           <a:xfrm>
-            <a:off x="4850892" y="4169664"/>
+            <a:off x="4447032" y="4169664"/>
             <a:ext cx="685800" cy="475488"/>
           </a:xfrm>
           <a:prstGeom prst="rect">
@@ -28767,7 +29352,7 @@
                 <a:ea typeface="Trebuchet MS" pitchFamily="34" charset="-122"/>
                 <a:cs typeface="Trebuchet MS" pitchFamily="34" charset="-120"/>
               </a:rPr>
-              <a:t>m</a:t>
+              <a:t>i</a:t>
             </a:r>
             <a:endParaRPr lang="en-US" sz="900" dirty="0"/>
           </a:p>
@@ -28781,7 +29366,7 @@
         </p:nvSpPr>
         <p:spPr>
           <a:xfrm>
-            <a:off x="5759577" y="4169664"/>
+            <a:off x="5254752" y="4169664"/>
             <a:ext cx="685800" cy="475488"/>
           </a:xfrm>
           <a:prstGeom prst="rect">
@@ -28808,7 +29393,7 @@
         </p:nvSpPr>
         <p:spPr>
           <a:xfrm>
-            <a:off x="5759577" y="4169664"/>
+            <a:off x="5254752" y="4169664"/>
             <a:ext cx="685800" cy="475488"/>
           </a:xfrm>
           <a:prstGeom prst="rect">
@@ -28833,7 +29418,7 @@
                 <a:ea typeface="Trebuchet MS" pitchFamily="34" charset="-122"/>
                 <a:cs typeface="Trebuchet MS" pitchFamily="34" charset="-120"/>
               </a:rPr>
-              <a:t>e</a:t>
+              <a:t>m</a:t>
             </a:r>
             <a:endParaRPr lang="en-US" sz="900" dirty="0"/>
           </a:p>
@@ -28847,7 +29432,7 @@
         </p:nvSpPr>
         <p:spPr>
           <a:xfrm>
-            <a:off x="6668262" y="4169664"/>
+            <a:off x="6062472" y="4169664"/>
             <a:ext cx="685800" cy="475488"/>
           </a:xfrm>
           <a:prstGeom prst="rect">
@@ -28874,7 +29459,7 @@
         </p:nvSpPr>
         <p:spPr>
           <a:xfrm>
-            <a:off x="6668262" y="4169664"/>
+            <a:off x="6062472" y="4169664"/>
             <a:ext cx="685800" cy="475488"/>
           </a:xfrm>
           <a:prstGeom prst="rect">
@@ -28899,7 +29484,7 @@
                 <a:ea typeface="Trebuchet MS" pitchFamily="34" charset="-122"/>
                 <a:cs typeface="Trebuchet MS" pitchFamily="34" charset="-120"/>
               </a:rPr>
-              <a:t>t</a:t>
+              <a:t>e</a:t>
             </a:r>
             <a:endParaRPr lang="en-US" sz="900" dirty="0"/>
           </a:p>
@@ -28913,7 +29498,7 @@
         </p:nvSpPr>
         <p:spPr>
           <a:xfrm>
-            <a:off x="7576947" y="4169664"/>
+            <a:off x="6870192" y="4169664"/>
             <a:ext cx="685800" cy="475488"/>
           </a:xfrm>
           <a:prstGeom prst="rect">
@@ -28940,7 +29525,73 @@
         </p:nvSpPr>
         <p:spPr>
           <a:xfrm>
-            <a:off x="7576947" y="4169664"/>
+            <a:off x="6870192" y="4169664"/>
+            <a:ext cx="685800" cy="475488"/>
+          </a:xfrm>
+          <a:prstGeom prst="rect">
+            <a:avLst/>
+          </a:prstGeom>
+          <a:noFill/>
+          <a:ln/>
+        </p:spPr>
+        <p:txBody>
+          <a:bodyPr wrap="square" lIns="0" tIns="0" rIns="0" bIns="0" rtlCol="0" anchor="ctr"/>
+          <a:lstStyle/>
+          <a:p>
+            <a:pPr algn="ctr" indent="0" marL="0">
+              <a:buNone/>
+            </a:pPr>
+            <a:r>
+              <a:rPr lang="en-US" sz="900" b="1" dirty="0">
+                <a:solidFill>
+                  <a:srgbClr val="9D174D"/>
+                </a:solidFill>
+                <a:latin typeface="Trebuchet MS" pitchFamily="34" charset="0"/>
+                <a:ea typeface="Trebuchet MS" pitchFamily="34" charset="-122"/>
+                <a:cs typeface="Trebuchet MS" pitchFamily="34" charset="-120"/>
+              </a:rPr>
+              <a:t>t</a:t>
+            </a:r>
+            <a:endParaRPr lang="en-US" sz="900" dirty="0"/>
+          </a:p>
+        </p:txBody>
+      </p:sp>
+      <p:sp>
+        <p:nvSpPr>
+          <p:cNvPr id="53" name="Shape 51"/>
+          <p:cNvSpPr/>
+          <p:nvPr/>
+        </p:nvSpPr>
+        <p:spPr>
+          <a:xfrm>
+            <a:off x="7677912" y="4169664"/>
+            <a:ext cx="685800" cy="475488"/>
+          </a:xfrm>
+          <a:prstGeom prst="rect">
+            <a:avLst>
+              <a:gd name="adj" fmla="val 7692"/>
+            </a:avLst>
+          </a:prstGeom>
+          <a:solidFill>
+            <a:srgbClr val="FFFFFF"/>
+          </a:solidFill>
+          <a:ln w="12700">
+            <a:solidFill>
+              <a:srgbClr val="DB2777"/>
+            </a:solidFill>
+            <a:prstDash val="solid"/>
+          </a:ln>
+        </p:spPr>
+      </p:sp>
+      <p:sp>
+        <p:nvSpPr>
+          <p:cNvPr id="54" name="Text 52"/>
+          <p:cNvSpPr/>
+          <p:nvPr/>
+        </p:nvSpPr>
+        <p:spPr>
+          <a:xfrm>
+            <a:off x="7677912" y="4169664"/>
             <a:ext cx="685800" cy="475488"/>
           </a:xfrm>
           <a:prstGeom prst="rect">
@@ -29396,7 +30047,7 @@
                 <a:ea typeface="Trebuchet MS" pitchFamily="34" charset="-122"/>
                 <a:cs typeface="Trebuchet MS" pitchFamily="34" charset="-120"/>
               </a:rPr>
-              <a:t>altimeter</a:t>
+              <a:t>perimeter</a:t>
             </a:r>
             <a:endParaRPr lang="en-US" sz="2800" dirty="0"/>
           </a:p>
@@ -30223,7 +30874,7 @@
                 <a:ea typeface="Trebuchet MS" pitchFamily="34" charset="-122"/>
                 <a:cs typeface="Trebuchet MS" pitchFamily="34" charset="-120"/>
               </a:rPr>
-              <a:t>altimeter</a:t>
+              <a:t>perimeter</a:t>
             </a:r>
             <a:endParaRPr lang="en-US" sz="2800" dirty="0"/>
           </a:p>
@@ -30362,7 +31013,7 @@
                 <a:ea typeface="Trebuchet MS" pitchFamily="34" charset="-122"/>
                 <a:cs typeface="Trebuchet MS" pitchFamily="34" charset="-120"/>
               </a:rPr>
-              <a:t>alti</a:t>
+              <a:t>peri</a:t>
             </a:r>
             <a:endParaRPr lang="en-US" sz="1300" dirty="0"/>
           </a:p>
@@ -30401,7 +31052,7 @@
                 <a:ea typeface="Calibri" pitchFamily="34" charset="-122"/>
                 <a:cs typeface="Calibri" pitchFamily="34" charset="-120"/>
               </a:rPr>
-              <a:t>high</a:t>
+              <a:t>around</a:t>
             </a:r>
             <a:endParaRPr lang="en-US" sz="850" dirty="0"/>
           </a:p>
@@ -30513,7 +31164,7 @@
                 <a:ea typeface="Calibri" pitchFamily="34" charset="-122"/>
                 <a:cs typeface="Calibri" pitchFamily="34" charset="-120"/>
               </a:rPr>
-              <a:t>measuring instrument</a:t>
+              <a:t>measure</a:t>
             </a:r>
             <a:endParaRPr lang="en-US" sz="850" dirty="0"/>
           </a:p>
@@ -31208,7 +31859,7 @@
                 <a:ea typeface="Trebuchet MS" pitchFamily="34" charset="-122"/>
                 <a:cs typeface="Trebuchet MS" pitchFamily="34" charset="-120"/>
               </a:rPr>
-              <a:t>altimeter</a:t>
+              <a:t>perimeter</a:t>
             </a:r>
             <a:endParaRPr lang="en-US" sz="2800" dirty="0"/>
           </a:p>
@@ -31347,7 +31998,7 @@
                 <a:ea typeface="Trebuchet MS" pitchFamily="34" charset="-122"/>
                 <a:cs typeface="Trebuchet MS" pitchFamily="34" charset="-120"/>
               </a:rPr>
-              <a:t>alti</a:t>
+              <a:t>peri</a:t>
             </a:r>
             <a:endParaRPr lang="en-US" sz="1300" dirty="0"/>
           </a:p>
@@ -31386,7 +32037,7 @@
                 <a:ea typeface="Calibri" pitchFamily="34" charset="-122"/>
                 <a:cs typeface="Calibri" pitchFamily="34" charset="-120"/>
               </a:rPr>
-              <a:t>high</a:t>
+              <a:t>around</a:t>
             </a:r>
             <a:endParaRPr lang="en-US" sz="850" dirty="0"/>
           </a:p>
@@ -31498,7 +32149,7 @@
                 <a:ea typeface="Calibri" pitchFamily="34" charset="-122"/>
                 <a:cs typeface="Calibri" pitchFamily="34" charset="-120"/>
               </a:rPr>
-              <a:t>measuring instrument</a:t>
+              <a:t>measure</a:t>
             </a:r>
             <a:endParaRPr lang="en-US" sz="850" dirty="0"/>
           </a:p>
@@ -31657,7 +32308,7 @@
                 <a:ea typeface="Trebuchet MS" pitchFamily="34" charset="-122"/>
                 <a:cs typeface="Trebuchet MS" pitchFamily="34" charset="-120"/>
               </a:rPr>
-              <a:t>al</a:t>
+              <a:t>pe</a:t>
             </a:r>
             <a:endParaRPr lang="en-US" sz="1400" dirty="0"/>
           </a:p>
@@ -31762,7 +32413,7 @@
                 <a:ea typeface="Trebuchet MS" pitchFamily="34" charset="-122"/>
                 <a:cs typeface="Trebuchet MS" pitchFamily="34" charset="-120"/>
               </a:rPr>
-              <a:t>tim</a:t>
+              <a:t>rim</a:t>
             </a:r>
             <a:endParaRPr lang="en-US" sz="1400" dirty="0"/>
           </a:p>
@@ -32535,7 +33186,7 @@
                 <a:ea typeface="Trebuchet MS" pitchFamily="34" charset="-122"/>
                 <a:cs typeface="Trebuchet MS" pitchFamily="34" charset="-120"/>
               </a:rPr>
-              <a:t>altimeter</a:t>
+              <a:t>perimeter</a:t>
             </a:r>
             <a:endParaRPr lang="en-US" sz="2800" dirty="0"/>
           </a:p>
@@ -32674,7 +33325,7 @@
                 <a:ea typeface="Trebuchet MS" pitchFamily="34" charset="-122"/>
                 <a:cs typeface="Trebuchet MS" pitchFamily="34" charset="-120"/>
               </a:rPr>
-              <a:t>alti</a:t>
+              <a:t>peri</a:t>
             </a:r>
             <a:endParaRPr lang="en-US" sz="1300" dirty="0"/>
           </a:p>
@@ -32713,7 +33364,7 @@
                 <a:ea typeface="Calibri" pitchFamily="34" charset="-122"/>
                 <a:cs typeface="Calibri" pitchFamily="34" charset="-120"/>
               </a:rPr>
-              <a:t>high</a:t>
+              <a:t>around</a:t>
             </a:r>
             <a:endParaRPr lang="en-US" sz="850" dirty="0"/>
           </a:p>
@@ -32825,7 +33476,7 @@
                 <a:ea typeface="Calibri" pitchFamily="34" charset="-122"/>
                 <a:cs typeface="Calibri" pitchFamily="34" charset="-120"/>
               </a:rPr>
-              <a:t>measuring instrument</a:t>
+              <a:t>measure</a:t>
             </a:r>
             <a:endParaRPr lang="en-US" sz="850" dirty="0"/>
           </a:p>
@@ -32984,7 +33635,7 @@
                 <a:ea typeface="Trebuchet MS" pitchFamily="34" charset="-122"/>
                 <a:cs typeface="Trebuchet MS" pitchFamily="34" charset="-120"/>
               </a:rPr>
-              <a:t>al</a:t>
+              <a:t>pe</a:t>
             </a:r>
             <a:endParaRPr lang="en-US" sz="1400" dirty="0"/>
           </a:p>
@@ -33089,7 +33740,7 @@
                 <a:ea typeface="Trebuchet MS" pitchFamily="34" charset="-122"/>
                 <a:cs typeface="Trebuchet MS" pitchFamily="34" charset="-120"/>
               </a:rPr>
-              <a:t>tim</a:t>
+              <a:t>rim</a:t>
             </a:r>
             <a:endParaRPr lang="en-US" sz="1400" dirty="0"/>
           </a:p>
@@ -33458,7 +34109,7 @@
                 <a:ea typeface="Trebuchet MS" pitchFamily="34" charset="-122"/>
                 <a:cs typeface="Trebuchet MS" pitchFamily="34" charset="-120"/>
               </a:rPr>
-              <a:t>a</a:t>
+              <a:t>p</a:t>
             </a:r>
             <a:endParaRPr lang="en-US" sz="900" dirty="0"/>
           </a:p>
@@ -33524,7 +34175,7 @@
                 <a:ea typeface="Trebuchet MS" pitchFamily="34" charset="-122"/>
                 <a:cs typeface="Trebuchet MS" pitchFamily="34" charset="-120"/>
               </a:rPr>
-              <a:t>l</a:t>
+              <a:t>e</a:t>
             </a:r>
             <a:endParaRPr lang="en-US" sz="900" dirty="0"/>
           </a:p>
@@ -33590,7 +34241,7 @@
                 <a:ea typeface="Trebuchet MS" pitchFamily="34" charset="-122"/>
                 <a:cs typeface="Trebuchet MS" pitchFamily="34" charset="-120"/>
               </a:rPr>
-              <a:t>t</a:t>
+              <a:t>r</a:t>
             </a:r>
             <a:endParaRPr lang="en-US" sz="900" dirty="0"/>
           </a:p>
@@ -36422,7 +37073,7 @@
                 <a:ea typeface="Trebuchet MS" pitchFamily="34" charset="-122"/>
                 <a:cs typeface="Trebuchet MS" pitchFamily="34" charset="-120"/>
               </a:rPr>
-              <a:t>-age</a:t>
+              <a:t>-ic</a:t>
             </a:r>
             <a:endParaRPr lang="en-US" sz="1300" dirty="0"/>
           </a:p>
@@ -36725,7 +37376,7 @@
                 <a:ea typeface="Trebuchet MS" pitchFamily="34" charset="-122"/>
                 <a:cs typeface="Trebuchet MS" pitchFamily="34" charset="-120"/>
               </a:rPr>
-              <a:t>centimeter</a:t>
+              <a:t>perimeter</a:t>
             </a:r>
             <a:endParaRPr lang="en-US" sz="1200" dirty="0"/>
           </a:p>
@@ -36791,7 +37442,7 @@
                 <a:ea typeface="Trebuchet MS" pitchFamily="34" charset="-122"/>
                 <a:cs typeface="Trebuchet MS" pitchFamily="34" charset="-120"/>
               </a:rPr>
-              <a:t>perimeter</a:t>
+              <a:t>speedometer</a:t>
             </a:r>
             <a:endParaRPr lang="en-US" sz="1200" dirty="0"/>
           </a:p>
@@ -36857,7 +37508,7 @@
                 <a:ea typeface="Trebuchet MS" pitchFamily="34" charset="-122"/>
                 <a:cs typeface="Trebuchet MS" pitchFamily="34" charset="-120"/>
               </a:rPr>
-              <a:t>diameter</a:t>
+              <a:t>centimeter</a:t>
             </a:r>
             <a:endParaRPr lang="en-US" sz="1200" dirty="0"/>
           </a:p>
@@ -36923,7 +37574,7 @@
                 <a:ea typeface="Trebuchet MS" pitchFamily="34" charset="-122"/>
                 <a:cs typeface="Trebuchet MS" pitchFamily="34" charset="-120"/>
               </a:rPr>
-              <a:t>speedometer</a:t>
+              <a:t>diameter</a:t>
             </a:r>
             <a:endParaRPr lang="en-US" sz="1200" dirty="0"/>
           </a:p>
@@ -38177,7 +38828,7 @@
                 <a:ea typeface="Calibri" pitchFamily="34" charset="-122"/>
                 <a:cs typeface="Calibri" pitchFamily="34" charset="-120"/>
               </a:rPr>
-              <a:t>1.  The root 'meter' comes from Greek and means to measure.</a:t>
+              <a:t>1.  A barometer is used to measure the distance between two cities.</a:t>
             </a:r>
             <a:endParaRPr lang="en-US" sz="1300" dirty="0"/>
           </a:p>
@@ -38200,11 +38851,11 @@
             </a:avLst>
           </a:prstGeom>
           <a:solidFill>
-            <a:srgbClr val="DCFCE7"/>
-          </a:solidFill>
-          <a:ln w="12700">
-            <a:solidFill>
-              <a:srgbClr val="16A34A"/>
+            <a:srgbClr val="FEE2E2"/>
+          </a:solidFill>
+          <a:ln w="12700">
+            <a:solidFill>
+              <a:srgbClr val="DC2626"/>
             </a:solidFill>
             <a:prstDash val="solid"/>
           </a:ln>
@@ -38237,13 +38888,13 @@
             <a:r>
               <a:rPr lang="en-US" sz="1100" b="1" dirty="0">
                 <a:solidFill>
-                  <a:srgbClr val="16A34A"/>
+                  <a:srgbClr val="DC2626"/>
                 </a:solidFill>
                 <a:latin typeface="Trebuchet MS" pitchFamily="34" charset="0"/>
                 <a:ea typeface="Trebuchet MS" pitchFamily="34" charset="-122"/>
                 <a:cs typeface="Trebuchet MS" pitchFamily="34" charset="-120"/>
               </a:rPr>
-              <a:t>TRUE</a:t>
+              <a:t>FALSE</a:t>
             </a:r>
             <a:endParaRPr lang="en-US" sz="1100" dirty="0"/>
           </a:p>
@@ -38316,7 +38967,7 @@
                 <a:ea typeface="Calibri" pitchFamily="34" charset="-122"/>
                 <a:cs typeface="Calibri" pitchFamily="34" charset="-120"/>
               </a:rPr>
-              <a:t>2.  A perimeter measures the temperature of an object.</a:t>
+              <a:t>2.  A thermometer is used to measure temperature.</a:t>
             </a:r>
             <a:endParaRPr lang="en-US" sz="1300" dirty="0"/>
           </a:p>
@@ -38339,11 +38990,11 @@
             </a:avLst>
           </a:prstGeom>
           <a:solidFill>
-            <a:srgbClr val="FEE2E2"/>
-          </a:solidFill>
-          <a:ln w="12700">
-            <a:solidFill>
-              <a:srgbClr val="DC2626"/>
+            <a:srgbClr val="DCFCE7"/>
+          </a:solidFill>
+          <a:ln w="12700">
+            <a:solidFill>
+              <a:srgbClr val="16A34A"/>
             </a:solidFill>
             <a:prstDash val="solid"/>
           </a:ln>
@@ -38376,13 +39027,13 @@
             <a:r>
               <a:rPr lang="en-US" sz="1100" b="1" dirty="0">
                 <a:solidFill>
-                  <a:srgbClr val="DC2626"/>
+                  <a:srgbClr val="16A34A"/>
                 </a:solidFill>
                 <a:latin typeface="Trebuchet MS" pitchFamily="34" charset="0"/>
                 <a:ea typeface="Trebuchet MS" pitchFamily="34" charset="-122"/>
                 <a:cs typeface="Trebuchet MS" pitchFamily="34" charset="-120"/>
               </a:rPr>
-              <a:t>FALSE</a:t>
+              <a:t>TRUE</a:t>
             </a:r>
             <a:endParaRPr lang="en-US" sz="1100" dirty="0"/>
           </a:p>
@@ -38455,7 +39106,7 @@
                 <a:ea typeface="Calibri" pitchFamily="34" charset="-122"/>
                 <a:cs typeface="Calibri" pitchFamily="34" charset="-120"/>
               </a:rPr>
-              <a:t>3.  A thermometer contains the root 'meter', which relates to measuring.</a:t>
+              <a:t>3.  The root 'meter' comes from a Latin word meaning 'to write'.</a:t>
             </a:r>
             <a:endParaRPr lang="en-US" sz="1300" dirty="0"/>
           </a:p>
@@ -38478,11 +39129,11 @@
             </a:avLst>
           </a:prstGeom>
           <a:solidFill>
-            <a:srgbClr val="DCFCE7"/>
-          </a:solidFill>
-          <a:ln w="12700">
-            <a:solidFill>
-              <a:srgbClr val="16A34A"/>
+            <a:srgbClr val="FEE2E2"/>
+          </a:solidFill>
+          <a:ln w="12700">
+            <a:solidFill>
+              <a:srgbClr val="DC2626"/>
             </a:solidFill>
             <a:prstDash val="solid"/>
           </a:ln>
@@ -38515,13 +39166,13 @@
             <a:r>
               <a:rPr lang="en-US" sz="1100" b="1" dirty="0">
                 <a:solidFill>
-                  <a:srgbClr val="16A34A"/>
+                  <a:srgbClr val="DC2626"/>
                 </a:solidFill>
                 <a:latin typeface="Trebuchet MS" pitchFamily="34" charset="0"/>
                 <a:ea typeface="Trebuchet MS" pitchFamily="34" charset="-122"/>
                 <a:cs typeface="Trebuchet MS" pitchFamily="34" charset="-120"/>
               </a:rPr>
-              <a:t>TRUE</a:t>
+              <a:t>FALSE</a:t>
             </a:r>
             <a:endParaRPr lang="en-US" sz="1100" dirty="0"/>
           </a:p>
@@ -38594,7 +39245,7 @@
                 <a:ea typeface="Calibri" pitchFamily="34" charset="-122"/>
                 <a:cs typeface="Calibri" pitchFamily="34" charset="-120"/>
               </a:rPr>
-              <a:t>4.  A speedometer is an instrument used to measure speed.</a:t>
+              <a:t>4.  The word 'perimeter' contains the root 'meter' meaning measure.</a:t>
             </a:r>
             <a:endParaRPr lang="en-US" sz="1300" dirty="0"/>
           </a:p>
@@ -38733,7 +39384,7 @@
                 <a:ea typeface="Calibri" pitchFamily="34" charset="-122"/>
                 <a:cs typeface="Calibri" pitchFamily="34" charset="-120"/>
               </a:rPr>
-              <a:t>5.  The root 'meter' comes from Latin and means distance.</a:t>
+              <a:t>5.  A speedometer measures how fast something is moving.</a:t>
             </a:r>
             <a:endParaRPr lang="en-US" sz="1300" dirty="0"/>
           </a:p>
@@ -38756,11 +39407,11 @@
             </a:avLst>
           </a:prstGeom>
           <a:solidFill>
-            <a:srgbClr val="FEE2E2"/>
-          </a:solidFill>
-          <a:ln w="12700">
-            <a:solidFill>
-              <a:srgbClr val="DC2626"/>
+            <a:srgbClr val="DCFCE7"/>
+          </a:solidFill>
+          <a:ln w="12700">
+            <a:solidFill>
+              <a:srgbClr val="16A34A"/>
             </a:solidFill>
             <a:prstDash val="solid"/>
           </a:ln>
@@ -38793,13 +39444,13 @@
             <a:r>
               <a:rPr lang="en-US" sz="1100" b="1" dirty="0">
                 <a:solidFill>
-                  <a:srgbClr val="DC2626"/>
+                  <a:srgbClr val="16A34A"/>
                 </a:solidFill>
                 <a:latin typeface="Trebuchet MS" pitchFamily="34" charset="0"/>
                 <a:ea typeface="Trebuchet MS" pitchFamily="34" charset="-122"/>
                 <a:cs typeface="Trebuchet MS" pitchFamily="34" charset="-120"/>
               </a:rPr>
-              <a:t>FALSE</a:t>
+              <a:t>TRUE</a:t>
             </a:r>
             <a:endParaRPr lang="en-US" sz="1100" dirty="0"/>
           </a:p>
@@ -39570,7 +40221,7 @@
                 <a:ea typeface="Trebuchet MS" pitchFamily="34" charset="-122"/>
                 <a:cs typeface="Trebuchet MS" pitchFamily="34" charset="-120"/>
               </a:rPr>
-              <a:t>centimeter</a:t>
+              <a:t>perimeter</a:t>
             </a:r>
             <a:endParaRPr lang="en-US" sz="1300" dirty="0"/>
           </a:p>
@@ -39636,7 +40287,7 @@
                 <a:ea typeface="Trebuchet MS" pitchFamily="34" charset="-122"/>
                 <a:cs typeface="Trebuchet MS" pitchFamily="34" charset="-120"/>
               </a:rPr>
-              <a:t>perimeter</a:t>
+              <a:t>speedometer</a:t>
             </a:r>
             <a:endParaRPr lang="en-US" sz="1300" dirty="0"/>
           </a:p>
@@ -39702,7 +40353,7 @@
                 <a:ea typeface="Trebuchet MS" pitchFamily="34" charset="-122"/>
                 <a:cs typeface="Trebuchet MS" pitchFamily="34" charset="-120"/>
               </a:rPr>
-              <a:t>diameter</a:t>
+              <a:t>centimeter</a:t>
             </a:r>
             <a:endParaRPr lang="en-US" sz="1300" dirty="0"/>
           </a:p>
@@ -39768,7 +40419,7 @@
                 <a:ea typeface="Trebuchet MS" pitchFamily="34" charset="-122"/>
                 <a:cs typeface="Trebuchet MS" pitchFamily="34" charset="-120"/>
               </a:rPr>
-              <a:t>speedometer</a:t>
+              <a:t>diameter</a:t>
             </a:r>
             <a:endParaRPr lang="en-US" sz="1300" dirty="0"/>
           </a:p>
@@ -41101,7 +41752,7 @@
                 <a:ea typeface="Trebuchet MS" pitchFamily="34" charset="-122"/>
                 <a:cs typeface="Trebuchet MS" pitchFamily="34" charset="-120"/>
               </a:rPr>
-              <a:t>-age</a:t>
+              <a:t>-ic</a:t>
             </a:r>
             <a:endParaRPr lang="en-US" sz="1300" dirty="0"/>
           </a:p>
@@ -42012,7 +42663,7 @@
                 <a:ea typeface="Calibri" pitchFamily="34" charset="-122"/>
                 <a:cs typeface="Calibri" pitchFamily="34" charset="-120"/>
               </a:rPr>
-              <a:t>An instrument in a car that measures how fast it is travelling.</a:t>
+              <a:t>A straight line that passes through the centre of a circle from one side to the other.</a:t>
             </a:r>
             <a:endParaRPr lang="en-US" sz="1200" dirty="0"/>
           </a:p>
@@ -42151,7 +42802,7 @@
                 <a:ea typeface="Calibri" pitchFamily="34" charset="-122"/>
                 <a:cs typeface="Calibri" pitchFamily="34" charset="-120"/>
               </a:rPr>
-              <a:t>A unit of length that is one hundredth of a metre.</a:t>
+              <a:t>The total distance around the outside of a shape.</a:t>
             </a:r>
             <a:endParaRPr lang="en-US" sz="1200" dirty="0"/>
           </a:p>
@@ -42290,7 +42941,7 @@
                 <a:ea typeface="Calibri" pitchFamily="34" charset="-122"/>
                 <a:cs typeface="Calibri" pitchFamily="34" charset="-120"/>
               </a:rPr>
-              <a:t>The total distance around the outside edge of a shape.</a:t>
+              <a:t>A device in a vehicle that measures how fast it is travelling.</a:t>
             </a:r>
             <a:endParaRPr lang="en-US" sz="1200" dirty="0"/>
           </a:p>
@@ -42363,7 +43014,7 @@
                 <a:ea typeface="Trebuchet MS" pitchFamily="34" charset="-122"/>
                 <a:cs typeface="Trebuchet MS" pitchFamily="34" charset="-120"/>
               </a:rPr>
-              <a:t>centimeter</a:t>
+              <a:t>perimeter</a:t>
             </a:r>
             <a:endParaRPr lang="en-US" sz="1200" dirty="0"/>
           </a:p>
@@ -42502,7 +43153,7 @@
                 <a:ea typeface="Trebuchet MS" pitchFamily="34" charset="-122"/>
                 <a:cs typeface="Trebuchet MS" pitchFamily="34" charset="-120"/>
               </a:rPr>
-              <a:t>perimeter</a:t>
+              <a:t>speedometer</a:t>
             </a:r>
             <a:endParaRPr lang="en-US" sz="1200" dirty="0"/>
           </a:p>
@@ -42568,7 +43219,7 @@
                 <a:ea typeface="Calibri" pitchFamily="34" charset="-122"/>
                 <a:cs typeface="Calibri" pitchFamily="34" charset="-120"/>
               </a:rPr>
-              <a:t>A straight line that goes through the centre of a circle from one side to the other.</a:t>
+              <a:t>A unit of length that is one hundredth of a metre.</a:t>
             </a:r>
             <a:endParaRPr lang="en-US" sz="1200" dirty="0"/>
           </a:p>
@@ -42641,7 +43292,7 @@
                 <a:ea typeface="Trebuchet MS" pitchFamily="34" charset="-122"/>
                 <a:cs typeface="Trebuchet MS" pitchFamily="34" charset="-120"/>
               </a:rPr>
-              <a:t>diameter</a:t>
+              <a:t>centimeter</a:t>
             </a:r>
             <a:endParaRPr lang="en-US" sz="1200" dirty="0"/>
           </a:p>
@@ -42780,7 +43431,7 @@
                 <a:ea typeface="Trebuchet MS" pitchFamily="34" charset="-122"/>
                 <a:cs typeface="Trebuchet MS" pitchFamily="34" charset="-120"/>
               </a:rPr>
-              <a:t>speedometer</a:t>
+              <a:t>diameter</a:t>
             </a:r>
             <a:endParaRPr lang="en-US" sz="1200" dirty="0"/>
           </a:p>
@@ -42846,7 +43497,7 @@
                 <a:ea typeface="Calibri" pitchFamily="34" charset="-122"/>
                 <a:cs typeface="Calibri" pitchFamily="34" charset="-120"/>
               </a:rPr>
-              <a:t>An instrument that measures air pressure to help predict the weather.</a:t>
+              <a:t>A tool that measures air pressure to help predict the weather.</a:t>
             </a:r>
             <a:endParaRPr lang="en-US" sz="1200" dirty="0"/>
           </a:p>
@@ -43669,7 +44320,7 @@
                 <a:ea typeface="Calibri" pitchFamily="34" charset="-122"/>
                 <a:cs typeface="Calibri" pitchFamily="34" charset="-120"/>
               </a:rPr>
-              <a:t>Dad watched the speedometer carefully to make sure he wasn't driving too fast.</a:t>
+              <a:t>The pilot checked the altimeter to see how high the plane was flying.</a:t>
             </a:r>
             <a:endParaRPr lang="en-US" sz="1500" dirty="0"/>
           </a:p>

--- a/output/wordlabs-meter-3day.pptx
+++ b/output/wordlabs-meter-3day.pptx
@@ -4240,7 +4240,7 @@
                 <a:ea typeface="Calibri" pitchFamily="34" charset="-122"/>
                 <a:cs typeface="Calibri" pitchFamily="34" charset="-120"/>
               </a:rPr>
-              <a:t>"measure or measuring instrument"</a:t>
+              <a:t>"measure"</a:t>
             </a:r>
             <a:endParaRPr lang="en-US" sz="2200" dirty="0"/>
           </a:p>
@@ -4279,7 +4279,7 @@
                 <a:ea typeface="Calibri" pitchFamily="34" charset="-122"/>
                 <a:cs typeface="Calibri" pitchFamily="34" charset="-120"/>
               </a:rPr>
-              <a:t>Origin: Greek: metron</a:t>
+              <a:t>Origin: Greek root</a:t>
             </a:r>
             <a:endParaRPr lang="en-US" sz="1300" dirty="0"/>
           </a:p>
@@ -5288,7 +5288,7 @@
                 <a:ea typeface="Calibri" pitchFamily="34" charset="-122"/>
                 <a:cs typeface="Calibri" pitchFamily="34" charset="-120"/>
               </a:rPr>
-              <a:t>Word Labs  •  wordlabs.app  •  Root: 'meter' = measure or measuring instrument</a:t>
+              <a:t>Word Labs  •  wordlabs.app  •  Root: 'meter' = measure</a:t>
             </a:r>
             <a:endParaRPr lang="en-US" sz="800" dirty="0"/>
           </a:p>
@@ -5622,7 +5622,7 @@
                 <a:ea typeface="Trebuchet MS" pitchFamily="34" charset="-122"/>
                 <a:cs typeface="Trebuchet MS" pitchFamily="34" charset="-120"/>
               </a:rPr>
-              <a:t>1</a:t>
+              <a:t>0</a:t>
             </a:r>
             <a:pPr algn="ctr" indent="0" marL="0">
               <a:buNone/>
@@ -5928,7 +5928,7 @@
                 <a:ea typeface="Calibri" pitchFamily="34" charset="-122"/>
                 <a:cs typeface="Calibri" pitchFamily="34" charset="-120"/>
               </a:rPr>
-              <a:t>Word Labs  •  wordlabs.app  •  Root: 'meter' = measure or measuring instrument</a:t>
+              <a:t>Word Labs  •  wordlabs.app  •  Root: 'meter' = measure</a:t>
             </a:r>
             <a:endParaRPr lang="en-US" sz="800" dirty="0"/>
           </a:p>
@@ -6040,7 +6040,7 @@
                 <a:ea typeface="Calibri" pitchFamily="34" charset="-122"/>
                 <a:cs typeface="Calibri" pitchFamily="34" charset="-120"/>
               </a:rPr>
-              <a:t>The </a:t>
+              <a:t>The nurse used a </a:t>
             </a:r>
             <a:pPr algn="l" indent="0" marL="0">
               <a:buNone/>
@@ -6071,7 +6071,7 @@
                 <a:ea typeface="Calibri" pitchFamily="34" charset="-122"/>
                 <a:cs typeface="Calibri" pitchFamily="34" charset="-120"/>
               </a:rPr>
-              <a:t> showed it was too hot outside, so we used the </a:t>
+              <a:t> to check the patient's temperature. Old sailing ships carried </a:t>
             </a:r>
             <a:pPr algn="l" indent="0" marL="0">
               <a:buNone/>
@@ -6088,7 +6088,7 @@
                 <a:ea typeface="Calibri" pitchFamily="34" charset="-122"/>
                 <a:cs typeface="Calibri" pitchFamily="34" charset="-120"/>
               </a:rPr>
-              <a:t>speedometer</a:t>
+              <a:t>chronometers</a:t>
             </a:r>
             <a:pPr algn="l" indent="0" marL="0">
               <a:buNone/>
@@ -6102,7 +6102,7 @@
                 <a:ea typeface="Calibri" pitchFamily="34" charset="-122"/>
                 <a:cs typeface="Calibri" pitchFamily="34" charset="-120"/>
               </a:rPr>
-              <a:t> to check we were driving slowly to the shaded park.</a:t>
+              <a:t> to help navigators calculate longitude.</a:t>
             </a:r>
             <a:endParaRPr lang="en-US" sz="1800" dirty="0"/>
           </a:p>
@@ -6385,7 +6385,7 @@
                 <a:ea typeface="Trebuchet MS" pitchFamily="34" charset="-122"/>
                 <a:cs typeface="Trebuchet MS" pitchFamily="34" charset="-120"/>
               </a:rPr>
-              <a:t>speedometer</a:t>
+              <a:t>chronometers</a:t>
             </a:r>
             <a:endParaRPr lang="en-US" sz="1400" dirty="0"/>
           </a:p>
@@ -6716,7 +6716,7 @@
                 <a:ea typeface="Calibri" pitchFamily="34" charset="-122"/>
                 <a:cs typeface="Calibri" pitchFamily="34" charset="-120"/>
               </a:rPr>
-              <a:t>Word Labs  •  wordlabs.app  •  Root: 'meter' = measure or measuring instrument</a:t>
+              <a:t>Word Labs  •  wordlabs.app  •  Root: 'meter' = measure</a:t>
             </a:r>
             <a:endParaRPr lang="en-US" sz="800" dirty="0"/>
           </a:p>
@@ -7543,7 +7543,7 @@
                 <a:ea typeface="Calibri" pitchFamily="34" charset="-122"/>
                 <a:cs typeface="Calibri" pitchFamily="34" charset="-120"/>
               </a:rPr>
-              <a:t>Word Labs  •  wordlabs.app  •  Root: 'meter' = measure or measuring instrument</a:t>
+              <a:t>Word Labs  •  wordlabs.app  •  Root: 'meter' = measure</a:t>
             </a:r>
             <a:endParaRPr lang="en-US" sz="800" dirty="0"/>
           </a:p>
@@ -7972,7 +7972,7 @@
                 <a:ea typeface="Calibri" pitchFamily="34" charset="-122"/>
                 <a:cs typeface="Calibri" pitchFamily="34" charset="-120"/>
               </a:rPr>
-              <a:t>measuring instrument</a:t>
+              <a:t>measure</a:t>
             </a:r>
             <a:endParaRPr lang="en-US" sz="850" dirty="0"/>
           </a:p>
@@ -8528,7 +8528,7 @@
                 <a:ea typeface="Calibri" pitchFamily="34" charset="-122"/>
                 <a:cs typeface="Calibri" pitchFamily="34" charset="-120"/>
               </a:rPr>
-              <a:t>Word Labs  •  wordlabs.app  •  Root: 'meter' = measure or measuring instrument</a:t>
+              <a:t>Word Labs  •  wordlabs.app  •  Root: 'meter' = measure</a:t>
             </a:r>
             <a:endParaRPr lang="en-US" sz="800" dirty="0"/>
           </a:p>
@@ -8957,7 +8957,7 @@
                 <a:ea typeface="Calibri" pitchFamily="34" charset="-122"/>
                 <a:cs typeface="Calibri" pitchFamily="34" charset="-120"/>
               </a:rPr>
-              <a:t>measuring instrument</a:t>
+              <a:t>measure</a:t>
             </a:r>
             <a:endParaRPr lang="en-US" sz="850" dirty="0"/>
           </a:p>
@@ -9855,7 +9855,7 @@
                 <a:ea typeface="Calibri" pitchFamily="34" charset="-122"/>
                 <a:cs typeface="Calibri" pitchFamily="34" charset="-120"/>
               </a:rPr>
-              <a:t>Word Labs  •  wordlabs.app  •  Root: 'meter' = measure or measuring instrument</a:t>
+              <a:t>Word Labs  •  wordlabs.app  •  Root: 'meter' = measure</a:t>
             </a:r>
             <a:endParaRPr lang="en-US" sz="800" dirty="0"/>
           </a:p>
@@ -10284,7 +10284,7 @@
                 <a:ea typeface="Calibri" pitchFamily="34" charset="-122"/>
                 <a:cs typeface="Calibri" pitchFamily="34" charset="-120"/>
               </a:rPr>
-              <a:t>measuring instrument</a:t>
+              <a:t>measure</a:t>
             </a:r>
             <a:endParaRPr lang="en-US" sz="850" dirty="0"/>
           </a:p>
@@ -11671,7 +11671,7 @@
                 <a:ea typeface="Calibri" pitchFamily="34" charset="-122"/>
                 <a:cs typeface="Calibri" pitchFamily="34" charset="-120"/>
               </a:rPr>
-              <a:t>Word Labs  •  wordlabs.app  •  Root: 'meter' = measure or measuring instrument</a:t>
+              <a:t>Word Labs  •  wordlabs.app  •  Root: 'meter' = measure</a:t>
             </a:r>
             <a:endParaRPr lang="en-US" sz="800" dirty="0"/>
           </a:p>
@@ -11810,7 +11810,7 @@
                 <a:ea typeface="Trebuchet MS" pitchFamily="34" charset="-122"/>
                 <a:cs typeface="Trebuchet MS" pitchFamily="34" charset="-120"/>
               </a:rPr>
-              <a:t>speedometer</a:t>
+              <a:t>chronometers</a:t>
             </a:r>
             <a:endParaRPr lang="en-US" sz="2800" dirty="0"/>
           </a:p>
@@ -12498,7 +12498,7 @@
                 <a:ea typeface="Calibri" pitchFamily="34" charset="-122"/>
                 <a:cs typeface="Calibri" pitchFamily="34" charset="-120"/>
               </a:rPr>
-              <a:t>Word Labs  •  wordlabs.app  •  Root: 'meter' = measure or measuring instrument</a:t>
+              <a:t>Word Labs  •  wordlabs.app  •  Root: 'meter' = measure</a:t>
             </a:r>
             <a:endParaRPr lang="en-US" sz="800" dirty="0"/>
           </a:p>
@@ -12637,7 +12637,7 @@
                 <a:ea typeface="Trebuchet MS" pitchFamily="34" charset="-122"/>
                 <a:cs typeface="Trebuchet MS" pitchFamily="34" charset="-120"/>
               </a:rPr>
-              <a:t>speedometer</a:t>
+              <a:t>chronometers</a:t>
             </a:r>
             <a:endParaRPr lang="en-US" sz="2800" dirty="0"/>
           </a:p>
@@ -12776,7 +12776,7 @@
                 <a:ea typeface="Trebuchet MS" pitchFamily="34" charset="-122"/>
                 <a:cs typeface="Trebuchet MS" pitchFamily="34" charset="-120"/>
               </a:rPr>
-              <a:t>speed</a:t>
+              <a:t>chrono</a:t>
             </a:r>
             <a:endParaRPr lang="en-US" sz="1300" dirty="0"/>
           </a:p>
@@ -12815,7 +12815,7 @@
                 <a:ea typeface="Calibri" pitchFamily="34" charset="-122"/>
                 <a:cs typeface="Calibri" pitchFamily="34" charset="-120"/>
               </a:rPr>
-              <a:t>how fast</a:t>
+              <a:t>time</a:t>
             </a:r>
             <a:endParaRPr lang="en-US" sz="850" dirty="0"/>
           </a:p>
@@ -12838,11 +12838,11 @@
             </a:avLst>
           </a:prstGeom>
           <a:solidFill>
-            <a:srgbClr val="FCE7F3"/>
+            <a:srgbClr val="CCFBF1"/>
           </a:solidFill>
           <a:ln w="19050">
             <a:solidFill>
-              <a:srgbClr val="DB2777"/>
+              <a:srgbClr val="0D9488"/>
             </a:solidFill>
             <a:prstDash val="solid"/>
           </a:ln>
@@ -12882,13 +12882,13 @@
             <a:r>
               <a:rPr lang="en-US" sz="1300" b="1" dirty="0">
                 <a:solidFill>
-                  <a:srgbClr val="9D174D"/>
+                  <a:srgbClr val="0F766E"/>
                 </a:solidFill>
                 <a:latin typeface="Trebuchet MS" pitchFamily="34" charset="0"/>
                 <a:ea typeface="Trebuchet MS" pitchFamily="34" charset="-122"/>
                 <a:cs typeface="Trebuchet MS" pitchFamily="34" charset="-120"/>
               </a:rPr>
-              <a:t>o</a:t>
+              <a:t>meter</a:t>
             </a:r>
             <a:endParaRPr lang="en-US" sz="1300" dirty="0"/>
           </a:p>
@@ -12927,7 +12927,7 @@
                 <a:ea typeface="Calibri" pitchFamily="34" charset="-122"/>
                 <a:cs typeface="Calibri" pitchFamily="34" charset="-120"/>
               </a:rPr>
-              <a:t>connecting vowel</a:t>
+              <a:t>measure</a:t>
             </a:r>
             <a:endParaRPr lang="en-US" sz="850" dirty="0"/>
           </a:p>
@@ -12935,46 +12935,7 @@
       </p:sp>
       <p:sp>
         <p:nvSpPr>
-          <p:cNvPr id="22" name="Text 20"/>
-          <p:cNvSpPr/>
-          <p:nvPr/>
-        </p:nvSpPr>
-        <p:spPr>
-          <a:xfrm>
-            <a:off x="4370832" y="2752344"/>
-            <a:ext cx="1828800" cy="182880"/>
-          </a:xfrm>
-          <a:prstGeom prst="rect">
-            <a:avLst/>
-          </a:prstGeom>
-          <a:noFill/>
-          <a:ln/>
-        </p:spPr>
-        <p:txBody>
-          <a:bodyPr wrap="square" lIns="0" tIns="0" rIns="0" bIns="0" rtlCol="0" anchor="t"/>
-          <a:lstStyle/>
-          <a:p>
-            <a:pPr algn="ctr" indent="0" marL="0">
-              <a:buNone/>
-            </a:pPr>
-            <a:r>
-              <a:rPr lang="en-US" sz="700" i="1" dirty="0">
-                <a:solidFill>
-                  <a:srgbClr val="94A3B8"/>
-                </a:solidFill>
-                <a:latin typeface="Calibri" pitchFamily="34" charset="0"/>
-                <a:ea typeface="Calibri" pitchFamily="34" charset="-122"/>
-                <a:cs typeface="Calibri" pitchFamily="34" charset="-120"/>
-              </a:rPr>
-              <a:t>links base to root</a:t>
-            </a:r>
-            <a:endParaRPr lang="en-US" sz="700" dirty="0"/>
-          </a:p>
-        </p:txBody>
-      </p:sp>
-      <p:sp>
-        <p:nvSpPr>
-          <p:cNvPr id="23" name="Shape 21"/>
+          <p:cNvPr id="22" name="Shape 20"/>
           <p:cNvSpPr/>
           <p:nvPr/>
         </p:nvSpPr>
@@ -12989,11 +12950,11 @@
             </a:avLst>
           </a:prstGeom>
           <a:solidFill>
-            <a:srgbClr val="CCFBF1"/>
+            <a:srgbClr val="FCE7F3"/>
           </a:solidFill>
           <a:ln w="19050">
             <a:solidFill>
-              <a:srgbClr val="0D9488"/>
+              <a:srgbClr val="DB2777"/>
             </a:solidFill>
             <a:prstDash val="solid"/>
           </a:ln>
@@ -13008,7 +12969,7 @@
       </p:sp>
       <p:sp>
         <p:nvSpPr>
-          <p:cNvPr id="24" name="Text 22"/>
+          <p:cNvPr id="23" name="Text 21"/>
           <p:cNvSpPr/>
           <p:nvPr/>
         </p:nvSpPr>
@@ -13033,13 +12994,13 @@
             <a:r>
               <a:rPr lang="en-US" sz="1300" b="1" dirty="0">
                 <a:solidFill>
-                  <a:srgbClr val="0F766E"/>
+                  <a:srgbClr val="9D174D"/>
                 </a:solidFill>
                 <a:latin typeface="Trebuchet MS" pitchFamily="34" charset="0"/>
                 <a:ea typeface="Trebuchet MS" pitchFamily="34" charset="-122"/>
                 <a:cs typeface="Trebuchet MS" pitchFamily="34" charset="-120"/>
               </a:rPr>
-              <a:t>meter</a:t>
+              <a:t>s</a:t>
             </a:r>
             <a:endParaRPr lang="en-US" sz="1300" dirty="0"/>
           </a:p>
@@ -13047,7 +13008,7 @@
       </p:sp>
       <p:sp>
         <p:nvSpPr>
-          <p:cNvPr id="25" name="Text 23"/>
+          <p:cNvPr id="24" name="Text 22"/>
           <p:cNvSpPr/>
           <p:nvPr/>
         </p:nvSpPr>
@@ -13078,7 +13039,7 @@
                 <a:ea typeface="Calibri" pitchFamily="34" charset="-122"/>
                 <a:cs typeface="Calibri" pitchFamily="34" charset="-120"/>
               </a:rPr>
-              <a:t>measuring instrument</a:t>
+              <a:t>plural or present tense</a:t>
             </a:r>
             <a:endParaRPr lang="en-US" sz="850" dirty="0"/>
           </a:p>
@@ -13086,7 +13047,7 @@
       </p:sp>
       <p:sp>
         <p:nvSpPr>
-          <p:cNvPr id="26" name="Shape 24"/>
+          <p:cNvPr id="25" name="Shape 23"/>
           <p:cNvSpPr/>
           <p:nvPr/>
         </p:nvSpPr>
@@ -13113,7 +13074,7 @@
       </p:sp>
       <p:sp>
         <p:nvSpPr>
-          <p:cNvPr id="27" name="Text 25"/>
+          <p:cNvPr id="26" name="Text 24"/>
           <p:cNvSpPr/>
           <p:nvPr/>
         </p:nvSpPr>
@@ -13152,7 +13113,7 @@
       </p:sp>
       <p:sp>
         <p:nvSpPr>
-          <p:cNvPr id="28" name="Shape 26"/>
+          <p:cNvPr id="27" name="Shape 25"/>
           <p:cNvSpPr/>
           <p:nvPr/>
         </p:nvSpPr>
@@ -13179,7 +13140,7 @@
       </p:sp>
       <p:sp>
         <p:nvSpPr>
-          <p:cNvPr id="29" name="Text 27"/>
+          <p:cNvPr id="28" name="Text 26"/>
           <p:cNvSpPr/>
           <p:nvPr/>
         </p:nvSpPr>
@@ -13218,7 +13179,7 @@
       </p:sp>
       <p:sp>
         <p:nvSpPr>
-          <p:cNvPr id="30" name="Shape 28"/>
+          <p:cNvPr id="29" name="Shape 27"/>
           <p:cNvSpPr/>
           <p:nvPr/>
         </p:nvSpPr>
@@ -13245,7 +13206,7 @@
       </p:sp>
       <p:sp>
         <p:nvSpPr>
-          <p:cNvPr id="31" name="Text 29"/>
+          <p:cNvPr id="30" name="Text 28"/>
           <p:cNvSpPr/>
           <p:nvPr/>
         </p:nvSpPr>
@@ -13284,7 +13245,7 @@
       </p:sp>
       <p:sp>
         <p:nvSpPr>
-          <p:cNvPr id="32" name="Shape 30"/>
+          <p:cNvPr id="31" name="Shape 29"/>
           <p:cNvSpPr/>
           <p:nvPr/>
         </p:nvSpPr>
@@ -13311,7 +13272,7 @@
       </p:sp>
       <p:sp>
         <p:nvSpPr>
-          <p:cNvPr id="33" name="Text 31"/>
+          <p:cNvPr id="32" name="Text 30"/>
           <p:cNvSpPr/>
           <p:nvPr/>
         </p:nvSpPr>
@@ -13634,7 +13595,7 @@
                 <a:ea typeface="Calibri" pitchFamily="34" charset="-122"/>
                 <a:cs typeface="Calibri" pitchFamily="34" charset="-120"/>
               </a:rPr>
-              <a:t>Word Labs  •  wordlabs.app  •  Root: 'meter' = measure or measuring instrument</a:t>
+              <a:t>Word Labs  •  wordlabs.app  •  Root: 'meter' = measure</a:t>
             </a:r>
             <a:endParaRPr lang="en-US" sz="800" dirty="0"/>
           </a:p>
@@ -13773,7 +13734,7 @@
                 <a:ea typeface="Trebuchet MS" pitchFamily="34" charset="-122"/>
                 <a:cs typeface="Trebuchet MS" pitchFamily="34" charset="-120"/>
               </a:rPr>
-              <a:t>speedometer</a:t>
+              <a:t>chronometers</a:t>
             </a:r>
             <a:endParaRPr lang="en-US" sz="2800" dirty="0"/>
           </a:p>
@@ -13912,7 +13873,7 @@
                 <a:ea typeface="Trebuchet MS" pitchFamily="34" charset="-122"/>
                 <a:cs typeface="Trebuchet MS" pitchFamily="34" charset="-120"/>
               </a:rPr>
-              <a:t>speed</a:t>
+              <a:t>chrono</a:t>
             </a:r>
             <a:endParaRPr lang="en-US" sz="1300" dirty="0"/>
           </a:p>
@@ -13951,7 +13912,7 @@
                 <a:ea typeface="Calibri" pitchFamily="34" charset="-122"/>
                 <a:cs typeface="Calibri" pitchFamily="34" charset="-120"/>
               </a:rPr>
-              <a:t>how fast</a:t>
+              <a:t>time</a:t>
             </a:r>
             <a:endParaRPr lang="en-US" sz="850" dirty="0"/>
           </a:p>
@@ -13974,11 +13935,11 @@
             </a:avLst>
           </a:prstGeom>
           <a:solidFill>
-            <a:srgbClr val="FCE7F3"/>
+            <a:srgbClr val="CCFBF1"/>
           </a:solidFill>
           <a:ln w="19050">
             <a:solidFill>
-              <a:srgbClr val="DB2777"/>
+              <a:srgbClr val="0D9488"/>
             </a:solidFill>
             <a:prstDash val="solid"/>
           </a:ln>
@@ -14018,13 +13979,13 @@
             <a:r>
               <a:rPr lang="en-US" sz="1300" b="1" dirty="0">
                 <a:solidFill>
-                  <a:srgbClr val="9D174D"/>
+                  <a:srgbClr val="0F766E"/>
                 </a:solidFill>
                 <a:latin typeface="Trebuchet MS" pitchFamily="34" charset="0"/>
                 <a:ea typeface="Trebuchet MS" pitchFamily="34" charset="-122"/>
                 <a:cs typeface="Trebuchet MS" pitchFamily="34" charset="-120"/>
               </a:rPr>
-              <a:t>o</a:t>
+              <a:t>meter</a:t>
             </a:r>
             <a:endParaRPr lang="en-US" sz="1300" dirty="0"/>
           </a:p>
@@ -14063,7 +14024,7 @@
                 <a:ea typeface="Calibri" pitchFamily="34" charset="-122"/>
                 <a:cs typeface="Calibri" pitchFamily="34" charset="-120"/>
               </a:rPr>
-              <a:t>connecting vowel</a:t>
+              <a:t>measure</a:t>
             </a:r>
             <a:endParaRPr lang="en-US" sz="850" dirty="0"/>
           </a:p>
@@ -14071,46 +14032,7 @@
       </p:sp>
       <p:sp>
         <p:nvSpPr>
-          <p:cNvPr id="22" name="Text 20"/>
-          <p:cNvSpPr/>
-          <p:nvPr/>
-        </p:nvSpPr>
-        <p:spPr>
-          <a:xfrm>
-            <a:off x="4370832" y="2752344"/>
-            <a:ext cx="1828800" cy="182880"/>
-          </a:xfrm>
-          <a:prstGeom prst="rect">
-            <a:avLst/>
-          </a:prstGeom>
-          <a:noFill/>
-          <a:ln/>
-        </p:spPr>
-        <p:txBody>
-          <a:bodyPr wrap="square" lIns="0" tIns="0" rIns="0" bIns="0" rtlCol="0" anchor="t"/>
-          <a:lstStyle/>
-          <a:p>
-            <a:pPr algn="ctr" indent="0" marL="0">
-              <a:buNone/>
-            </a:pPr>
-            <a:r>
-              <a:rPr lang="en-US" sz="700" i="1" dirty="0">
-                <a:solidFill>
-                  <a:srgbClr val="94A3B8"/>
-                </a:solidFill>
-                <a:latin typeface="Calibri" pitchFamily="34" charset="0"/>
-                <a:ea typeface="Calibri" pitchFamily="34" charset="-122"/>
-                <a:cs typeface="Calibri" pitchFamily="34" charset="-120"/>
-              </a:rPr>
-              <a:t>links base to root</a:t>
-            </a:r>
-            <a:endParaRPr lang="en-US" sz="700" dirty="0"/>
-          </a:p>
-        </p:txBody>
-      </p:sp>
-      <p:sp>
-        <p:nvSpPr>
-          <p:cNvPr id="23" name="Shape 21"/>
+          <p:cNvPr id="22" name="Shape 20"/>
           <p:cNvSpPr/>
           <p:nvPr/>
         </p:nvSpPr>
@@ -14125,11 +14047,11 @@
             </a:avLst>
           </a:prstGeom>
           <a:solidFill>
-            <a:srgbClr val="CCFBF1"/>
+            <a:srgbClr val="FCE7F3"/>
           </a:solidFill>
           <a:ln w="19050">
             <a:solidFill>
-              <a:srgbClr val="0D9488"/>
+              <a:srgbClr val="DB2777"/>
             </a:solidFill>
             <a:prstDash val="solid"/>
           </a:ln>
@@ -14144,7 +14066,7 @@
       </p:sp>
       <p:sp>
         <p:nvSpPr>
-          <p:cNvPr id="24" name="Text 22"/>
+          <p:cNvPr id="23" name="Text 21"/>
           <p:cNvSpPr/>
           <p:nvPr/>
         </p:nvSpPr>
@@ -14169,13 +14091,13 @@
             <a:r>
               <a:rPr lang="en-US" sz="1300" b="1" dirty="0">
                 <a:solidFill>
-                  <a:srgbClr val="0F766E"/>
+                  <a:srgbClr val="9D174D"/>
                 </a:solidFill>
                 <a:latin typeface="Trebuchet MS" pitchFamily="34" charset="0"/>
                 <a:ea typeface="Trebuchet MS" pitchFamily="34" charset="-122"/>
                 <a:cs typeface="Trebuchet MS" pitchFamily="34" charset="-120"/>
               </a:rPr>
-              <a:t>meter</a:t>
+              <a:t>s</a:t>
             </a:r>
             <a:endParaRPr lang="en-US" sz="1300" dirty="0"/>
           </a:p>
@@ -14183,7 +14105,7 @@
       </p:sp>
       <p:sp>
         <p:nvSpPr>
-          <p:cNvPr id="25" name="Text 23"/>
+          <p:cNvPr id="24" name="Text 22"/>
           <p:cNvSpPr/>
           <p:nvPr/>
         </p:nvSpPr>
@@ -14214,7 +14136,7 @@
                 <a:ea typeface="Calibri" pitchFamily="34" charset="-122"/>
                 <a:cs typeface="Calibri" pitchFamily="34" charset="-120"/>
               </a:rPr>
-              <a:t>measuring instrument</a:t>
+              <a:t>plural or present tense</a:t>
             </a:r>
             <a:endParaRPr lang="en-US" sz="850" dirty="0"/>
           </a:p>
@@ -14222,7 +14144,7 @@
       </p:sp>
       <p:sp>
         <p:nvSpPr>
-          <p:cNvPr id="26" name="Shape 24"/>
+          <p:cNvPr id="25" name="Shape 23"/>
           <p:cNvSpPr/>
           <p:nvPr/>
         </p:nvSpPr>
@@ -14249,7 +14171,7 @@
       </p:sp>
       <p:sp>
         <p:nvSpPr>
-          <p:cNvPr id="27" name="Text 25"/>
+          <p:cNvPr id="26" name="Text 24"/>
           <p:cNvSpPr/>
           <p:nvPr/>
         </p:nvSpPr>
@@ -14288,7 +14210,7 @@
       </p:sp>
       <p:sp>
         <p:nvSpPr>
-          <p:cNvPr id="28" name="Shape 26"/>
+          <p:cNvPr id="27" name="Shape 25"/>
           <p:cNvSpPr/>
           <p:nvPr/>
         </p:nvSpPr>
@@ -14315,7 +14237,7 @@
       </p:sp>
       <p:sp>
         <p:nvSpPr>
-          <p:cNvPr id="29" name="Shape 27"/>
+          <p:cNvPr id="28" name="Shape 26"/>
           <p:cNvSpPr/>
           <p:nvPr/>
         </p:nvSpPr>
@@ -14342,7 +14264,7 @@
       </p:sp>
       <p:sp>
         <p:nvSpPr>
-          <p:cNvPr id="30" name="Text 28"/>
+          <p:cNvPr id="29" name="Text 27"/>
           <p:cNvSpPr/>
           <p:nvPr/>
         </p:nvSpPr>
@@ -14373,7 +14295,7 @@
                 <a:ea typeface="Trebuchet MS" pitchFamily="34" charset="-122"/>
                 <a:cs typeface="Trebuchet MS" pitchFamily="34" charset="-120"/>
               </a:rPr>
-              <a:t>speed</a:t>
+              <a:t>chro</a:t>
             </a:r>
             <a:endParaRPr lang="en-US" sz="1400" dirty="0"/>
           </a:p>
@@ -14381,7 +14303,7 @@
       </p:sp>
       <p:sp>
         <p:nvSpPr>
-          <p:cNvPr id="31" name="Text 29"/>
+          <p:cNvPr id="30" name="Text 28"/>
           <p:cNvSpPr/>
           <p:nvPr/>
         </p:nvSpPr>
@@ -14420,7 +14342,7 @@
       </p:sp>
       <p:sp>
         <p:nvSpPr>
-          <p:cNvPr id="32" name="Shape 30"/>
+          <p:cNvPr id="31" name="Shape 29"/>
           <p:cNvSpPr/>
           <p:nvPr/>
         </p:nvSpPr>
@@ -14447,7 +14369,7 @@
       </p:sp>
       <p:sp>
         <p:nvSpPr>
-          <p:cNvPr id="33" name="Text 31"/>
+          <p:cNvPr id="32" name="Text 30"/>
           <p:cNvSpPr/>
           <p:nvPr/>
         </p:nvSpPr>
@@ -14478,7 +14400,7 @@
                 <a:ea typeface="Trebuchet MS" pitchFamily="34" charset="-122"/>
                 <a:cs typeface="Trebuchet MS" pitchFamily="34" charset="-120"/>
               </a:rPr>
-              <a:t>om</a:t>
+              <a:t>nom</a:t>
             </a:r>
             <a:endParaRPr lang="en-US" sz="1400" dirty="0"/>
           </a:p>
@@ -14486,7 +14408,7 @@
       </p:sp>
       <p:sp>
         <p:nvSpPr>
-          <p:cNvPr id="34" name="Text 32"/>
+          <p:cNvPr id="33" name="Text 31"/>
           <p:cNvSpPr/>
           <p:nvPr/>
         </p:nvSpPr>
@@ -14525,7 +14447,7 @@
       </p:sp>
       <p:sp>
         <p:nvSpPr>
-          <p:cNvPr id="35" name="Shape 33"/>
+          <p:cNvPr id="34" name="Shape 32"/>
           <p:cNvSpPr/>
           <p:nvPr/>
         </p:nvSpPr>
@@ -14552,7 +14474,7 @@
       </p:sp>
       <p:sp>
         <p:nvSpPr>
-          <p:cNvPr id="36" name="Text 34"/>
+          <p:cNvPr id="35" name="Text 33"/>
           <p:cNvSpPr/>
           <p:nvPr/>
         </p:nvSpPr>
@@ -14591,7 +14513,7 @@
       </p:sp>
       <p:sp>
         <p:nvSpPr>
-          <p:cNvPr id="37" name="Text 35"/>
+          <p:cNvPr id="36" name="Text 34"/>
           <p:cNvSpPr/>
           <p:nvPr/>
         </p:nvSpPr>
@@ -14630,7 +14552,7 @@
       </p:sp>
       <p:sp>
         <p:nvSpPr>
-          <p:cNvPr id="38" name="Shape 36"/>
+          <p:cNvPr id="37" name="Shape 35"/>
           <p:cNvSpPr/>
           <p:nvPr/>
         </p:nvSpPr>
@@ -14657,7 +14579,7 @@
       </p:sp>
       <p:sp>
         <p:nvSpPr>
-          <p:cNvPr id="39" name="Text 37"/>
+          <p:cNvPr id="38" name="Text 36"/>
           <p:cNvSpPr/>
           <p:nvPr/>
         </p:nvSpPr>
@@ -14688,7 +14610,7 @@
                 <a:ea typeface="Trebuchet MS" pitchFamily="34" charset="-122"/>
                 <a:cs typeface="Trebuchet MS" pitchFamily="34" charset="-120"/>
               </a:rPr>
-              <a:t>ter</a:t>
+              <a:t>ters</a:t>
             </a:r>
             <a:endParaRPr lang="en-US" sz="1400" dirty="0"/>
           </a:p>
@@ -14696,7 +14618,7 @@
       </p:sp>
       <p:sp>
         <p:nvSpPr>
-          <p:cNvPr id="40" name="Shape 38"/>
+          <p:cNvPr id="39" name="Shape 37"/>
           <p:cNvSpPr/>
           <p:nvPr/>
         </p:nvSpPr>
@@ -14723,7 +14645,7 @@
       </p:sp>
       <p:sp>
         <p:nvSpPr>
-          <p:cNvPr id="41" name="Text 39"/>
+          <p:cNvPr id="40" name="Text 38"/>
           <p:cNvSpPr/>
           <p:nvPr/>
         </p:nvSpPr>
@@ -14762,7 +14684,7 @@
       </p:sp>
       <p:sp>
         <p:nvSpPr>
-          <p:cNvPr id="42" name="Shape 40"/>
+          <p:cNvPr id="41" name="Shape 39"/>
           <p:cNvSpPr/>
           <p:nvPr/>
         </p:nvSpPr>
@@ -14789,7 +14711,7 @@
       </p:sp>
       <p:sp>
         <p:nvSpPr>
-          <p:cNvPr id="43" name="Text 41"/>
+          <p:cNvPr id="42" name="Text 40"/>
           <p:cNvSpPr/>
           <p:nvPr/>
         </p:nvSpPr>
@@ -15021,7 +14943,7 @@
                 <a:ea typeface="Calibri" pitchFamily="34" charset="-122"/>
                 <a:cs typeface="Calibri" pitchFamily="34" charset="-120"/>
               </a:rPr>
-              <a:t>Root 'meter' — measure or measuring instrument</a:t>
+              <a:t>Root 'meter' — measure</a:t>
             </a:r>
             <a:endParaRPr lang="en-US" sz="1600" dirty="0"/>
           </a:p>
@@ -15377,7 +15299,7 @@
                 <a:ea typeface="Calibri" pitchFamily="34" charset="-122"/>
                 <a:cs typeface="Calibri" pitchFamily="34" charset="-120"/>
               </a:rPr>
-              <a:t>Word Labs  •  wordlabs.app  •  Root: 'meter' = measure or measuring instrument</a:t>
+              <a:t>Word Labs  •  wordlabs.app  •  Root: 'meter' = measure</a:t>
             </a:r>
             <a:endParaRPr lang="en-US" sz="800" dirty="0"/>
           </a:p>
@@ -15516,7 +15438,7 @@
                 <a:ea typeface="Trebuchet MS" pitchFamily="34" charset="-122"/>
                 <a:cs typeface="Trebuchet MS" pitchFamily="34" charset="-120"/>
               </a:rPr>
-              <a:t>speedometer</a:t>
+              <a:t>chronometers</a:t>
             </a:r>
             <a:endParaRPr lang="en-US" sz="2800" dirty="0"/>
           </a:p>
@@ -15655,7 +15577,7 @@
                 <a:ea typeface="Trebuchet MS" pitchFamily="34" charset="-122"/>
                 <a:cs typeface="Trebuchet MS" pitchFamily="34" charset="-120"/>
               </a:rPr>
-              <a:t>speed</a:t>
+              <a:t>chrono</a:t>
             </a:r>
             <a:endParaRPr lang="en-US" sz="1300" dirty="0"/>
           </a:p>
@@ -15694,7 +15616,7 @@
                 <a:ea typeface="Calibri" pitchFamily="34" charset="-122"/>
                 <a:cs typeface="Calibri" pitchFamily="34" charset="-120"/>
               </a:rPr>
-              <a:t>how fast</a:t>
+              <a:t>time</a:t>
             </a:r>
             <a:endParaRPr lang="en-US" sz="850" dirty="0"/>
           </a:p>
@@ -15717,11 +15639,11 @@
             </a:avLst>
           </a:prstGeom>
           <a:solidFill>
-            <a:srgbClr val="FCE7F3"/>
+            <a:srgbClr val="CCFBF1"/>
           </a:solidFill>
           <a:ln w="19050">
             <a:solidFill>
-              <a:srgbClr val="DB2777"/>
+              <a:srgbClr val="0D9488"/>
             </a:solidFill>
             <a:prstDash val="solid"/>
           </a:ln>
@@ -15761,13 +15683,13 @@
             <a:r>
               <a:rPr lang="en-US" sz="1300" b="1" dirty="0">
                 <a:solidFill>
-                  <a:srgbClr val="9D174D"/>
+                  <a:srgbClr val="0F766E"/>
                 </a:solidFill>
                 <a:latin typeface="Trebuchet MS" pitchFamily="34" charset="0"/>
                 <a:ea typeface="Trebuchet MS" pitchFamily="34" charset="-122"/>
                 <a:cs typeface="Trebuchet MS" pitchFamily="34" charset="-120"/>
               </a:rPr>
-              <a:t>o</a:t>
+              <a:t>meter</a:t>
             </a:r>
             <a:endParaRPr lang="en-US" sz="1300" dirty="0"/>
           </a:p>
@@ -15806,7 +15728,7 @@
                 <a:ea typeface="Calibri" pitchFamily="34" charset="-122"/>
                 <a:cs typeface="Calibri" pitchFamily="34" charset="-120"/>
               </a:rPr>
-              <a:t>connecting vowel</a:t>
+              <a:t>measure</a:t>
             </a:r>
             <a:endParaRPr lang="en-US" sz="850" dirty="0"/>
           </a:p>
@@ -15814,46 +15736,7 @@
       </p:sp>
       <p:sp>
         <p:nvSpPr>
-          <p:cNvPr id="22" name="Text 20"/>
-          <p:cNvSpPr/>
-          <p:nvPr/>
-        </p:nvSpPr>
-        <p:spPr>
-          <a:xfrm>
-            <a:off x="4370832" y="2752344"/>
-            <a:ext cx="1828800" cy="182880"/>
-          </a:xfrm>
-          <a:prstGeom prst="rect">
-            <a:avLst/>
-          </a:prstGeom>
-          <a:noFill/>
-          <a:ln/>
-        </p:spPr>
-        <p:txBody>
-          <a:bodyPr wrap="square" lIns="0" tIns="0" rIns="0" bIns="0" rtlCol="0" anchor="t"/>
-          <a:lstStyle/>
-          <a:p>
-            <a:pPr algn="ctr" indent="0" marL="0">
-              <a:buNone/>
-            </a:pPr>
-            <a:r>
-              <a:rPr lang="en-US" sz="700" i="1" dirty="0">
-                <a:solidFill>
-                  <a:srgbClr val="94A3B8"/>
-                </a:solidFill>
-                <a:latin typeface="Calibri" pitchFamily="34" charset="0"/>
-                <a:ea typeface="Calibri" pitchFamily="34" charset="-122"/>
-                <a:cs typeface="Calibri" pitchFamily="34" charset="-120"/>
-              </a:rPr>
-              <a:t>links base to root</a:t>
-            </a:r>
-            <a:endParaRPr lang="en-US" sz="700" dirty="0"/>
-          </a:p>
-        </p:txBody>
-      </p:sp>
-      <p:sp>
-        <p:nvSpPr>
-          <p:cNvPr id="23" name="Shape 21"/>
+          <p:cNvPr id="22" name="Shape 20"/>
           <p:cNvSpPr/>
           <p:nvPr/>
         </p:nvSpPr>
@@ -15868,11 +15751,11 @@
             </a:avLst>
           </a:prstGeom>
           <a:solidFill>
-            <a:srgbClr val="CCFBF1"/>
+            <a:srgbClr val="FCE7F3"/>
           </a:solidFill>
           <a:ln w="19050">
             <a:solidFill>
-              <a:srgbClr val="0D9488"/>
+              <a:srgbClr val="DB2777"/>
             </a:solidFill>
             <a:prstDash val="solid"/>
           </a:ln>
@@ -15887,7 +15770,7 @@
       </p:sp>
       <p:sp>
         <p:nvSpPr>
-          <p:cNvPr id="24" name="Text 22"/>
+          <p:cNvPr id="23" name="Text 21"/>
           <p:cNvSpPr/>
           <p:nvPr/>
         </p:nvSpPr>
@@ -15912,13 +15795,13 @@
             <a:r>
               <a:rPr lang="en-US" sz="1300" b="1" dirty="0">
                 <a:solidFill>
-                  <a:srgbClr val="0F766E"/>
+                  <a:srgbClr val="9D174D"/>
                 </a:solidFill>
                 <a:latin typeface="Trebuchet MS" pitchFamily="34" charset="0"/>
                 <a:ea typeface="Trebuchet MS" pitchFamily="34" charset="-122"/>
                 <a:cs typeface="Trebuchet MS" pitchFamily="34" charset="-120"/>
               </a:rPr>
-              <a:t>meter</a:t>
+              <a:t>s</a:t>
             </a:r>
             <a:endParaRPr lang="en-US" sz="1300" dirty="0"/>
           </a:p>
@@ -15926,7 +15809,7 @@
       </p:sp>
       <p:sp>
         <p:nvSpPr>
-          <p:cNvPr id="25" name="Text 23"/>
+          <p:cNvPr id="24" name="Text 22"/>
           <p:cNvSpPr/>
           <p:nvPr/>
         </p:nvSpPr>
@@ -15957,7 +15840,7 @@
                 <a:ea typeface="Calibri" pitchFamily="34" charset="-122"/>
                 <a:cs typeface="Calibri" pitchFamily="34" charset="-120"/>
               </a:rPr>
-              <a:t>measuring instrument</a:t>
+              <a:t>plural or present tense</a:t>
             </a:r>
             <a:endParaRPr lang="en-US" sz="850" dirty="0"/>
           </a:p>
@@ -15965,7 +15848,7 @@
       </p:sp>
       <p:sp>
         <p:nvSpPr>
-          <p:cNvPr id="26" name="Shape 24"/>
+          <p:cNvPr id="25" name="Shape 23"/>
           <p:cNvSpPr/>
           <p:nvPr/>
         </p:nvSpPr>
@@ -15992,7 +15875,7 @@
       </p:sp>
       <p:sp>
         <p:nvSpPr>
-          <p:cNvPr id="27" name="Text 25"/>
+          <p:cNvPr id="26" name="Text 24"/>
           <p:cNvSpPr/>
           <p:nvPr/>
         </p:nvSpPr>
@@ -16031,7 +15914,7 @@
       </p:sp>
       <p:sp>
         <p:nvSpPr>
-          <p:cNvPr id="28" name="Shape 26"/>
+          <p:cNvPr id="27" name="Shape 25"/>
           <p:cNvSpPr/>
           <p:nvPr/>
         </p:nvSpPr>
@@ -16058,7 +15941,7 @@
       </p:sp>
       <p:sp>
         <p:nvSpPr>
-          <p:cNvPr id="29" name="Shape 27"/>
+          <p:cNvPr id="28" name="Shape 26"/>
           <p:cNvSpPr/>
           <p:nvPr/>
         </p:nvSpPr>
@@ -16085,7 +15968,7 @@
       </p:sp>
       <p:sp>
         <p:nvSpPr>
-          <p:cNvPr id="30" name="Text 28"/>
+          <p:cNvPr id="29" name="Text 27"/>
           <p:cNvSpPr/>
           <p:nvPr/>
         </p:nvSpPr>
@@ -16116,7 +15999,7 @@
                 <a:ea typeface="Trebuchet MS" pitchFamily="34" charset="-122"/>
                 <a:cs typeface="Trebuchet MS" pitchFamily="34" charset="-120"/>
               </a:rPr>
-              <a:t>speed</a:t>
+              <a:t>chro</a:t>
             </a:r>
             <a:endParaRPr lang="en-US" sz="1400" dirty="0"/>
           </a:p>
@@ -16124,7 +16007,7 @@
       </p:sp>
       <p:sp>
         <p:nvSpPr>
-          <p:cNvPr id="31" name="Text 29"/>
+          <p:cNvPr id="30" name="Text 28"/>
           <p:cNvSpPr/>
           <p:nvPr/>
         </p:nvSpPr>
@@ -16163,7 +16046,7 @@
       </p:sp>
       <p:sp>
         <p:nvSpPr>
-          <p:cNvPr id="32" name="Shape 30"/>
+          <p:cNvPr id="31" name="Shape 29"/>
           <p:cNvSpPr/>
           <p:nvPr/>
         </p:nvSpPr>
@@ -16190,7 +16073,7 @@
       </p:sp>
       <p:sp>
         <p:nvSpPr>
-          <p:cNvPr id="33" name="Text 31"/>
+          <p:cNvPr id="32" name="Text 30"/>
           <p:cNvSpPr/>
           <p:nvPr/>
         </p:nvSpPr>
@@ -16221,7 +16104,7 @@
                 <a:ea typeface="Trebuchet MS" pitchFamily="34" charset="-122"/>
                 <a:cs typeface="Trebuchet MS" pitchFamily="34" charset="-120"/>
               </a:rPr>
-              <a:t>om</a:t>
+              <a:t>nom</a:t>
             </a:r>
             <a:endParaRPr lang="en-US" sz="1400" dirty="0"/>
           </a:p>
@@ -16229,7 +16112,7 @@
       </p:sp>
       <p:sp>
         <p:nvSpPr>
-          <p:cNvPr id="34" name="Text 32"/>
+          <p:cNvPr id="33" name="Text 31"/>
           <p:cNvSpPr/>
           <p:nvPr/>
         </p:nvSpPr>
@@ -16268,7 +16151,7 @@
       </p:sp>
       <p:sp>
         <p:nvSpPr>
-          <p:cNvPr id="35" name="Shape 33"/>
+          <p:cNvPr id="34" name="Shape 32"/>
           <p:cNvSpPr/>
           <p:nvPr/>
         </p:nvSpPr>
@@ -16295,7 +16178,7 @@
       </p:sp>
       <p:sp>
         <p:nvSpPr>
-          <p:cNvPr id="36" name="Text 34"/>
+          <p:cNvPr id="35" name="Text 33"/>
           <p:cNvSpPr/>
           <p:nvPr/>
         </p:nvSpPr>
@@ -16334,7 +16217,7 @@
       </p:sp>
       <p:sp>
         <p:nvSpPr>
-          <p:cNvPr id="37" name="Text 35"/>
+          <p:cNvPr id="36" name="Text 34"/>
           <p:cNvSpPr/>
           <p:nvPr/>
         </p:nvSpPr>
@@ -16373,7 +16256,7 @@
       </p:sp>
       <p:sp>
         <p:nvSpPr>
-          <p:cNvPr id="38" name="Shape 36"/>
+          <p:cNvPr id="37" name="Shape 35"/>
           <p:cNvSpPr/>
           <p:nvPr/>
         </p:nvSpPr>
@@ -16400,7 +16283,7 @@
       </p:sp>
       <p:sp>
         <p:nvSpPr>
-          <p:cNvPr id="39" name="Text 37"/>
+          <p:cNvPr id="38" name="Text 36"/>
           <p:cNvSpPr/>
           <p:nvPr/>
         </p:nvSpPr>
@@ -16431,7 +16314,7 @@
                 <a:ea typeface="Trebuchet MS" pitchFamily="34" charset="-122"/>
                 <a:cs typeface="Trebuchet MS" pitchFamily="34" charset="-120"/>
               </a:rPr>
-              <a:t>ter</a:t>
+              <a:t>ters</a:t>
             </a:r>
             <a:endParaRPr lang="en-US" sz="1400" dirty="0"/>
           </a:p>
@@ -16439,7 +16322,7 @@
       </p:sp>
       <p:sp>
         <p:nvSpPr>
-          <p:cNvPr id="40" name="Shape 38"/>
+          <p:cNvPr id="39" name="Shape 37"/>
           <p:cNvSpPr/>
           <p:nvPr/>
         </p:nvSpPr>
@@ -16466,7 +16349,7 @@
       </p:sp>
       <p:sp>
         <p:nvSpPr>
-          <p:cNvPr id="41" name="Text 39"/>
+          <p:cNvPr id="40" name="Text 38"/>
           <p:cNvSpPr/>
           <p:nvPr/>
         </p:nvSpPr>
@@ -16505,7 +16388,7 @@
       </p:sp>
       <p:sp>
         <p:nvSpPr>
-          <p:cNvPr id="42" name="Shape 40"/>
+          <p:cNvPr id="41" name="Shape 39"/>
           <p:cNvSpPr/>
           <p:nvPr/>
         </p:nvSpPr>
@@ -16532,14 +16415,14 @@
       </p:sp>
       <p:sp>
         <p:nvSpPr>
-          <p:cNvPr id="43" name="Shape 41"/>
-          <p:cNvSpPr/>
-          <p:nvPr/>
-        </p:nvSpPr>
-        <p:spPr>
-          <a:xfrm>
-            <a:off x="1951330" y="4169664"/>
-            <a:ext cx="676656" cy="475488"/>
+          <p:cNvPr id="42" name="Shape 40"/>
+          <p:cNvSpPr/>
+          <p:nvPr/>
+        </p:nvSpPr>
+        <p:spPr>
+          <a:xfrm>
+            <a:off x="1951828" y="4169664"/>
+            <a:ext cx="603504" cy="475488"/>
           </a:xfrm>
           <a:prstGeom prst="rect">
             <a:avLst>
@@ -16559,14 +16442,14 @@
       </p:sp>
       <p:sp>
         <p:nvSpPr>
-          <p:cNvPr id="44" name="Text 42"/>
-          <p:cNvSpPr/>
-          <p:nvPr/>
-        </p:nvSpPr>
-        <p:spPr>
-          <a:xfrm>
-            <a:off x="1951330" y="4169664"/>
-            <a:ext cx="676656" cy="475488"/>
+          <p:cNvPr id="43" name="Text 41"/>
+          <p:cNvSpPr/>
+          <p:nvPr/>
+        </p:nvSpPr>
+        <p:spPr>
+          <a:xfrm>
+            <a:off x="1951828" y="4169664"/>
+            <a:ext cx="603504" cy="475488"/>
           </a:xfrm>
           <a:prstGeom prst="rect">
             <a:avLst/>
@@ -16590,7 +16473,7 @@
                 <a:ea typeface="Trebuchet MS" pitchFamily="34" charset="-122"/>
                 <a:cs typeface="Trebuchet MS" pitchFamily="34" charset="-120"/>
               </a:rPr>
-              <a:t>s</a:t>
+              <a:t>ch</a:t>
             </a:r>
             <a:endParaRPr lang="en-US" sz="900" dirty="0"/>
           </a:p>
@@ -16598,14 +16481,14 @@
       </p:sp>
       <p:sp>
         <p:nvSpPr>
-          <p:cNvPr id="45" name="Shape 43"/>
-          <p:cNvSpPr/>
-          <p:nvPr/>
-        </p:nvSpPr>
-        <p:spPr>
-          <a:xfrm>
-            <a:off x="2677363" y="4169664"/>
-            <a:ext cx="676656" cy="475488"/>
+          <p:cNvPr id="44" name="Shape 42"/>
+          <p:cNvSpPr/>
+          <p:nvPr/>
+        </p:nvSpPr>
+        <p:spPr>
+          <a:xfrm>
+            <a:off x="2605209" y="4169664"/>
+            <a:ext cx="603504" cy="475488"/>
           </a:xfrm>
           <a:prstGeom prst="rect">
             <a:avLst>
@@ -16625,14 +16508,14 @@
       </p:sp>
       <p:sp>
         <p:nvSpPr>
-          <p:cNvPr id="46" name="Text 44"/>
-          <p:cNvSpPr/>
-          <p:nvPr/>
-        </p:nvSpPr>
-        <p:spPr>
-          <a:xfrm>
-            <a:off x="2677363" y="4169664"/>
-            <a:ext cx="676656" cy="475488"/>
+          <p:cNvPr id="45" name="Text 43"/>
+          <p:cNvSpPr/>
+          <p:nvPr/>
+        </p:nvSpPr>
+        <p:spPr>
+          <a:xfrm>
+            <a:off x="2605209" y="4169664"/>
+            <a:ext cx="603504" cy="475488"/>
           </a:xfrm>
           <a:prstGeom prst="rect">
             <a:avLst/>
@@ -16656,7 +16539,7 @@
                 <a:ea typeface="Trebuchet MS" pitchFamily="34" charset="-122"/>
                 <a:cs typeface="Trebuchet MS" pitchFamily="34" charset="-120"/>
               </a:rPr>
-              <a:t>p</a:t>
+              <a:t>r</a:t>
             </a:r>
             <a:endParaRPr lang="en-US" sz="900" dirty="0"/>
           </a:p>
@@ -16664,14 +16547,14 @@
       </p:sp>
       <p:sp>
         <p:nvSpPr>
-          <p:cNvPr id="47" name="Shape 45"/>
-          <p:cNvSpPr/>
-          <p:nvPr/>
-        </p:nvSpPr>
-        <p:spPr>
-          <a:xfrm>
-            <a:off x="3403397" y="4169664"/>
-            <a:ext cx="676656" cy="475488"/>
+          <p:cNvPr id="46" name="Shape 44"/>
+          <p:cNvSpPr/>
+          <p:nvPr/>
+        </p:nvSpPr>
+        <p:spPr>
+          <a:xfrm>
+            <a:off x="3258589" y="4169664"/>
+            <a:ext cx="603504" cy="475488"/>
           </a:xfrm>
           <a:prstGeom prst="rect">
             <a:avLst>
@@ -16691,14 +16574,14 @@
       </p:sp>
       <p:sp>
         <p:nvSpPr>
-          <p:cNvPr id="48" name="Text 46"/>
-          <p:cNvSpPr/>
-          <p:nvPr/>
-        </p:nvSpPr>
-        <p:spPr>
-          <a:xfrm>
-            <a:off x="3403397" y="4169664"/>
-            <a:ext cx="676656" cy="475488"/>
+          <p:cNvPr id="47" name="Text 45"/>
+          <p:cNvSpPr/>
+          <p:nvPr/>
+        </p:nvSpPr>
+        <p:spPr>
+          <a:xfrm>
+            <a:off x="3258589" y="4169664"/>
+            <a:ext cx="603504" cy="475488"/>
           </a:xfrm>
           <a:prstGeom prst="rect">
             <a:avLst/>
@@ -16722,7 +16605,7 @@
                 <a:ea typeface="Trebuchet MS" pitchFamily="34" charset="-122"/>
                 <a:cs typeface="Trebuchet MS" pitchFamily="34" charset="-120"/>
               </a:rPr>
-              <a:t>ee</a:t>
+              <a:t>o</a:t>
             </a:r>
             <a:endParaRPr lang="en-US" sz="900" dirty="0"/>
           </a:p>
@@ -16730,14 +16613,14 @@
       </p:sp>
       <p:sp>
         <p:nvSpPr>
-          <p:cNvPr id="49" name="Shape 47"/>
-          <p:cNvSpPr/>
-          <p:nvPr/>
-        </p:nvSpPr>
-        <p:spPr>
-          <a:xfrm>
-            <a:off x="4129430" y="4169664"/>
-            <a:ext cx="676656" cy="475488"/>
+          <p:cNvPr id="48" name="Shape 46"/>
+          <p:cNvSpPr/>
+          <p:nvPr/>
+        </p:nvSpPr>
+        <p:spPr>
+          <a:xfrm>
+            <a:off x="3911969" y="4169664"/>
+            <a:ext cx="603504" cy="475488"/>
           </a:xfrm>
           <a:prstGeom prst="rect">
             <a:avLst>
@@ -16757,14 +16640,14 @@
       </p:sp>
       <p:sp>
         <p:nvSpPr>
-          <p:cNvPr id="50" name="Text 48"/>
-          <p:cNvSpPr/>
-          <p:nvPr/>
-        </p:nvSpPr>
-        <p:spPr>
-          <a:xfrm>
-            <a:off x="4129430" y="4169664"/>
-            <a:ext cx="676656" cy="475488"/>
+          <p:cNvPr id="49" name="Text 47"/>
+          <p:cNvSpPr/>
+          <p:nvPr/>
+        </p:nvSpPr>
+        <p:spPr>
+          <a:xfrm>
+            <a:off x="3911969" y="4169664"/>
+            <a:ext cx="603504" cy="475488"/>
           </a:xfrm>
           <a:prstGeom prst="rect">
             <a:avLst/>
@@ -16788,7 +16671,7 @@
                 <a:ea typeface="Trebuchet MS" pitchFamily="34" charset="-122"/>
                 <a:cs typeface="Trebuchet MS" pitchFamily="34" charset="-120"/>
               </a:rPr>
-              <a:t>d</a:t>
+              <a:t>n</a:t>
             </a:r>
             <a:endParaRPr lang="en-US" sz="900" dirty="0"/>
           </a:p>
@@ -16796,14 +16679,14 @@
       </p:sp>
       <p:sp>
         <p:nvSpPr>
-          <p:cNvPr id="51" name="Shape 49"/>
-          <p:cNvSpPr/>
-          <p:nvPr/>
-        </p:nvSpPr>
-        <p:spPr>
-          <a:xfrm>
-            <a:off x="4855464" y="4169664"/>
-            <a:ext cx="676656" cy="475488"/>
+          <p:cNvPr id="50" name="Shape 48"/>
+          <p:cNvSpPr/>
+          <p:nvPr/>
+        </p:nvSpPr>
+        <p:spPr>
+          <a:xfrm>
+            <a:off x="4565350" y="4169664"/>
+            <a:ext cx="603504" cy="475488"/>
           </a:xfrm>
           <a:prstGeom prst="rect">
             <a:avLst>
@@ -16823,14 +16706,14 @@
       </p:sp>
       <p:sp>
         <p:nvSpPr>
-          <p:cNvPr id="52" name="Text 50"/>
-          <p:cNvSpPr/>
-          <p:nvPr/>
-        </p:nvSpPr>
-        <p:spPr>
-          <a:xfrm>
-            <a:off x="4855464" y="4169664"/>
-            <a:ext cx="676656" cy="475488"/>
+          <p:cNvPr id="51" name="Text 49"/>
+          <p:cNvSpPr/>
+          <p:nvPr/>
+        </p:nvSpPr>
+        <p:spPr>
+          <a:xfrm>
+            <a:off x="4565350" y="4169664"/>
+            <a:ext cx="603504" cy="475488"/>
           </a:xfrm>
           <a:prstGeom prst="rect">
             <a:avLst/>
@@ -16862,14 +16745,14 @@
       </p:sp>
       <p:sp>
         <p:nvSpPr>
-          <p:cNvPr id="53" name="Shape 51"/>
-          <p:cNvSpPr/>
-          <p:nvPr/>
-        </p:nvSpPr>
-        <p:spPr>
-          <a:xfrm>
-            <a:off x="5581498" y="4169664"/>
-            <a:ext cx="676656" cy="475488"/>
+          <p:cNvPr id="52" name="Shape 50"/>
+          <p:cNvSpPr/>
+          <p:nvPr/>
+        </p:nvSpPr>
+        <p:spPr>
+          <a:xfrm>
+            <a:off x="5218730" y="4169664"/>
+            <a:ext cx="603504" cy="475488"/>
           </a:xfrm>
           <a:prstGeom prst="rect">
             <a:avLst>
@@ -16889,14 +16772,14 @@
       </p:sp>
       <p:sp>
         <p:nvSpPr>
-          <p:cNvPr id="54" name="Text 52"/>
-          <p:cNvSpPr/>
-          <p:nvPr/>
-        </p:nvSpPr>
-        <p:spPr>
-          <a:xfrm>
-            <a:off x="5581498" y="4169664"/>
-            <a:ext cx="676656" cy="475488"/>
+          <p:cNvPr id="53" name="Text 51"/>
+          <p:cNvSpPr/>
+          <p:nvPr/>
+        </p:nvSpPr>
+        <p:spPr>
+          <a:xfrm>
+            <a:off x="5218730" y="4169664"/>
+            <a:ext cx="603504" cy="475488"/>
           </a:xfrm>
           <a:prstGeom prst="rect">
             <a:avLst/>
@@ -16928,14 +16811,14 @@
       </p:sp>
       <p:sp>
         <p:nvSpPr>
-          <p:cNvPr id="55" name="Shape 53"/>
-          <p:cNvSpPr/>
-          <p:nvPr/>
-        </p:nvSpPr>
-        <p:spPr>
-          <a:xfrm>
-            <a:off x="6307531" y="4169664"/>
-            <a:ext cx="676656" cy="475488"/>
+          <p:cNvPr id="54" name="Shape 52"/>
+          <p:cNvSpPr/>
+          <p:nvPr/>
+        </p:nvSpPr>
+        <p:spPr>
+          <a:xfrm>
+            <a:off x="5872111" y="4169664"/>
+            <a:ext cx="603504" cy="475488"/>
           </a:xfrm>
           <a:prstGeom prst="rect">
             <a:avLst>
@@ -16955,14 +16838,14 @@
       </p:sp>
       <p:sp>
         <p:nvSpPr>
-          <p:cNvPr id="56" name="Text 54"/>
-          <p:cNvSpPr/>
-          <p:nvPr/>
-        </p:nvSpPr>
-        <p:spPr>
-          <a:xfrm>
-            <a:off x="6307531" y="4169664"/>
-            <a:ext cx="676656" cy="475488"/>
+          <p:cNvPr id="55" name="Text 53"/>
+          <p:cNvSpPr/>
+          <p:nvPr/>
+        </p:nvSpPr>
+        <p:spPr>
+          <a:xfrm>
+            <a:off x="5872111" y="4169664"/>
+            <a:ext cx="603504" cy="475488"/>
           </a:xfrm>
           <a:prstGeom prst="rect">
             <a:avLst/>
@@ -16994,14 +16877,14 @@
       </p:sp>
       <p:sp>
         <p:nvSpPr>
-          <p:cNvPr id="57" name="Shape 55"/>
-          <p:cNvSpPr/>
-          <p:nvPr/>
-        </p:nvSpPr>
-        <p:spPr>
-          <a:xfrm>
-            <a:off x="7033565" y="4169664"/>
-            <a:ext cx="676656" cy="475488"/>
+          <p:cNvPr id="56" name="Shape 54"/>
+          <p:cNvSpPr/>
+          <p:nvPr/>
+        </p:nvSpPr>
+        <p:spPr>
+          <a:xfrm>
+            <a:off x="6525491" y="4169664"/>
+            <a:ext cx="603504" cy="475488"/>
           </a:xfrm>
           <a:prstGeom prst="rect">
             <a:avLst>
@@ -17021,14 +16904,14 @@
       </p:sp>
       <p:sp>
         <p:nvSpPr>
-          <p:cNvPr id="58" name="Text 56"/>
-          <p:cNvSpPr/>
-          <p:nvPr/>
-        </p:nvSpPr>
-        <p:spPr>
-          <a:xfrm>
-            <a:off x="7033565" y="4169664"/>
-            <a:ext cx="676656" cy="475488"/>
+          <p:cNvPr id="57" name="Text 55"/>
+          <p:cNvSpPr/>
+          <p:nvPr/>
+        </p:nvSpPr>
+        <p:spPr>
+          <a:xfrm>
+            <a:off x="6525491" y="4169664"/>
+            <a:ext cx="603504" cy="475488"/>
           </a:xfrm>
           <a:prstGeom prst="rect">
             <a:avLst/>
@@ -17060,14 +16943,14 @@
       </p:sp>
       <p:sp>
         <p:nvSpPr>
-          <p:cNvPr id="59" name="Shape 57"/>
-          <p:cNvSpPr/>
-          <p:nvPr/>
-        </p:nvSpPr>
-        <p:spPr>
-          <a:xfrm>
-            <a:off x="7759598" y="4169664"/>
-            <a:ext cx="676656" cy="475488"/>
+          <p:cNvPr id="58" name="Shape 56"/>
+          <p:cNvSpPr/>
+          <p:nvPr/>
+        </p:nvSpPr>
+        <p:spPr>
+          <a:xfrm>
+            <a:off x="7178871" y="4169664"/>
+            <a:ext cx="603504" cy="475488"/>
           </a:xfrm>
           <a:prstGeom prst="rect">
             <a:avLst>
@@ -17087,14 +16970,14 @@
       </p:sp>
       <p:sp>
         <p:nvSpPr>
-          <p:cNvPr id="60" name="Text 58"/>
-          <p:cNvSpPr/>
-          <p:nvPr/>
-        </p:nvSpPr>
-        <p:spPr>
-          <a:xfrm>
-            <a:off x="7759598" y="4169664"/>
-            <a:ext cx="676656" cy="475488"/>
+          <p:cNvPr id="59" name="Text 57"/>
+          <p:cNvSpPr/>
+          <p:nvPr/>
+        </p:nvSpPr>
+        <p:spPr>
+          <a:xfrm>
+            <a:off x="7178871" y="4169664"/>
+            <a:ext cx="603504" cy="475488"/>
           </a:xfrm>
           <a:prstGeom prst="rect">
             <a:avLst/>
@@ -17119,6 +17002,72 @@
                 <a:cs typeface="Trebuchet MS" pitchFamily="34" charset="-120"/>
               </a:rPr>
               <a:t>er</a:t>
+            </a:r>
+            <a:endParaRPr lang="en-US" sz="900" dirty="0"/>
+          </a:p>
+        </p:txBody>
+      </p:sp>
+      <p:sp>
+        <p:nvSpPr>
+          <p:cNvPr id="60" name="Shape 58"/>
+          <p:cNvSpPr/>
+          <p:nvPr/>
+        </p:nvSpPr>
+        <p:spPr>
+          <a:xfrm>
+            <a:off x="7832252" y="4169664"/>
+            <a:ext cx="603504" cy="475488"/>
+          </a:xfrm>
+          <a:prstGeom prst="rect">
+            <a:avLst>
+              <a:gd name="adj" fmla="val 7692"/>
+            </a:avLst>
+          </a:prstGeom>
+          <a:solidFill>
+            <a:srgbClr val="FFFFFF"/>
+          </a:solidFill>
+          <a:ln w="12700">
+            <a:solidFill>
+              <a:srgbClr val="DB2777"/>
+            </a:solidFill>
+            <a:prstDash val="solid"/>
+          </a:ln>
+        </p:spPr>
+      </p:sp>
+      <p:sp>
+        <p:nvSpPr>
+          <p:cNvPr id="61" name="Text 59"/>
+          <p:cNvSpPr/>
+          <p:nvPr/>
+        </p:nvSpPr>
+        <p:spPr>
+          <a:xfrm>
+            <a:off x="7832252" y="4169664"/>
+            <a:ext cx="603504" cy="475488"/>
+          </a:xfrm>
+          <a:prstGeom prst="rect">
+            <a:avLst/>
+          </a:prstGeom>
+          <a:noFill/>
+          <a:ln/>
+        </p:spPr>
+        <p:txBody>
+          <a:bodyPr wrap="square" lIns="0" tIns="0" rIns="0" bIns="0" rtlCol="0" anchor="ctr"/>
+          <a:lstStyle/>
+          <a:p>
+            <a:pPr algn="ctr" indent="0" marL="0">
+              <a:buNone/>
+            </a:pPr>
+            <a:r>
+              <a:rPr lang="en-US" sz="900" b="1" dirty="0">
+                <a:solidFill>
+                  <a:srgbClr val="9D174D"/>
+                </a:solidFill>
+                <a:latin typeface="Trebuchet MS" pitchFamily="34" charset="0"/>
+                <a:ea typeface="Trebuchet MS" pitchFamily="34" charset="-122"/>
+                <a:cs typeface="Trebuchet MS" pitchFamily="34" charset="-120"/>
+              </a:rPr>
+              <a:t>s</a:t>
             </a:r>
             <a:endParaRPr lang="en-US" sz="900" dirty="0"/>
           </a:p>
@@ -17692,7 +17641,7 @@
                 <a:ea typeface="Calibri" pitchFamily="34" charset="-122"/>
                 <a:cs typeface="Calibri" pitchFamily="34" charset="-120"/>
               </a:rPr>
-              <a:t>Word Labs  •  wordlabs.app  •  Root: 'meter' = measure or measuring instrument</a:t>
+              <a:t>Word Labs  •  wordlabs.app  •  Root: 'meter' = measure</a:t>
             </a:r>
             <a:endParaRPr lang="en-US" sz="800" dirty="0"/>
           </a:p>
@@ -18026,7 +17975,7 @@
                 <a:ea typeface="Trebuchet MS" pitchFamily="34" charset="-122"/>
                 <a:cs typeface="Trebuchet MS" pitchFamily="34" charset="-120"/>
               </a:rPr>
-              <a:t>2</a:t>
+              <a:t>0</a:t>
             </a:r>
             <a:pPr algn="ctr" indent="0" marL="0">
               <a:buNone/>
@@ -18040,7 +17989,7 @@
                 <a:ea typeface="Trebuchet MS" pitchFamily="34" charset="-122"/>
                 <a:cs typeface="Trebuchet MS" pitchFamily="34" charset="-120"/>
               </a:rPr>
-              <a:t>  punctuation marks</a:t>
+              <a:t>  punctuation mark</a:t>
             </a:r>
             <a:endParaRPr lang="en-US" sz="2800" dirty="0"/>
           </a:p>
@@ -18332,7 +18281,7 @@
                 <a:ea typeface="Calibri" pitchFamily="34" charset="-122"/>
                 <a:cs typeface="Calibri" pitchFamily="34" charset="-120"/>
               </a:rPr>
-              <a:t>Word Labs  •  wordlabs.app  •  Root: 'meter' = measure or measuring instrument</a:t>
+              <a:t>Word Labs  •  wordlabs.app  •  Root: 'meter' = measure</a:t>
             </a:r>
             <a:endParaRPr lang="en-US" sz="800" dirty="0"/>
           </a:p>
@@ -18444,7 +18393,7 @@
                 <a:ea typeface="Calibri" pitchFamily="34" charset="-122"/>
                 <a:cs typeface="Calibri" pitchFamily="34" charset="-120"/>
               </a:rPr>
-              <a:t>Using a </a:t>
+              <a:t>The scientist checked several </a:t>
             </a:r>
             <a:pPr algn="l" indent="0" marL="0">
               <a:buNone/>
@@ -18461,7 +18410,7 @@
                 <a:ea typeface="Calibri" pitchFamily="34" charset="-122"/>
                 <a:cs typeface="Calibri" pitchFamily="34" charset="-120"/>
               </a:rPr>
-              <a:t>barometer</a:t>
+              <a:t>thermometers</a:t>
             </a:r>
             <a:pPr algn="l" indent="0" marL="0">
               <a:buNone/>
@@ -18475,7 +18424,7 @@
                 <a:ea typeface="Calibri" pitchFamily="34" charset="-122"/>
                 <a:cs typeface="Calibri" pitchFamily="34" charset="-120"/>
               </a:rPr>
-              <a:t>, </a:t>
+              <a:t> to compare the temperature readings. Speed is one </a:t>
             </a:r>
             <a:pPr algn="l" indent="0" marL="0">
               <a:buNone/>
@@ -18492,7 +18441,7 @@
                 <a:ea typeface="Calibri" pitchFamily="34" charset="-122"/>
                 <a:cs typeface="Calibri" pitchFamily="34" charset="-120"/>
               </a:rPr>
-              <a:t>altimeter</a:t>
+              <a:t>parameter</a:t>
             </a:r>
             <a:pPr algn="l" indent="0" marL="0">
               <a:buNone/>
@@ -18506,7 +18455,7 @@
                 <a:ea typeface="Calibri" pitchFamily="34" charset="-122"/>
                 <a:cs typeface="Calibri" pitchFamily="34" charset="-120"/>
               </a:rPr>
-              <a:t>, and </a:t>
+              <a:t> engineers must consider when designing a car. The engineers agreed on the </a:t>
             </a:r>
             <a:pPr algn="l" indent="0" marL="0">
               <a:buNone/>
@@ -18523,7 +18472,7 @@
                 <a:ea typeface="Calibri" pitchFamily="34" charset="-122"/>
                 <a:cs typeface="Calibri" pitchFamily="34" charset="-120"/>
               </a:rPr>
-              <a:t>perimeter</a:t>
+              <a:t>parameters</a:t>
             </a:r>
             <a:pPr algn="l" indent="0" marL="0">
               <a:buNone/>
@@ -18537,7 +18486,7 @@
                 <a:ea typeface="Calibri" pitchFamily="34" charset="-122"/>
                 <a:cs typeface="Calibri" pitchFamily="34" charset="-120"/>
               </a:rPr>
-              <a:t> measurement, the scientist recorded all the data carefully.</a:t>
+              <a:t> before starting the design.</a:t>
             </a:r>
             <a:endParaRPr lang="en-US" sz="1800" dirty="0"/>
           </a:p>
@@ -18692,7 +18641,7 @@
                 <a:ea typeface="Trebuchet MS" pitchFamily="34" charset="-122"/>
                 <a:cs typeface="Trebuchet MS" pitchFamily="34" charset="-120"/>
               </a:rPr>
-              <a:t>barometer</a:t>
+              <a:t>thermometers</a:t>
             </a:r>
             <a:endParaRPr lang="en-US" sz="1400" dirty="0"/>
           </a:p>
@@ -18820,7 +18769,7 @@
                 <a:ea typeface="Trebuchet MS" pitchFamily="34" charset="-122"/>
                 <a:cs typeface="Trebuchet MS" pitchFamily="34" charset="-120"/>
               </a:rPr>
-              <a:t>altimeter</a:t>
+              <a:t>parameter</a:t>
             </a:r>
             <a:endParaRPr lang="en-US" sz="1400" dirty="0"/>
           </a:p>
@@ -18948,7 +18897,7 @@
                 <a:ea typeface="Trebuchet MS" pitchFamily="34" charset="-122"/>
                 <a:cs typeface="Trebuchet MS" pitchFamily="34" charset="-120"/>
               </a:rPr>
-              <a:t>perimeter</a:t>
+              <a:t>parameters</a:t>
             </a:r>
             <a:endParaRPr lang="en-US" sz="1400" dirty="0"/>
           </a:p>
@@ -19279,7 +19228,7 @@
                 <a:ea typeface="Calibri" pitchFamily="34" charset="-122"/>
                 <a:cs typeface="Calibri" pitchFamily="34" charset="-120"/>
               </a:rPr>
-              <a:t>Word Labs  •  wordlabs.app  •  Root: 'meter' = measure or measuring instrument</a:t>
+              <a:t>Word Labs  •  wordlabs.app  •  Root: 'meter' = measure</a:t>
             </a:r>
             <a:endParaRPr lang="en-US" sz="800" dirty="0"/>
           </a:p>
@@ -19418,7 +19367,7 @@
                 <a:ea typeface="Trebuchet MS" pitchFamily="34" charset="-122"/>
                 <a:cs typeface="Trebuchet MS" pitchFamily="34" charset="-120"/>
               </a:rPr>
-              <a:t>barometer</a:t>
+              <a:t>thermometers</a:t>
             </a:r>
             <a:endParaRPr lang="en-US" sz="2800" dirty="0"/>
           </a:p>
@@ -20106,7 +20055,7 @@
                 <a:ea typeface="Calibri" pitchFamily="34" charset="-122"/>
                 <a:cs typeface="Calibri" pitchFamily="34" charset="-120"/>
               </a:rPr>
-              <a:t>Word Labs  •  wordlabs.app  •  Root: 'meter' = measure or measuring instrument</a:t>
+              <a:t>Word Labs  •  wordlabs.app  •  Root: 'meter' = measure</a:t>
             </a:r>
             <a:endParaRPr lang="en-US" sz="800" dirty="0"/>
           </a:p>
@@ -20245,7 +20194,7 @@
                 <a:ea typeface="Trebuchet MS" pitchFamily="34" charset="-122"/>
                 <a:cs typeface="Trebuchet MS" pitchFamily="34" charset="-120"/>
               </a:rPr>
-              <a:t>barometer</a:t>
+              <a:t>thermometers</a:t>
             </a:r>
             <a:endParaRPr lang="en-US" sz="2800" dirty="0"/>
           </a:p>
@@ -20325,7 +20274,7 @@
         </p:nvSpPr>
         <p:spPr>
           <a:xfrm>
-            <a:off x="2938272" y="2258568"/>
+            <a:off x="2221992" y="2258568"/>
             <a:ext cx="1828800" cy="292608"/>
           </a:xfrm>
           <a:prstGeom prst="rect">
@@ -20359,7 +20308,7 @@
         </p:nvSpPr>
         <p:spPr>
           <a:xfrm>
-            <a:off x="2938272" y="2258568"/>
+            <a:off x="2221992" y="2258568"/>
             <a:ext cx="1828800" cy="292608"/>
           </a:xfrm>
           <a:prstGeom prst="rect">
@@ -20384,7 +20333,7 @@
                 <a:ea typeface="Trebuchet MS" pitchFamily="34" charset="-122"/>
                 <a:cs typeface="Trebuchet MS" pitchFamily="34" charset="-120"/>
               </a:rPr>
-              <a:t>baro</a:t>
+              <a:t>thermo</a:t>
             </a:r>
             <a:endParaRPr lang="en-US" sz="1300" dirty="0"/>
           </a:p>
@@ -20398,7 +20347,7 @@
         </p:nvSpPr>
         <p:spPr>
           <a:xfrm>
-            <a:off x="2938272" y="2569464"/>
+            <a:off x="2221992" y="2569464"/>
             <a:ext cx="1828800" cy="201168"/>
           </a:xfrm>
           <a:prstGeom prst="rect">
@@ -20423,7 +20372,7 @@
                 <a:ea typeface="Calibri" pitchFamily="34" charset="-122"/>
                 <a:cs typeface="Calibri" pitchFamily="34" charset="-120"/>
               </a:rPr>
-              <a:t>weight or pressure</a:t>
+              <a:t>heat</a:t>
             </a:r>
             <a:endParaRPr lang="en-US" sz="850" dirty="0"/>
           </a:p>
@@ -20437,7 +20386,7 @@
         </p:nvSpPr>
         <p:spPr>
           <a:xfrm>
-            <a:off x="5803392" y="2258568"/>
+            <a:off x="4370832" y="2258568"/>
             <a:ext cx="1828800" cy="292608"/>
           </a:xfrm>
           <a:prstGeom prst="rect">
@@ -20471,7 +20420,7 @@
         </p:nvSpPr>
         <p:spPr>
           <a:xfrm>
-            <a:off x="5803392" y="2258568"/>
+            <a:off x="4370832" y="2258568"/>
             <a:ext cx="1828800" cy="292608"/>
           </a:xfrm>
           <a:prstGeom prst="rect">
@@ -20510,7 +20459,7 @@
         </p:nvSpPr>
         <p:spPr>
           <a:xfrm>
-            <a:off x="5803392" y="2569464"/>
+            <a:off x="4370832" y="2569464"/>
             <a:ext cx="1828800" cy="201168"/>
           </a:xfrm>
           <a:prstGeom prst="rect">
@@ -20535,7 +20484,7 @@
                 <a:ea typeface="Calibri" pitchFamily="34" charset="-122"/>
                 <a:cs typeface="Calibri" pitchFamily="34" charset="-120"/>
               </a:rPr>
-              <a:t>measuring instrument</a:t>
+              <a:t>measure</a:t>
             </a:r>
             <a:endParaRPr lang="en-US" sz="850" dirty="0"/>
           </a:p>
@@ -20544,6 +20493,118 @@
       <p:sp>
         <p:nvSpPr>
           <p:cNvPr id="22" name="Shape 20"/>
+          <p:cNvSpPr/>
+          <p:nvPr/>
+        </p:nvSpPr>
+        <p:spPr>
+          <a:xfrm>
+            <a:off x="6519672" y="2258568"/>
+            <a:ext cx="1828800" cy="292608"/>
+          </a:xfrm>
+          <a:prstGeom prst="rect">
+            <a:avLst>
+              <a:gd name="adj" fmla="val 25000"/>
+            </a:avLst>
+          </a:prstGeom>
+          <a:solidFill>
+            <a:srgbClr val="FCE7F3"/>
+          </a:solidFill>
+          <a:ln w="19050">
+            <a:solidFill>
+              <a:srgbClr val="DB2777"/>
+            </a:solidFill>
+            <a:prstDash val="solid"/>
+          </a:ln>
+          <a:effectLst>
+            <a:outerShdw sx="100000" sy="100000" kx="0" ky="0" algn="bl" rotWithShape="0" blurRad="101600" dist="38100" dir="8100000">
+              <a:srgbClr val="000000">
+                <a:alpha val="12000"/>
+              </a:srgbClr>
+            </a:outerShdw>
+          </a:effectLst>
+        </p:spPr>
+      </p:sp>
+      <p:sp>
+        <p:nvSpPr>
+          <p:cNvPr id="23" name="Text 21"/>
+          <p:cNvSpPr/>
+          <p:nvPr/>
+        </p:nvSpPr>
+        <p:spPr>
+          <a:xfrm>
+            <a:off x="6519672" y="2258568"/>
+            <a:ext cx="1828800" cy="292608"/>
+          </a:xfrm>
+          <a:prstGeom prst="rect">
+            <a:avLst/>
+          </a:prstGeom>
+          <a:noFill/>
+          <a:ln/>
+        </p:spPr>
+        <p:txBody>
+          <a:bodyPr wrap="square" lIns="0" tIns="0" rIns="0" bIns="0" rtlCol="0" anchor="ctr"/>
+          <a:lstStyle/>
+          <a:p>
+            <a:pPr algn="ctr" indent="0" marL="0">
+              <a:buNone/>
+            </a:pPr>
+            <a:r>
+              <a:rPr lang="en-US" sz="1300" b="1" dirty="0">
+                <a:solidFill>
+                  <a:srgbClr val="9D174D"/>
+                </a:solidFill>
+                <a:latin typeface="Trebuchet MS" pitchFamily="34" charset="0"/>
+                <a:ea typeface="Trebuchet MS" pitchFamily="34" charset="-122"/>
+                <a:cs typeface="Trebuchet MS" pitchFamily="34" charset="-120"/>
+              </a:rPr>
+              <a:t>s</a:t>
+            </a:r>
+            <a:endParaRPr lang="en-US" sz="1300" dirty="0"/>
+          </a:p>
+        </p:txBody>
+      </p:sp>
+      <p:sp>
+        <p:nvSpPr>
+          <p:cNvPr id="24" name="Text 22"/>
+          <p:cNvSpPr/>
+          <p:nvPr/>
+        </p:nvSpPr>
+        <p:spPr>
+          <a:xfrm>
+            <a:off x="6519672" y="2569464"/>
+            <a:ext cx="1828800" cy="201168"/>
+          </a:xfrm>
+          <a:prstGeom prst="rect">
+            <a:avLst/>
+          </a:prstGeom>
+          <a:noFill/>
+          <a:ln/>
+        </p:spPr>
+        <p:txBody>
+          <a:bodyPr wrap="square" lIns="0" tIns="0" rIns="0" bIns="0" rtlCol="0" anchor="t"/>
+          <a:lstStyle/>
+          <a:p>
+            <a:pPr algn="ctr" indent="0" marL="0">
+              <a:buNone/>
+            </a:pPr>
+            <a:r>
+              <a:rPr lang="en-US" sz="850" dirty="0">
+                <a:solidFill>
+                  <a:srgbClr val="475569"/>
+                </a:solidFill>
+                <a:latin typeface="Calibri" pitchFamily="34" charset="0"/>
+                <a:ea typeface="Calibri" pitchFamily="34" charset="-122"/>
+                <a:cs typeface="Calibri" pitchFamily="34" charset="-120"/>
+              </a:rPr>
+              <a:t>plural or present tense</a:t>
+            </a:r>
+            <a:endParaRPr lang="en-US" sz="850" dirty="0"/>
+          </a:p>
+        </p:txBody>
+      </p:sp>
+      <p:sp>
+        <p:nvSpPr>
+          <p:cNvPr id="25" name="Shape 23"/>
           <p:cNvSpPr/>
           <p:nvPr/>
         </p:nvSpPr>
@@ -20570,7 +20631,7 @@
       </p:sp>
       <p:sp>
         <p:nvSpPr>
-          <p:cNvPr id="23" name="Text 21"/>
+          <p:cNvPr id="26" name="Text 24"/>
           <p:cNvSpPr/>
           <p:nvPr/>
         </p:nvSpPr>
@@ -20609,7 +20670,7 @@
       </p:sp>
       <p:sp>
         <p:nvSpPr>
-          <p:cNvPr id="24" name="Shape 22"/>
+          <p:cNvPr id="27" name="Shape 25"/>
           <p:cNvSpPr/>
           <p:nvPr/>
         </p:nvSpPr>
@@ -20636,7 +20697,7 @@
       </p:sp>
       <p:sp>
         <p:nvSpPr>
-          <p:cNvPr id="25" name="Text 23"/>
+          <p:cNvPr id="28" name="Text 26"/>
           <p:cNvSpPr/>
           <p:nvPr/>
         </p:nvSpPr>
@@ -20675,7 +20736,7 @@
       </p:sp>
       <p:sp>
         <p:nvSpPr>
-          <p:cNvPr id="26" name="Shape 24"/>
+          <p:cNvPr id="29" name="Shape 27"/>
           <p:cNvSpPr/>
           <p:nvPr/>
         </p:nvSpPr>
@@ -20702,7 +20763,7 @@
       </p:sp>
       <p:sp>
         <p:nvSpPr>
-          <p:cNvPr id="27" name="Text 25"/>
+          <p:cNvPr id="30" name="Text 28"/>
           <p:cNvSpPr/>
           <p:nvPr/>
         </p:nvSpPr>
@@ -20741,7 +20802,7 @@
       </p:sp>
       <p:sp>
         <p:nvSpPr>
-          <p:cNvPr id="28" name="Shape 26"/>
+          <p:cNvPr id="31" name="Shape 29"/>
           <p:cNvSpPr/>
           <p:nvPr/>
         </p:nvSpPr>
@@ -20768,7 +20829,7 @@
       </p:sp>
       <p:sp>
         <p:nvSpPr>
-          <p:cNvPr id="29" name="Text 27"/>
+          <p:cNvPr id="32" name="Text 30"/>
           <p:cNvSpPr/>
           <p:nvPr/>
         </p:nvSpPr>
@@ -21091,7 +21152,7 @@
                 <a:ea typeface="Calibri" pitchFamily="34" charset="-122"/>
                 <a:cs typeface="Calibri" pitchFamily="34" charset="-120"/>
               </a:rPr>
-              <a:t>Word Labs  •  wordlabs.app  •  Root: 'meter' = measure or measuring instrument</a:t>
+              <a:t>Word Labs  •  wordlabs.app  •  Root: 'meter' = measure</a:t>
             </a:r>
             <a:endParaRPr lang="en-US" sz="800" dirty="0"/>
           </a:p>
@@ -21230,7 +21291,7 @@
                 <a:ea typeface="Trebuchet MS" pitchFamily="34" charset="-122"/>
                 <a:cs typeface="Trebuchet MS" pitchFamily="34" charset="-120"/>
               </a:rPr>
-              <a:t>barometer</a:t>
+              <a:t>thermometers</a:t>
             </a:r>
             <a:endParaRPr lang="en-US" sz="2800" dirty="0"/>
           </a:p>
@@ -21310,7 +21371,7 @@
         </p:nvSpPr>
         <p:spPr>
           <a:xfrm>
-            <a:off x="2938272" y="2258568"/>
+            <a:off x="2221992" y="2258568"/>
             <a:ext cx="1828800" cy="292608"/>
           </a:xfrm>
           <a:prstGeom prst="rect">
@@ -21344,7 +21405,7 @@
         </p:nvSpPr>
         <p:spPr>
           <a:xfrm>
-            <a:off x="2938272" y="2258568"/>
+            <a:off x="2221992" y="2258568"/>
             <a:ext cx="1828800" cy="292608"/>
           </a:xfrm>
           <a:prstGeom prst="rect">
@@ -21369,7 +21430,7 @@
                 <a:ea typeface="Trebuchet MS" pitchFamily="34" charset="-122"/>
                 <a:cs typeface="Trebuchet MS" pitchFamily="34" charset="-120"/>
               </a:rPr>
-              <a:t>baro</a:t>
+              <a:t>thermo</a:t>
             </a:r>
             <a:endParaRPr lang="en-US" sz="1300" dirty="0"/>
           </a:p>
@@ -21383,7 +21444,7 @@
         </p:nvSpPr>
         <p:spPr>
           <a:xfrm>
-            <a:off x="2938272" y="2569464"/>
+            <a:off x="2221992" y="2569464"/>
             <a:ext cx="1828800" cy="201168"/>
           </a:xfrm>
           <a:prstGeom prst="rect">
@@ -21408,7 +21469,7 @@
                 <a:ea typeface="Calibri" pitchFamily="34" charset="-122"/>
                 <a:cs typeface="Calibri" pitchFamily="34" charset="-120"/>
               </a:rPr>
-              <a:t>weight or pressure</a:t>
+              <a:t>heat</a:t>
             </a:r>
             <a:endParaRPr lang="en-US" sz="850" dirty="0"/>
           </a:p>
@@ -21422,7 +21483,7 @@
         </p:nvSpPr>
         <p:spPr>
           <a:xfrm>
-            <a:off x="5803392" y="2258568"/>
+            <a:off x="4370832" y="2258568"/>
             <a:ext cx="1828800" cy="292608"/>
           </a:xfrm>
           <a:prstGeom prst="rect">
@@ -21456,7 +21517,7 @@
         </p:nvSpPr>
         <p:spPr>
           <a:xfrm>
-            <a:off x="5803392" y="2258568"/>
+            <a:off x="4370832" y="2258568"/>
             <a:ext cx="1828800" cy="292608"/>
           </a:xfrm>
           <a:prstGeom prst="rect">
@@ -21495,7 +21556,7 @@
         </p:nvSpPr>
         <p:spPr>
           <a:xfrm>
-            <a:off x="5803392" y="2569464"/>
+            <a:off x="4370832" y="2569464"/>
             <a:ext cx="1828800" cy="201168"/>
           </a:xfrm>
           <a:prstGeom prst="rect">
@@ -21520,7 +21581,7 @@
                 <a:ea typeface="Calibri" pitchFamily="34" charset="-122"/>
                 <a:cs typeface="Calibri" pitchFamily="34" charset="-120"/>
               </a:rPr>
-              <a:t>measuring instrument</a:t>
+              <a:t>measure</a:t>
             </a:r>
             <a:endParaRPr lang="en-US" sz="850" dirty="0"/>
           </a:p>
@@ -21529,6 +21590,118 @@
       <p:sp>
         <p:nvSpPr>
           <p:cNvPr id="22" name="Shape 20"/>
+          <p:cNvSpPr/>
+          <p:nvPr/>
+        </p:nvSpPr>
+        <p:spPr>
+          <a:xfrm>
+            <a:off x="6519672" y="2258568"/>
+            <a:ext cx="1828800" cy="292608"/>
+          </a:xfrm>
+          <a:prstGeom prst="rect">
+            <a:avLst>
+              <a:gd name="adj" fmla="val 25000"/>
+            </a:avLst>
+          </a:prstGeom>
+          <a:solidFill>
+            <a:srgbClr val="FCE7F3"/>
+          </a:solidFill>
+          <a:ln w="19050">
+            <a:solidFill>
+              <a:srgbClr val="DB2777"/>
+            </a:solidFill>
+            <a:prstDash val="solid"/>
+          </a:ln>
+          <a:effectLst>
+            <a:outerShdw sx="100000" sy="100000" kx="0" ky="0" algn="bl" rotWithShape="0" blurRad="101600" dist="38100" dir="8100000">
+              <a:srgbClr val="000000">
+                <a:alpha val="12000"/>
+              </a:srgbClr>
+            </a:outerShdw>
+          </a:effectLst>
+        </p:spPr>
+      </p:sp>
+      <p:sp>
+        <p:nvSpPr>
+          <p:cNvPr id="23" name="Text 21"/>
+          <p:cNvSpPr/>
+          <p:nvPr/>
+        </p:nvSpPr>
+        <p:spPr>
+          <a:xfrm>
+            <a:off x="6519672" y="2258568"/>
+            <a:ext cx="1828800" cy="292608"/>
+          </a:xfrm>
+          <a:prstGeom prst="rect">
+            <a:avLst/>
+          </a:prstGeom>
+          <a:noFill/>
+          <a:ln/>
+        </p:spPr>
+        <p:txBody>
+          <a:bodyPr wrap="square" lIns="0" tIns="0" rIns="0" bIns="0" rtlCol="0" anchor="ctr"/>
+          <a:lstStyle/>
+          <a:p>
+            <a:pPr algn="ctr" indent="0" marL="0">
+              <a:buNone/>
+            </a:pPr>
+            <a:r>
+              <a:rPr lang="en-US" sz="1300" b="1" dirty="0">
+                <a:solidFill>
+                  <a:srgbClr val="9D174D"/>
+                </a:solidFill>
+                <a:latin typeface="Trebuchet MS" pitchFamily="34" charset="0"/>
+                <a:ea typeface="Trebuchet MS" pitchFamily="34" charset="-122"/>
+                <a:cs typeface="Trebuchet MS" pitchFamily="34" charset="-120"/>
+              </a:rPr>
+              <a:t>s</a:t>
+            </a:r>
+            <a:endParaRPr lang="en-US" sz="1300" dirty="0"/>
+          </a:p>
+        </p:txBody>
+      </p:sp>
+      <p:sp>
+        <p:nvSpPr>
+          <p:cNvPr id="24" name="Text 22"/>
+          <p:cNvSpPr/>
+          <p:nvPr/>
+        </p:nvSpPr>
+        <p:spPr>
+          <a:xfrm>
+            <a:off x="6519672" y="2569464"/>
+            <a:ext cx="1828800" cy="201168"/>
+          </a:xfrm>
+          <a:prstGeom prst="rect">
+            <a:avLst/>
+          </a:prstGeom>
+          <a:noFill/>
+          <a:ln/>
+        </p:spPr>
+        <p:txBody>
+          <a:bodyPr wrap="square" lIns="0" tIns="0" rIns="0" bIns="0" rtlCol="0" anchor="t"/>
+          <a:lstStyle/>
+          <a:p>
+            <a:pPr algn="ctr" indent="0" marL="0">
+              <a:buNone/>
+            </a:pPr>
+            <a:r>
+              <a:rPr lang="en-US" sz="850" dirty="0">
+                <a:solidFill>
+                  <a:srgbClr val="475569"/>
+                </a:solidFill>
+                <a:latin typeface="Calibri" pitchFamily="34" charset="0"/>
+                <a:ea typeface="Calibri" pitchFamily="34" charset="-122"/>
+                <a:cs typeface="Calibri" pitchFamily="34" charset="-120"/>
+              </a:rPr>
+              <a:t>plural or present tense</a:t>
+            </a:r>
+            <a:endParaRPr lang="en-US" sz="850" dirty="0"/>
+          </a:p>
+        </p:txBody>
+      </p:sp>
+      <p:sp>
+        <p:nvSpPr>
+          <p:cNvPr id="25" name="Shape 23"/>
           <p:cNvSpPr/>
           <p:nvPr/>
         </p:nvSpPr>
@@ -21555,7 +21728,7 @@
       </p:sp>
       <p:sp>
         <p:nvSpPr>
-          <p:cNvPr id="23" name="Text 21"/>
+          <p:cNvPr id="26" name="Text 24"/>
           <p:cNvSpPr/>
           <p:nvPr/>
         </p:nvSpPr>
@@ -21594,7 +21767,7 @@
       </p:sp>
       <p:sp>
         <p:nvSpPr>
-          <p:cNvPr id="24" name="Shape 22"/>
+          <p:cNvPr id="27" name="Shape 25"/>
           <p:cNvSpPr/>
           <p:nvPr/>
         </p:nvSpPr>
@@ -21621,7 +21794,7 @@
       </p:sp>
       <p:sp>
         <p:nvSpPr>
-          <p:cNvPr id="25" name="Shape 23"/>
+          <p:cNvPr id="28" name="Shape 26"/>
           <p:cNvSpPr/>
           <p:nvPr/>
         </p:nvSpPr>
@@ -21648,7 +21821,7 @@
       </p:sp>
       <p:sp>
         <p:nvSpPr>
-          <p:cNvPr id="26" name="Text 24"/>
+          <p:cNvPr id="29" name="Text 27"/>
           <p:cNvSpPr/>
           <p:nvPr/>
         </p:nvSpPr>
@@ -21679,7 +21852,7 @@
                 <a:ea typeface="Trebuchet MS" pitchFamily="34" charset="-122"/>
                 <a:cs typeface="Trebuchet MS" pitchFamily="34" charset="-120"/>
               </a:rPr>
-              <a:t>ba</a:t>
+              <a:t>ther</a:t>
             </a:r>
             <a:endParaRPr lang="en-US" sz="1400" dirty="0"/>
           </a:p>
@@ -21687,7 +21860,7 @@
       </p:sp>
       <p:sp>
         <p:nvSpPr>
-          <p:cNvPr id="27" name="Text 25"/>
+          <p:cNvPr id="30" name="Text 28"/>
           <p:cNvSpPr/>
           <p:nvPr/>
         </p:nvSpPr>
@@ -21726,7 +21899,7 @@
       </p:sp>
       <p:sp>
         <p:nvSpPr>
-          <p:cNvPr id="28" name="Shape 26"/>
+          <p:cNvPr id="31" name="Shape 29"/>
           <p:cNvSpPr/>
           <p:nvPr/>
         </p:nvSpPr>
@@ -21753,7 +21926,7 @@
       </p:sp>
       <p:sp>
         <p:nvSpPr>
-          <p:cNvPr id="29" name="Text 27"/>
+          <p:cNvPr id="32" name="Text 30"/>
           <p:cNvSpPr/>
           <p:nvPr/>
         </p:nvSpPr>
@@ -21784,7 +21957,7 @@
                 <a:ea typeface="Trebuchet MS" pitchFamily="34" charset="-122"/>
                 <a:cs typeface="Trebuchet MS" pitchFamily="34" charset="-120"/>
               </a:rPr>
-              <a:t>rom</a:t>
+              <a:t>mom</a:t>
             </a:r>
             <a:endParaRPr lang="en-US" sz="1400" dirty="0"/>
           </a:p>
@@ -21792,7 +21965,7 @@
       </p:sp>
       <p:sp>
         <p:nvSpPr>
-          <p:cNvPr id="30" name="Text 28"/>
+          <p:cNvPr id="33" name="Text 31"/>
           <p:cNvSpPr/>
           <p:nvPr/>
         </p:nvSpPr>
@@ -21831,7 +22004,7 @@
       </p:sp>
       <p:sp>
         <p:nvSpPr>
-          <p:cNvPr id="31" name="Shape 29"/>
+          <p:cNvPr id="34" name="Shape 32"/>
           <p:cNvSpPr/>
           <p:nvPr/>
         </p:nvSpPr>
@@ -21858,7 +22031,7 @@
       </p:sp>
       <p:sp>
         <p:nvSpPr>
-          <p:cNvPr id="32" name="Text 30"/>
+          <p:cNvPr id="35" name="Text 33"/>
           <p:cNvSpPr/>
           <p:nvPr/>
         </p:nvSpPr>
@@ -21897,7 +22070,7 @@
       </p:sp>
       <p:sp>
         <p:nvSpPr>
-          <p:cNvPr id="33" name="Text 31"/>
+          <p:cNvPr id="36" name="Text 34"/>
           <p:cNvSpPr/>
           <p:nvPr/>
         </p:nvSpPr>
@@ -21936,7 +22109,7 @@
       </p:sp>
       <p:sp>
         <p:nvSpPr>
-          <p:cNvPr id="34" name="Shape 32"/>
+          <p:cNvPr id="37" name="Shape 35"/>
           <p:cNvSpPr/>
           <p:nvPr/>
         </p:nvSpPr>
@@ -21963,7 +22136,7 @@
       </p:sp>
       <p:sp>
         <p:nvSpPr>
-          <p:cNvPr id="35" name="Text 33"/>
+          <p:cNvPr id="38" name="Text 36"/>
           <p:cNvSpPr/>
           <p:nvPr/>
         </p:nvSpPr>
@@ -21994,7 +22167,7 @@
                 <a:ea typeface="Trebuchet MS" pitchFamily="34" charset="-122"/>
                 <a:cs typeface="Trebuchet MS" pitchFamily="34" charset="-120"/>
               </a:rPr>
-              <a:t>ter</a:t>
+              <a:t>ters</a:t>
             </a:r>
             <a:endParaRPr lang="en-US" sz="1400" dirty="0"/>
           </a:p>
@@ -22002,7 +22175,7 @@
       </p:sp>
       <p:sp>
         <p:nvSpPr>
-          <p:cNvPr id="36" name="Shape 34"/>
+          <p:cNvPr id="39" name="Shape 37"/>
           <p:cNvSpPr/>
           <p:nvPr/>
         </p:nvSpPr>
@@ -22029,7 +22202,7 @@
       </p:sp>
       <p:sp>
         <p:nvSpPr>
-          <p:cNvPr id="37" name="Text 35"/>
+          <p:cNvPr id="40" name="Text 38"/>
           <p:cNvSpPr/>
           <p:nvPr/>
         </p:nvSpPr>
@@ -22068,7 +22241,7 @@
       </p:sp>
       <p:sp>
         <p:nvSpPr>
-          <p:cNvPr id="38" name="Shape 36"/>
+          <p:cNvPr id="41" name="Shape 39"/>
           <p:cNvSpPr/>
           <p:nvPr/>
         </p:nvSpPr>
@@ -22095,7 +22268,7 @@
       </p:sp>
       <p:sp>
         <p:nvSpPr>
-          <p:cNvPr id="39" name="Text 37"/>
+          <p:cNvPr id="42" name="Text 40"/>
           <p:cNvSpPr/>
           <p:nvPr/>
         </p:nvSpPr>
@@ -22418,7 +22591,7 @@
                 <a:ea typeface="Calibri" pitchFamily="34" charset="-122"/>
                 <a:cs typeface="Calibri" pitchFamily="34" charset="-120"/>
               </a:rPr>
-              <a:t>Word Labs  •  wordlabs.app  •  Root: 'meter' = measure or measuring instrument</a:t>
+              <a:t>Word Labs  •  wordlabs.app  •  Root: 'meter' = measure</a:t>
             </a:r>
             <a:endParaRPr lang="en-US" sz="800" dirty="0"/>
           </a:p>
@@ -22557,7 +22730,7 @@
                 <a:ea typeface="Trebuchet MS" pitchFamily="34" charset="-122"/>
                 <a:cs typeface="Trebuchet MS" pitchFamily="34" charset="-120"/>
               </a:rPr>
-              <a:t>barometer</a:t>
+              <a:t>thermometers</a:t>
             </a:r>
             <a:endParaRPr lang="en-US" sz="2800" dirty="0"/>
           </a:p>
@@ -22637,7 +22810,7 @@
         </p:nvSpPr>
         <p:spPr>
           <a:xfrm>
-            <a:off x="2938272" y="2258568"/>
+            <a:off x="2221992" y="2258568"/>
             <a:ext cx="1828800" cy="292608"/>
           </a:xfrm>
           <a:prstGeom prst="rect">
@@ -22671,7 +22844,7 @@
         </p:nvSpPr>
         <p:spPr>
           <a:xfrm>
-            <a:off x="2938272" y="2258568"/>
+            <a:off x="2221992" y="2258568"/>
             <a:ext cx="1828800" cy="292608"/>
           </a:xfrm>
           <a:prstGeom prst="rect">
@@ -22696,7 +22869,7 @@
                 <a:ea typeface="Trebuchet MS" pitchFamily="34" charset="-122"/>
                 <a:cs typeface="Trebuchet MS" pitchFamily="34" charset="-120"/>
               </a:rPr>
-              <a:t>baro</a:t>
+              <a:t>thermo</a:t>
             </a:r>
             <a:endParaRPr lang="en-US" sz="1300" dirty="0"/>
           </a:p>
@@ -22710,7 +22883,7 @@
         </p:nvSpPr>
         <p:spPr>
           <a:xfrm>
-            <a:off x="2938272" y="2569464"/>
+            <a:off x="2221992" y="2569464"/>
             <a:ext cx="1828800" cy="201168"/>
           </a:xfrm>
           <a:prstGeom prst="rect">
@@ -22735,7 +22908,7 @@
                 <a:ea typeface="Calibri" pitchFamily="34" charset="-122"/>
                 <a:cs typeface="Calibri" pitchFamily="34" charset="-120"/>
               </a:rPr>
-              <a:t>weight or pressure</a:t>
+              <a:t>heat</a:t>
             </a:r>
             <a:endParaRPr lang="en-US" sz="850" dirty="0"/>
           </a:p>
@@ -22749,7 +22922,7 @@
         </p:nvSpPr>
         <p:spPr>
           <a:xfrm>
-            <a:off x="5803392" y="2258568"/>
+            <a:off x="4370832" y="2258568"/>
             <a:ext cx="1828800" cy="292608"/>
           </a:xfrm>
           <a:prstGeom prst="rect">
@@ -22783,7 +22956,7 @@
         </p:nvSpPr>
         <p:spPr>
           <a:xfrm>
-            <a:off x="5803392" y="2258568"/>
+            <a:off x="4370832" y="2258568"/>
             <a:ext cx="1828800" cy="292608"/>
           </a:xfrm>
           <a:prstGeom prst="rect">
@@ -22822,7 +22995,7 @@
         </p:nvSpPr>
         <p:spPr>
           <a:xfrm>
-            <a:off x="5803392" y="2569464"/>
+            <a:off x="4370832" y="2569464"/>
             <a:ext cx="1828800" cy="201168"/>
           </a:xfrm>
           <a:prstGeom prst="rect">
@@ -22847,7 +23020,7 @@
                 <a:ea typeface="Calibri" pitchFamily="34" charset="-122"/>
                 <a:cs typeface="Calibri" pitchFamily="34" charset="-120"/>
               </a:rPr>
-              <a:t>measuring instrument</a:t>
+              <a:t>measure</a:t>
             </a:r>
             <a:endParaRPr lang="en-US" sz="850" dirty="0"/>
           </a:p>
@@ -22856,6 +23029,118 @@
       <p:sp>
         <p:nvSpPr>
           <p:cNvPr id="22" name="Shape 20"/>
+          <p:cNvSpPr/>
+          <p:nvPr/>
+        </p:nvSpPr>
+        <p:spPr>
+          <a:xfrm>
+            <a:off x="6519672" y="2258568"/>
+            <a:ext cx="1828800" cy="292608"/>
+          </a:xfrm>
+          <a:prstGeom prst="rect">
+            <a:avLst>
+              <a:gd name="adj" fmla="val 25000"/>
+            </a:avLst>
+          </a:prstGeom>
+          <a:solidFill>
+            <a:srgbClr val="FCE7F3"/>
+          </a:solidFill>
+          <a:ln w="19050">
+            <a:solidFill>
+              <a:srgbClr val="DB2777"/>
+            </a:solidFill>
+            <a:prstDash val="solid"/>
+          </a:ln>
+          <a:effectLst>
+            <a:outerShdw sx="100000" sy="100000" kx="0" ky="0" algn="bl" rotWithShape="0" blurRad="101600" dist="38100" dir="8100000">
+              <a:srgbClr val="000000">
+                <a:alpha val="12000"/>
+              </a:srgbClr>
+            </a:outerShdw>
+          </a:effectLst>
+        </p:spPr>
+      </p:sp>
+      <p:sp>
+        <p:nvSpPr>
+          <p:cNvPr id="23" name="Text 21"/>
+          <p:cNvSpPr/>
+          <p:nvPr/>
+        </p:nvSpPr>
+        <p:spPr>
+          <a:xfrm>
+            <a:off x="6519672" y="2258568"/>
+            <a:ext cx="1828800" cy="292608"/>
+          </a:xfrm>
+          <a:prstGeom prst="rect">
+            <a:avLst/>
+          </a:prstGeom>
+          <a:noFill/>
+          <a:ln/>
+        </p:spPr>
+        <p:txBody>
+          <a:bodyPr wrap="square" lIns="0" tIns="0" rIns="0" bIns="0" rtlCol="0" anchor="ctr"/>
+          <a:lstStyle/>
+          <a:p>
+            <a:pPr algn="ctr" indent="0" marL="0">
+              <a:buNone/>
+            </a:pPr>
+            <a:r>
+              <a:rPr lang="en-US" sz="1300" b="1" dirty="0">
+                <a:solidFill>
+                  <a:srgbClr val="9D174D"/>
+                </a:solidFill>
+                <a:latin typeface="Trebuchet MS" pitchFamily="34" charset="0"/>
+                <a:ea typeface="Trebuchet MS" pitchFamily="34" charset="-122"/>
+                <a:cs typeface="Trebuchet MS" pitchFamily="34" charset="-120"/>
+              </a:rPr>
+              <a:t>s</a:t>
+            </a:r>
+            <a:endParaRPr lang="en-US" sz="1300" dirty="0"/>
+          </a:p>
+        </p:txBody>
+      </p:sp>
+      <p:sp>
+        <p:nvSpPr>
+          <p:cNvPr id="24" name="Text 22"/>
+          <p:cNvSpPr/>
+          <p:nvPr/>
+        </p:nvSpPr>
+        <p:spPr>
+          <a:xfrm>
+            <a:off x="6519672" y="2569464"/>
+            <a:ext cx="1828800" cy="201168"/>
+          </a:xfrm>
+          <a:prstGeom prst="rect">
+            <a:avLst/>
+          </a:prstGeom>
+          <a:noFill/>
+          <a:ln/>
+        </p:spPr>
+        <p:txBody>
+          <a:bodyPr wrap="square" lIns="0" tIns="0" rIns="0" bIns="0" rtlCol="0" anchor="t"/>
+          <a:lstStyle/>
+          <a:p>
+            <a:pPr algn="ctr" indent="0" marL="0">
+              <a:buNone/>
+            </a:pPr>
+            <a:r>
+              <a:rPr lang="en-US" sz="850" dirty="0">
+                <a:solidFill>
+                  <a:srgbClr val="475569"/>
+                </a:solidFill>
+                <a:latin typeface="Calibri" pitchFamily="34" charset="0"/>
+                <a:ea typeface="Calibri" pitchFamily="34" charset="-122"/>
+                <a:cs typeface="Calibri" pitchFamily="34" charset="-120"/>
+              </a:rPr>
+              <a:t>plural or present tense</a:t>
+            </a:r>
+            <a:endParaRPr lang="en-US" sz="850" dirty="0"/>
+          </a:p>
+        </p:txBody>
+      </p:sp>
+      <p:sp>
+        <p:nvSpPr>
+          <p:cNvPr id="25" name="Shape 23"/>
           <p:cNvSpPr/>
           <p:nvPr/>
         </p:nvSpPr>
@@ -22882,7 +23167,7 @@
       </p:sp>
       <p:sp>
         <p:nvSpPr>
-          <p:cNvPr id="23" name="Text 21"/>
+          <p:cNvPr id="26" name="Text 24"/>
           <p:cNvSpPr/>
           <p:nvPr/>
         </p:nvSpPr>
@@ -22921,7 +23206,7 @@
       </p:sp>
       <p:sp>
         <p:nvSpPr>
-          <p:cNvPr id="24" name="Shape 22"/>
+          <p:cNvPr id="27" name="Shape 25"/>
           <p:cNvSpPr/>
           <p:nvPr/>
         </p:nvSpPr>
@@ -22948,7 +23233,7 @@
       </p:sp>
       <p:sp>
         <p:nvSpPr>
-          <p:cNvPr id="25" name="Shape 23"/>
+          <p:cNvPr id="28" name="Shape 26"/>
           <p:cNvSpPr/>
           <p:nvPr/>
         </p:nvSpPr>
@@ -22975,7 +23260,7 @@
       </p:sp>
       <p:sp>
         <p:nvSpPr>
-          <p:cNvPr id="26" name="Text 24"/>
+          <p:cNvPr id="29" name="Text 27"/>
           <p:cNvSpPr/>
           <p:nvPr/>
         </p:nvSpPr>
@@ -23006,7 +23291,7 @@
                 <a:ea typeface="Trebuchet MS" pitchFamily="34" charset="-122"/>
                 <a:cs typeface="Trebuchet MS" pitchFamily="34" charset="-120"/>
               </a:rPr>
-              <a:t>ba</a:t>
+              <a:t>ther</a:t>
             </a:r>
             <a:endParaRPr lang="en-US" sz="1400" dirty="0"/>
           </a:p>
@@ -23014,7 +23299,7 @@
       </p:sp>
       <p:sp>
         <p:nvSpPr>
-          <p:cNvPr id="27" name="Text 25"/>
+          <p:cNvPr id="30" name="Text 28"/>
           <p:cNvSpPr/>
           <p:nvPr/>
         </p:nvSpPr>
@@ -23053,7 +23338,7 @@
       </p:sp>
       <p:sp>
         <p:nvSpPr>
-          <p:cNvPr id="28" name="Shape 26"/>
+          <p:cNvPr id="31" name="Shape 29"/>
           <p:cNvSpPr/>
           <p:nvPr/>
         </p:nvSpPr>
@@ -23080,7 +23365,7 @@
       </p:sp>
       <p:sp>
         <p:nvSpPr>
-          <p:cNvPr id="29" name="Text 27"/>
+          <p:cNvPr id="32" name="Text 30"/>
           <p:cNvSpPr/>
           <p:nvPr/>
         </p:nvSpPr>
@@ -23111,7 +23396,7 @@
                 <a:ea typeface="Trebuchet MS" pitchFamily="34" charset="-122"/>
                 <a:cs typeface="Trebuchet MS" pitchFamily="34" charset="-120"/>
               </a:rPr>
-              <a:t>rom</a:t>
+              <a:t>mom</a:t>
             </a:r>
             <a:endParaRPr lang="en-US" sz="1400" dirty="0"/>
           </a:p>
@@ -23119,7 +23404,7 @@
       </p:sp>
       <p:sp>
         <p:nvSpPr>
-          <p:cNvPr id="30" name="Text 28"/>
+          <p:cNvPr id="33" name="Text 31"/>
           <p:cNvSpPr/>
           <p:nvPr/>
         </p:nvSpPr>
@@ -23158,7 +23443,7 @@
       </p:sp>
       <p:sp>
         <p:nvSpPr>
-          <p:cNvPr id="31" name="Shape 29"/>
+          <p:cNvPr id="34" name="Shape 32"/>
           <p:cNvSpPr/>
           <p:nvPr/>
         </p:nvSpPr>
@@ -23185,7 +23470,7 @@
       </p:sp>
       <p:sp>
         <p:nvSpPr>
-          <p:cNvPr id="32" name="Text 30"/>
+          <p:cNvPr id="35" name="Text 33"/>
           <p:cNvSpPr/>
           <p:nvPr/>
         </p:nvSpPr>
@@ -23224,7 +23509,7 @@
       </p:sp>
       <p:sp>
         <p:nvSpPr>
-          <p:cNvPr id="33" name="Text 31"/>
+          <p:cNvPr id="36" name="Text 34"/>
           <p:cNvSpPr/>
           <p:nvPr/>
         </p:nvSpPr>
@@ -23263,7 +23548,7 @@
       </p:sp>
       <p:sp>
         <p:nvSpPr>
-          <p:cNvPr id="34" name="Shape 32"/>
+          <p:cNvPr id="37" name="Shape 35"/>
           <p:cNvSpPr/>
           <p:nvPr/>
         </p:nvSpPr>
@@ -23290,7 +23575,7 @@
       </p:sp>
       <p:sp>
         <p:nvSpPr>
-          <p:cNvPr id="35" name="Text 33"/>
+          <p:cNvPr id="38" name="Text 36"/>
           <p:cNvSpPr/>
           <p:nvPr/>
         </p:nvSpPr>
@@ -23321,7 +23606,7 @@
                 <a:ea typeface="Trebuchet MS" pitchFamily="34" charset="-122"/>
                 <a:cs typeface="Trebuchet MS" pitchFamily="34" charset="-120"/>
               </a:rPr>
-              <a:t>ter</a:t>
+              <a:t>ters</a:t>
             </a:r>
             <a:endParaRPr lang="en-US" sz="1400" dirty="0"/>
           </a:p>
@@ -23329,7 +23614,7 @@
       </p:sp>
       <p:sp>
         <p:nvSpPr>
-          <p:cNvPr id="36" name="Shape 34"/>
+          <p:cNvPr id="39" name="Shape 37"/>
           <p:cNvSpPr/>
           <p:nvPr/>
         </p:nvSpPr>
@@ -23356,7 +23641,7 @@
       </p:sp>
       <p:sp>
         <p:nvSpPr>
-          <p:cNvPr id="37" name="Text 35"/>
+          <p:cNvPr id="40" name="Text 38"/>
           <p:cNvSpPr/>
           <p:nvPr/>
         </p:nvSpPr>
@@ -23395,7 +23680,7 @@
       </p:sp>
       <p:sp>
         <p:nvSpPr>
-          <p:cNvPr id="38" name="Shape 36"/>
+          <p:cNvPr id="41" name="Shape 39"/>
           <p:cNvSpPr/>
           <p:nvPr/>
         </p:nvSpPr>
@@ -23422,14 +23707,14 @@
       </p:sp>
       <p:sp>
         <p:nvSpPr>
-          <p:cNvPr id="39" name="Shape 37"/>
-          <p:cNvSpPr/>
-          <p:nvPr/>
-        </p:nvSpPr>
-        <p:spPr>
-          <a:xfrm>
-            <a:off x="2023872" y="4169664"/>
-            <a:ext cx="685800" cy="475488"/>
+          <p:cNvPr id="42" name="Shape 40"/>
+          <p:cNvSpPr/>
+          <p:nvPr/>
+        </p:nvSpPr>
+        <p:spPr>
+          <a:xfrm>
+            <a:off x="1951330" y="4169664"/>
+            <a:ext cx="676656" cy="475488"/>
           </a:xfrm>
           <a:prstGeom prst="rect">
             <a:avLst>
@@ -23449,14 +23734,14 @@
       </p:sp>
       <p:sp>
         <p:nvSpPr>
-          <p:cNvPr id="40" name="Text 38"/>
-          <p:cNvSpPr/>
-          <p:nvPr/>
-        </p:nvSpPr>
-        <p:spPr>
-          <a:xfrm>
-            <a:off x="2023872" y="4169664"/>
-            <a:ext cx="685800" cy="475488"/>
+          <p:cNvPr id="43" name="Text 41"/>
+          <p:cNvSpPr/>
+          <p:nvPr/>
+        </p:nvSpPr>
+        <p:spPr>
+          <a:xfrm>
+            <a:off x="1951330" y="4169664"/>
+            <a:ext cx="676656" cy="475488"/>
           </a:xfrm>
           <a:prstGeom prst="rect">
             <a:avLst/>
@@ -23480,7 +23765,7 @@
                 <a:ea typeface="Trebuchet MS" pitchFamily="34" charset="-122"/>
                 <a:cs typeface="Trebuchet MS" pitchFamily="34" charset="-120"/>
               </a:rPr>
-              <a:t>b</a:t>
+              <a:t>th</a:t>
             </a:r>
             <a:endParaRPr lang="en-US" sz="900" dirty="0"/>
           </a:p>
@@ -23488,14 +23773,14 @@
       </p:sp>
       <p:sp>
         <p:nvSpPr>
-          <p:cNvPr id="41" name="Shape 39"/>
-          <p:cNvSpPr/>
-          <p:nvPr/>
-        </p:nvSpPr>
-        <p:spPr>
-          <a:xfrm>
-            <a:off x="2831592" y="4169664"/>
-            <a:ext cx="685800" cy="475488"/>
+          <p:cNvPr id="44" name="Shape 42"/>
+          <p:cNvSpPr/>
+          <p:nvPr/>
+        </p:nvSpPr>
+        <p:spPr>
+          <a:xfrm>
+            <a:off x="2677363" y="4169664"/>
+            <a:ext cx="676656" cy="475488"/>
           </a:xfrm>
           <a:prstGeom prst="rect">
             <a:avLst>
@@ -23515,14 +23800,14 @@
       </p:sp>
       <p:sp>
         <p:nvSpPr>
-          <p:cNvPr id="42" name="Text 40"/>
-          <p:cNvSpPr/>
-          <p:nvPr/>
-        </p:nvSpPr>
-        <p:spPr>
-          <a:xfrm>
-            <a:off x="2831592" y="4169664"/>
-            <a:ext cx="685800" cy="475488"/>
+          <p:cNvPr id="45" name="Text 43"/>
+          <p:cNvSpPr/>
+          <p:nvPr/>
+        </p:nvSpPr>
+        <p:spPr>
+          <a:xfrm>
+            <a:off x="2677363" y="4169664"/>
+            <a:ext cx="676656" cy="475488"/>
           </a:xfrm>
           <a:prstGeom prst="rect">
             <a:avLst/>
@@ -23546,7 +23831,7 @@
                 <a:ea typeface="Trebuchet MS" pitchFamily="34" charset="-122"/>
                 <a:cs typeface="Trebuchet MS" pitchFamily="34" charset="-120"/>
               </a:rPr>
-              <a:t>a</a:t>
+              <a:t>er</a:t>
             </a:r>
             <a:endParaRPr lang="en-US" sz="900" dirty="0"/>
           </a:p>
@@ -23554,14 +23839,14 @@
       </p:sp>
       <p:sp>
         <p:nvSpPr>
-          <p:cNvPr id="43" name="Shape 41"/>
-          <p:cNvSpPr/>
-          <p:nvPr/>
-        </p:nvSpPr>
-        <p:spPr>
-          <a:xfrm>
-            <a:off x="3639312" y="4169664"/>
-            <a:ext cx="685800" cy="475488"/>
+          <p:cNvPr id="46" name="Shape 44"/>
+          <p:cNvSpPr/>
+          <p:nvPr/>
+        </p:nvSpPr>
+        <p:spPr>
+          <a:xfrm>
+            <a:off x="3403397" y="4169664"/>
+            <a:ext cx="676656" cy="475488"/>
           </a:xfrm>
           <a:prstGeom prst="rect">
             <a:avLst>
@@ -23581,14 +23866,14 @@
       </p:sp>
       <p:sp>
         <p:nvSpPr>
-          <p:cNvPr id="44" name="Text 42"/>
-          <p:cNvSpPr/>
-          <p:nvPr/>
-        </p:nvSpPr>
-        <p:spPr>
-          <a:xfrm>
-            <a:off x="3639312" y="4169664"/>
-            <a:ext cx="685800" cy="475488"/>
+          <p:cNvPr id="47" name="Text 45"/>
+          <p:cNvSpPr/>
+          <p:nvPr/>
+        </p:nvSpPr>
+        <p:spPr>
+          <a:xfrm>
+            <a:off x="3403397" y="4169664"/>
+            <a:ext cx="676656" cy="475488"/>
           </a:xfrm>
           <a:prstGeom prst="rect">
             <a:avLst/>
@@ -23612,7 +23897,7 @@
                 <a:ea typeface="Trebuchet MS" pitchFamily="34" charset="-122"/>
                 <a:cs typeface="Trebuchet MS" pitchFamily="34" charset="-120"/>
               </a:rPr>
-              <a:t>r</a:t>
+              <a:t>m</a:t>
             </a:r>
             <a:endParaRPr lang="en-US" sz="900" dirty="0"/>
           </a:p>
@@ -23620,14 +23905,14 @@
       </p:sp>
       <p:sp>
         <p:nvSpPr>
-          <p:cNvPr id="45" name="Shape 43"/>
-          <p:cNvSpPr/>
-          <p:nvPr/>
-        </p:nvSpPr>
-        <p:spPr>
-          <a:xfrm>
-            <a:off x="4447032" y="4169664"/>
-            <a:ext cx="685800" cy="475488"/>
+          <p:cNvPr id="48" name="Shape 46"/>
+          <p:cNvSpPr/>
+          <p:nvPr/>
+        </p:nvSpPr>
+        <p:spPr>
+          <a:xfrm>
+            <a:off x="4129430" y="4169664"/>
+            <a:ext cx="676656" cy="475488"/>
           </a:xfrm>
           <a:prstGeom prst="rect">
             <a:avLst>
@@ -23647,14 +23932,14 @@
       </p:sp>
       <p:sp>
         <p:nvSpPr>
-          <p:cNvPr id="46" name="Text 44"/>
-          <p:cNvSpPr/>
-          <p:nvPr/>
-        </p:nvSpPr>
-        <p:spPr>
-          <a:xfrm>
-            <a:off x="4447032" y="4169664"/>
-            <a:ext cx="685800" cy="475488"/>
+          <p:cNvPr id="49" name="Text 47"/>
+          <p:cNvSpPr/>
+          <p:nvPr/>
+        </p:nvSpPr>
+        <p:spPr>
+          <a:xfrm>
+            <a:off x="4129430" y="4169664"/>
+            <a:ext cx="676656" cy="475488"/>
           </a:xfrm>
           <a:prstGeom prst="rect">
             <a:avLst/>
@@ -23686,14 +23971,14 @@
       </p:sp>
       <p:sp>
         <p:nvSpPr>
-          <p:cNvPr id="47" name="Shape 45"/>
-          <p:cNvSpPr/>
-          <p:nvPr/>
-        </p:nvSpPr>
-        <p:spPr>
-          <a:xfrm>
-            <a:off x="5254752" y="4169664"/>
-            <a:ext cx="685800" cy="475488"/>
+          <p:cNvPr id="50" name="Shape 48"/>
+          <p:cNvSpPr/>
+          <p:nvPr/>
+        </p:nvSpPr>
+        <p:spPr>
+          <a:xfrm>
+            <a:off x="4855464" y="4169664"/>
+            <a:ext cx="676656" cy="475488"/>
           </a:xfrm>
           <a:prstGeom prst="rect">
             <a:avLst>
@@ -23713,14 +23998,14 @@
       </p:sp>
       <p:sp>
         <p:nvSpPr>
-          <p:cNvPr id="48" name="Text 46"/>
-          <p:cNvSpPr/>
-          <p:nvPr/>
-        </p:nvSpPr>
-        <p:spPr>
-          <a:xfrm>
-            <a:off x="5254752" y="4169664"/>
-            <a:ext cx="685800" cy="475488"/>
+          <p:cNvPr id="51" name="Text 49"/>
+          <p:cNvSpPr/>
+          <p:nvPr/>
+        </p:nvSpPr>
+        <p:spPr>
+          <a:xfrm>
+            <a:off x="4855464" y="4169664"/>
+            <a:ext cx="676656" cy="475488"/>
           </a:xfrm>
           <a:prstGeom prst="rect">
             <a:avLst/>
@@ -23752,14 +24037,14 @@
       </p:sp>
       <p:sp>
         <p:nvSpPr>
-          <p:cNvPr id="49" name="Shape 47"/>
-          <p:cNvSpPr/>
-          <p:nvPr/>
-        </p:nvSpPr>
-        <p:spPr>
-          <a:xfrm>
-            <a:off x="6062472" y="4169664"/>
-            <a:ext cx="685800" cy="475488"/>
+          <p:cNvPr id="52" name="Shape 50"/>
+          <p:cNvSpPr/>
+          <p:nvPr/>
+        </p:nvSpPr>
+        <p:spPr>
+          <a:xfrm>
+            <a:off x="5581498" y="4169664"/>
+            <a:ext cx="676656" cy="475488"/>
           </a:xfrm>
           <a:prstGeom prst="rect">
             <a:avLst>
@@ -23779,14 +24064,14 @@
       </p:sp>
       <p:sp>
         <p:nvSpPr>
-          <p:cNvPr id="50" name="Text 48"/>
-          <p:cNvSpPr/>
-          <p:nvPr/>
-        </p:nvSpPr>
-        <p:spPr>
-          <a:xfrm>
-            <a:off x="6062472" y="4169664"/>
-            <a:ext cx="685800" cy="475488"/>
+          <p:cNvPr id="53" name="Text 51"/>
+          <p:cNvSpPr/>
+          <p:nvPr/>
+        </p:nvSpPr>
+        <p:spPr>
+          <a:xfrm>
+            <a:off x="5581498" y="4169664"/>
+            <a:ext cx="676656" cy="475488"/>
           </a:xfrm>
           <a:prstGeom prst="rect">
             <a:avLst/>
@@ -23818,14 +24103,14 @@
       </p:sp>
       <p:sp>
         <p:nvSpPr>
-          <p:cNvPr id="51" name="Shape 49"/>
-          <p:cNvSpPr/>
-          <p:nvPr/>
-        </p:nvSpPr>
-        <p:spPr>
-          <a:xfrm>
-            <a:off x="6870192" y="4169664"/>
-            <a:ext cx="685800" cy="475488"/>
+          <p:cNvPr id="54" name="Shape 52"/>
+          <p:cNvSpPr/>
+          <p:nvPr/>
+        </p:nvSpPr>
+        <p:spPr>
+          <a:xfrm>
+            <a:off x="6307531" y="4169664"/>
+            <a:ext cx="676656" cy="475488"/>
           </a:xfrm>
           <a:prstGeom prst="rect">
             <a:avLst>
@@ -23845,14 +24130,14 @@
       </p:sp>
       <p:sp>
         <p:nvSpPr>
-          <p:cNvPr id="52" name="Text 50"/>
-          <p:cNvSpPr/>
-          <p:nvPr/>
-        </p:nvSpPr>
-        <p:spPr>
-          <a:xfrm>
-            <a:off x="6870192" y="4169664"/>
-            <a:ext cx="685800" cy="475488"/>
+          <p:cNvPr id="55" name="Text 53"/>
+          <p:cNvSpPr/>
+          <p:nvPr/>
+        </p:nvSpPr>
+        <p:spPr>
+          <a:xfrm>
+            <a:off x="6307531" y="4169664"/>
+            <a:ext cx="676656" cy="475488"/>
           </a:xfrm>
           <a:prstGeom prst="rect">
             <a:avLst/>
@@ -23884,14 +24169,14 @@
       </p:sp>
       <p:sp>
         <p:nvSpPr>
-          <p:cNvPr id="53" name="Shape 51"/>
-          <p:cNvSpPr/>
-          <p:nvPr/>
-        </p:nvSpPr>
-        <p:spPr>
-          <a:xfrm>
-            <a:off x="7677912" y="4169664"/>
-            <a:ext cx="685800" cy="475488"/>
+          <p:cNvPr id="56" name="Shape 54"/>
+          <p:cNvSpPr/>
+          <p:nvPr/>
+        </p:nvSpPr>
+        <p:spPr>
+          <a:xfrm>
+            <a:off x="7033565" y="4169664"/>
+            <a:ext cx="676656" cy="475488"/>
           </a:xfrm>
           <a:prstGeom prst="rect">
             <a:avLst>
@@ -23911,14 +24196,14 @@
       </p:sp>
       <p:sp>
         <p:nvSpPr>
-          <p:cNvPr id="54" name="Text 52"/>
-          <p:cNvSpPr/>
-          <p:nvPr/>
-        </p:nvSpPr>
-        <p:spPr>
-          <a:xfrm>
-            <a:off x="7677912" y="4169664"/>
-            <a:ext cx="685800" cy="475488"/>
+          <p:cNvPr id="57" name="Text 55"/>
+          <p:cNvSpPr/>
+          <p:nvPr/>
+        </p:nvSpPr>
+        <p:spPr>
+          <a:xfrm>
+            <a:off x="7033565" y="4169664"/>
+            <a:ext cx="676656" cy="475488"/>
           </a:xfrm>
           <a:prstGeom prst="rect">
             <a:avLst/>
@@ -23943,6 +24228,72 @@
                 <a:cs typeface="Trebuchet MS" pitchFamily="34" charset="-120"/>
               </a:rPr>
               <a:t>er</a:t>
+            </a:r>
+            <a:endParaRPr lang="en-US" sz="900" dirty="0"/>
+          </a:p>
+        </p:txBody>
+      </p:sp>
+      <p:sp>
+        <p:nvSpPr>
+          <p:cNvPr id="58" name="Shape 56"/>
+          <p:cNvSpPr/>
+          <p:nvPr/>
+        </p:nvSpPr>
+        <p:spPr>
+          <a:xfrm>
+            <a:off x="7759598" y="4169664"/>
+            <a:ext cx="676656" cy="475488"/>
+          </a:xfrm>
+          <a:prstGeom prst="rect">
+            <a:avLst>
+              <a:gd name="adj" fmla="val 7692"/>
+            </a:avLst>
+          </a:prstGeom>
+          <a:solidFill>
+            <a:srgbClr val="FFFFFF"/>
+          </a:solidFill>
+          <a:ln w="12700">
+            <a:solidFill>
+              <a:srgbClr val="DB2777"/>
+            </a:solidFill>
+            <a:prstDash val="solid"/>
+          </a:ln>
+        </p:spPr>
+      </p:sp>
+      <p:sp>
+        <p:nvSpPr>
+          <p:cNvPr id="59" name="Text 57"/>
+          <p:cNvSpPr/>
+          <p:nvPr/>
+        </p:nvSpPr>
+        <p:spPr>
+          <a:xfrm>
+            <a:off x="7759598" y="4169664"/>
+            <a:ext cx="676656" cy="475488"/>
+          </a:xfrm>
+          <a:prstGeom prst="rect">
+            <a:avLst/>
+          </a:prstGeom>
+          <a:noFill/>
+          <a:ln/>
+        </p:spPr>
+        <p:txBody>
+          <a:bodyPr wrap="square" lIns="0" tIns="0" rIns="0" bIns="0" rtlCol="0" anchor="ctr"/>
+          <a:lstStyle/>
+          <a:p>
+            <a:pPr algn="ctr" indent="0" marL="0">
+              <a:buNone/>
+            </a:pPr>
+            <a:r>
+              <a:rPr lang="en-US" sz="900" b="1" dirty="0">
+                <a:solidFill>
+                  <a:srgbClr val="9D174D"/>
+                </a:solidFill>
+                <a:latin typeface="Trebuchet MS" pitchFamily="34" charset="0"/>
+                <a:ea typeface="Trebuchet MS" pitchFamily="34" charset="-122"/>
+                <a:cs typeface="Trebuchet MS" pitchFamily="34" charset="-120"/>
+              </a:rPr>
+              <a:t>s</a:t>
             </a:r>
             <a:endParaRPr lang="en-US" sz="900" dirty="0"/>
           </a:p>
@@ -24234,7 +24585,7 @@
                 <a:ea typeface="Calibri" pitchFamily="34" charset="-122"/>
                 <a:cs typeface="Calibri" pitchFamily="34" charset="-120"/>
               </a:rPr>
-              <a:t>Word Labs  •  wordlabs.app  •  Root: 'meter' = measure or measuring instrument</a:t>
+              <a:t>Word Labs  •  wordlabs.app  •  Root: 'meter' = measure</a:t>
             </a:r>
             <a:endParaRPr lang="en-US" sz="800" dirty="0"/>
           </a:p>
@@ -24373,7 +24724,7 @@
                 <a:ea typeface="Trebuchet MS" pitchFamily="34" charset="-122"/>
                 <a:cs typeface="Trebuchet MS" pitchFamily="34" charset="-120"/>
               </a:rPr>
-              <a:t>altimeter</a:t>
+              <a:t>parameter</a:t>
             </a:r>
             <a:endParaRPr lang="en-US" sz="2800" dirty="0"/>
           </a:p>
@@ -25061,7 +25412,7 @@
                 <a:ea typeface="Calibri" pitchFamily="34" charset="-122"/>
                 <a:cs typeface="Calibri" pitchFamily="34" charset="-120"/>
               </a:rPr>
-              <a:t>Word Labs  •  wordlabs.app  •  Root: 'meter' = measure or measuring instrument</a:t>
+              <a:t>Word Labs  •  wordlabs.app  •  Root: 'meter' = measure</a:t>
             </a:r>
             <a:endParaRPr lang="en-US" sz="800" dirty="0"/>
           </a:p>
@@ -25200,7 +25551,7 @@
                 <a:ea typeface="Trebuchet MS" pitchFamily="34" charset="-122"/>
                 <a:cs typeface="Trebuchet MS" pitchFamily="34" charset="-120"/>
               </a:rPr>
-              <a:t>altimeter</a:t>
+              <a:t>parameter</a:t>
             </a:r>
             <a:endParaRPr lang="en-US" sz="2800" dirty="0"/>
           </a:p>
@@ -25339,7 +25690,7 @@
                 <a:ea typeface="Trebuchet MS" pitchFamily="34" charset="-122"/>
                 <a:cs typeface="Trebuchet MS" pitchFamily="34" charset="-120"/>
               </a:rPr>
-              <a:t>alti</a:t>
+              <a:t>para</a:t>
             </a:r>
             <a:endParaRPr lang="en-US" sz="1300" dirty="0"/>
           </a:p>
@@ -25378,7 +25729,7 @@
                 <a:ea typeface="Calibri" pitchFamily="34" charset="-122"/>
                 <a:cs typeface="Calibri" pitchFamily="34" charset="-120"/>
               </a:rPr>
-              <a:t>high</a:t>
+              <a:t>beside; beyond; against</a:t>
             </a:r>
             <a:endParaRPr lang="en-US" sz="850" dirty="0"/>
           </a:p>
@@ -25490,7 +25841,7 @@
                 <a:ea typeface="Calibri" pitchFamily="34" charset="-122"/>
                 <a:cs typeface="Calibri" pitchFamily="34" charset="-120"/>
               </a:rPr>
-              <a:t>measuring instrument</a:t>
+              <a:t>measure</a:t>
             </a:r>
             <a:endParaRPr lang="en-US" sz="850" dirty="0"/>
           </a:p>
@@ -26046,7 +26397,7 @@
                 <a:ea typeface="Calibri" pitchFamily="34" charset="-122"/>
                 <a:cs typeface="Calibri" pitchFamily="34" charset="-120"/>
               </a:rPr>
-              <a:t>Word Labs  •  wordlabs.app  •  Root: 'meter' = measure or measuring instrument</a:t>
+              <a:t>Word Labs  •  wordlabs.app  •  Root: 'meter' = measure</a:t>
             </a:r>
             <a:endParaRPr lang="en-US" sz="800" dirty="0"/>
           </a:p>
@@ -26119,7 +26470,7 @@
                 <a:ea typeface="Trebuchet MS" pitchFamily="34" charset="-122"/>
                 <a:cs typeface="Trebuchet MS" pitchFamily="34" charset="-120"/>
               </a:rPr>
-              <a:t>We are learning that the root 'meter' means 'measure or measuring instrument'.</a:t>
+              <a:t>We are learning that the root 'meter' means 'measure'.</a:t>
             </a:r>
             <a:endParaRPr lang="en-US" sz="2000" dirty="0"/>
           </a:p>
@@ -26765,7 +27116,7 @@
                 <a:ea typeface="Calibri" pitchFamily="34" charset="-122"/>
                 <a:cs typeface="Calibri" pitchFamily="34" charset="-120"/>
               </a:rPr>
-              <a:t>Word Labs  •  wordlabs.app  •  Root: 'meter' = measure or measuring instrument</a:t>
+              <a:t>Word Labs  •  wordlabs.app  •  Root: 'meter' = measure</a:t>
             </a:r>
             <a:endParaRPr lang="en-US" sz="800" dirty="0"/>
           </a:p>
@@ -26904,7 +27255,7 @@
                 <a:ea typeface="Trebuchet MS" pitchFamily="34" charset="-122"/>
                 <a:cs typeface="Trebuchet MS" pitchFamily="34" charset="-120"/>
               </a:rPr>
-              <a:t>altimeter</a:t>
+              <a:t>parameter</a:t>
             </a:r>
             <a:endParaRPr lang="en-US" sz="2800" dirty="0"/>
           </a:p>
@@ -27043,7 +27394,7 @@
                 <a:ea typeface="Trebuchet MS" pitchFamily="34" charset="-122"/>
                 <a:cs typeface="Trebuchet MS" pitchFamily="34" charset="-120"/>
               </a:rPr>
-              <a:t>alti</a:t>
+              <a:t>para</a:t>
             </a:r>
             <a:endParaRPr lang="en-US" sz="1300" dirty="0"/>
           </a:p>
@@ -27082,7 +27433,7 @@
                 <a:ea typeface="Calibri" pitchFamily="34" charset="-122"/>
                 <a:cs typeface="Calibri" pitchFamily="34" charset="-120"/>
               </a:rPr>
-              <a:t>high</a:t>
+              <a:t>beside; beyond; against</a:t>
             </a:r>
             <a:endParaRPr lang="en-US" sz="850" dirty="0"/>
           </a:p>
@@ -27194,7 +27545,7 @@
                 <a:ea typeface="Calibri" pitchFamily="34" charset="-122"/>
                 <a:cs typeface="Calibri" pitchFamily="34" charset="-120"/>
               </a:rPr>
-              <a:t>measuring instrument</a:t>
+              <a:t>measure</a:t>
             </a:r>
             <a:endParaRPr lang="en-US" sz="850" dirty="0"/>
           </a:p>
@@ -27353,7 +27704,7 @@
                 <a:ea typeface="Trebuchet MS" pitchFamily="34" charset="-122"/>
                 <a:cs typeface="Trebuchet MS" pitchFamily="34" charset="-120"/>
               </a:rPr>
-              <a:t>al</a:t>
+              <a:t>pa</a:t>
             </a:r>
             <a:endParaRPr lang="en-US" sz="1400" dirty="0"/>
           </a:p>
@@ -27458,7 +27809,7 @@
                 <a:ea typeface="Trebuchet MS" pitchFamily="34" charset="-122"/>
                 <a:cs typeface="Trebuchet MS" pitchFamily="34" charset="-120"/>
               </a:rPr>
-              <a:t>tim</a:t>
+              <a:t>ram</a:t>
             </a:r>
             <a:endParaRPr lang="en-US" sz="1400" dirty="0"/>
           </a:p>
@@ -28092,7 +28443,7 @@
                 <a:ea typeface="Calibri" pitchFamily="34" charset="-122"/>
                 <a:cs typeface="Calibri" pitchFamily="34" charset="-120"/>
               </a:rPr>
-              <a:t>Word Labs  •  wordlabs.app  •  Root: 'meter' = measure or measuring instrument</a:t>
+              <a:t>Word Labs  •  wordlabs.app  •  Root: 'meter' = measure</a:t>
             </a:r>
             <a:endParaRPr lang="en-US" sz="800" dirty="0"/>
           </a:p>
@@ -28231,7 +28582,7 @@
                 <a:ea typeface="Trebuchet MS" pitchFamily="34" charset="-122"/>
                 <a:cs typeface="Trebuchet MS" pitchFamily="34" charset="-120"/>
               </a:rPr>
-              <a:t>altimeter</a:t>
+              <a:t>parameter</a:t>
             </a:r>
             <a:endParaRPr lang="en-US" sz="2800" dirty="0"/>
           </a:p>
@@ -28370,7 +28721,7 @@
                 <a:ea typeface="Trebuchet MS" pitchFamily="34" charset="-122"/>
                 <a:cs typeface="Trebuchet MS" pitchFamily="34" charset="-120"/>
               </a:rPr>
-              <a:t>alti</a:t>
+              <a:t>para</a:t>
             </a:r>
             <a:endParaRPr lang="en-US" sz="1300" dirty="0"/>
           </a:p>
@@ -28409,7 +28760,7 @@
                 <a:ea typeface="Calibri" pitchFamily="34" charset="-122"/>
                 <a:cs typeface="Calibri" pitchFamily="34" charset="-120"/>
               </a:rPr>
-              <a:t>high</a:t>
+              <a:t>beside; beyond; against</a:t>
             </a:r>
             <a:endParaRPr lang="en-US" sz="850" dirty="0"/>
           </a:p>
@@ -28521,7 +28872,7 @@
                 <a:ea typeface="Calibri" pitchFamily="34" charset="-122"/>
                 <a:cs typeface="Calibri" pitchFamily="34" charset="-120"/>
               </a:rPr>
-              <a:t>measuring instrument</a:t>
+              <a:t>measure</a:t>
             </a:r>
             <a:endParaRPr lang="en-US" sz="850" dirty="0"/>
           </a:p>
@@ -28680,7 +29031,7 @@
                 <a:ea typeface="Trebuchet MS" pitchFamily="34" charset="-122"/>
                 <a:cs typeface="Trebuchet MS" pitchFamily="34" charset="-120"/>
               </a:rPr>
-              <a:t>al</a:t>
+              <a:t>pa</a:t>
             </a:r>
             <a:endParaRPr lang="en-US" sz="1400" dirty="0"/>
           </a:p>
@@ -28785,7 +29136,7 @@
                 <a:ea typeface="Trebuchet MS" pitchFamily="34" charset="-122"/>
                 <a:cs typeface="Trebuchet MS" pitchFamily="34" charset="-120"/>
               </a:rPr>
-              <a:t>tim</a:t>
+              <a:t>ram</a:t>
             </a:r>
             <a:endParaRPr lang="en-US" sz="1400" dirty="0"/>
           </a:p>
@@ -29154,7 +29505,7 @@
                 <a:ea typeface="Trebuchet MS" pitchFamily="34" charset="-122"/>
                 <a:cs typeface="Trebuchet MS" pitchFamily="34" charset="-120"/>
               </a:rPr>
-              <a:t>a</a:t>
+              <a:t>p</a:t>
             </a:r>
             <a:endParaRPr lang="en-US" sz="900" dirty="0"/>
           </a:p>
@@ -29220,7 +29571,7 @@
                 <a:ea typeface="Trebuchet MS" pitchFamily="34" charset="-122"/>
                 <a:cs typeface="Trebuchet MS" pitchFamily="34" charset="-120"/>
               </a:rPr>
-              <a:t>l</a:t>
+              <a:t>a</a:t>
             </a:r>
             <a:endParaRPr lang="en-US" sz="900" dirty="0"/>
           </a:p>
@@ -29286,7 +29637,7 @@
                 <a:ea typeface="Trebuchet MS" pitchFamily="34" charset="-122"/>
                 <a:cs typeface="Trebuchet MS" pitchFamily="34" charset="-120"/>
               </a:rPr>
-              <a:t>t</a:t>
+              <a:t>r</a:t>
             </a:r>
             <a:endParaRPr lang="en-US" sz="900" dirty="0"/>
           </a:p>
@@ -29352,7 +29703,7 @@
                 <a:ea typeface="Trebuchet MS" pitchFamily="34" charset="-122"/>
                 <a:cs typeface="Trebuchet MS" pitchFamily="34" charset="-120"/>
               </a:rPr>
-              <a:t>i</a:t>
+              <a:t>a</a:t>
             </a:r>
             <a:endParaRPr lang="en-US" sz="900" dirty="0"/>
           </a:p>
@@ -29908,7 +30259,7 @@
                 <a:ea typeface="Calibri" pitchFamily="34" charset="-122"/>
                 <a:cs typeface="Calibri" pitchFamily="34" charset="-120"/>
               </a:rPr>
-              <a:t>Word Labs  •  wordlabs.app  •  Root: 'meter' = measure or measuring instrument</a:t>
+              <a:t>Word Labs  •  wordlabs.app  •  Root: 'meter' = measure</a:t>
             </a:r>
             <a:endParaRPr lang="en-US" sz="800" dirty="0"/>
           </a:p>
@@ -30047,7 +30398,7 @@
                 <a:ea typeface="Trebuchet MS" pitchFamily="34" charset="-122"/>
                 <a:cs typeface="Trebuchet MS" pitchFamily="34" charset="-120"/>
               </a:rPr>
-              <a:t>perimeter</a:t>
+              <a:t>parameters</a:t>
             </a:r>
             <a:endParaRPr lang="en-US" sz="2800" dirty="0"/>
           </a:p>
@@ -30735,7 +31086,7 @@
                 <a:ea typeface="Calibri" pitchFamily="34" charset="-122"/>
                 <a:cs typeface="Calibri" pitchFamily="34" charset="-120"/>
               </a:rPr>
-              <a:t>Word Labs  •  wordlabs.app  •  Root: 'meter' = measure or measuring instrument</a:t>
+              <a:t>Word Labs  •  wordlabs.app  •  Root: 'meter' = measure</a:t>
             </a:r>
             <a:endParaRPr lang="en-US" sz="800" dirty="0"/>
           </a:p>
@@ -30874,7 +31225,7 @@
                 <a:ea typeface="Trebuchet MS" pitchFamily="34" charset="-122"/>
                 <a:cs typeface="Trebuchet MS" pitchFamily="34" charset="-120"/>
               </a:rPr>
-              <a:t>perimeter</a:t>
+              <a:t>parameters</a:t>
             </a:r>
             <a:endParaRPr lang="en-US" sz="2800" dirty="0"/>
           </a:p>
@@ -30954,7 +31305,7 @@
         </p:nvSpPr>
         <p:spPr>
           <a:xfrm>
-            <a:off x="2938272" y="2258568"/>
+            <a:off x="2221992" y="2258568"/>
             <a:ext cx="1828800" cy="292608"/>
           </a:xfrm>
           <a:prstGeom prst="rect">
@@ -30988,7 +31339,7 @@
         </p:nvSpPr>
         <p:spPr>
           <a:xfrm>
-            <a:off x="2938272" y="2258568"/>
+            <a:off x="2221992" y="2258568"/>
             <a:ext cx="1828800" cy="292608"/>
           </a:xfrm>
           <a:prstGeom prst="rect">
@@ -31013,7 +31364,7 @@
                 <a:ea typeface="Trebuchet MS" pitchFamily="34" charset="-122"/>
                 <a:cs typeface="Trebuchet MS" pitchFamily="34" charset="-120"/>
               </a:rPr>
-              <a:t>peri</a:t>
+              <a:t>para</a:t>
             </a:r>
             <a:endParaRPr lang="en-US" sz="1300" dirty="0"/>
           </a:p>
@@ -31027,7 +31378,7 @@
         </p:nvSpPr>
         <p:spPr>
           <a:xfrm>
-            <a:off x="2938272" y="2569464"/>
+            <a:off x="2221992" y="2569464"/>
             <a:ext cx="1828800" cy="201168"/>
           </a:xfrm>
           <a:prstGeom prst="rect">
@@ -31052,7 +31403,7 @@
                 <a:ea typeface="Calibri" pitchFamily="34" charset="-122"/>
                 <a:cs typeface="Calibri" pitchFamily="34" charset="-120"/>
               </a:rPr>
-              <a:t>around</a:t>
+              <a:t>beside; beyond; against</a:t>
             </a:r>
             <a:endParaRPr lang="en-US" sz="850" dirty="0"/>
           </a:p>
@@ -31066,7 +31417,7 @@
         </p:nvSpPr>
         <p:spPr>
           <a:xfrm>
-            <a:off x="5803392" y="2258568"/>
+            <a:off x="4370832" y="2258568"/>
             <a:ext cx="1828800" cy="292608"/>
           </a:xfrm>
           <a:prstGeom prst="rect">
@@ -31100,7 +31451,7 @@
         </p:nvSpPr>
         <p:spPr>
           <a:xfrm>
-            <a:off x="5803392" y="2258568"/>
+            <a:off x="4370832" y="2258568"/>
             <a:ext cx="1828800" cy="292608"/>
           </a:xfrm>
           <a:prstGeom prst="rect">
@@ -31139,7 +31490,7 @@
         </p:nvSpPr>
         <p:spPr>
           <a:xfrm>
-            <a:off x="5803392" y="2569464"/>
+            <a:off x="4370832" y="2569464"/>
             <a:ext cx="1828800" cy="201168"/>
           </a:xfrm>
           <a:prstGeom prst="rect">
@@ -31178,6 +31529,118 @@
         </p:nvSpPr>
         <p:spPr>
           <a:xfrm>
+            <a:off x="6519672" y="2258568"/>
+            <a:ext cx="1828800" cy="292608"/>
+          </a:xfrm>
+          <a:prstGeom prst="rect">
+            <a:avLst>
+              <a:gd name="adj" fmla="val 25000"/>
+            </a:avLst>
+          </a:prstGeom>
+          <a:solidFill>
+            <a:srgbClr val="FCE7F3"/>
+          </a:solidFill>
+          <a:ln w="19050">
+            <a:solidFill>
+              <a:srgbClr val="DB2777"/>
+            </a:solidFill>
+            <a:prstDash val="solid"/>
+          </a:ln>
+          <a:effectLst>
+            <a:outerShdw sx="100000" sy="100000" kx="0" ky="0" algn="bl" rotWithShape="0" blurRad="101600" dist="38100" dir="8100000">
+              <a:srgbClr val="000000">
+                <a:alpha val="12000"/>
+              </a:srgbClr>
+            </a:outerShdw>
+          </a:effectLst>
+        </p:spPr>
+      </p:sp>
+      <p:sp>
+        <p:nvSpPr>
+          <p:cNvPr id="23" name="Text 21"/>
+          <p:cNvSpPr/>
+          <p:nvPr/>
+        </p:nvSpPr>
+        <p:spPr>
+          <a:xfrm>
+            <a:off x="6519672" y="2258568"/>
+            <a:ext cx="1828800" cy="292608"/>
+          </a:xfrm>
+          <a:prstGeom prst="rect">
+            <a:avLst/>
+          </a:prstGeom>
+          <a:noFill/>
+          <a:ln/>
+        </p:spPr>
+        <p:txBody>
+          <a:bodyPr wrap="square" lIns="0" tIns="0" rIns="0" bIns="0" rtlCol="0" anchor="ctr"/>
+          <a:lstStyle/>
+          <a:p>
+            <a:pPr algn="ctr" indent="0" marL="0">
+              <a:buNone/>
+            </a:pPr>
+            <a:r>
+              <a:rPr lang="en-US" sz="1300" b="1" dirty="0">
+                <a:solidFill>
+                  <a:srgbClr val="9D174D"/>
+                </a:solidFill>
+                <a:latin typeface="Trebuchet MS" pitchFamily="34" charset="0"/>
+                <a:ea typeface="Trebuchet MS" pitchFamily="34" charset="-122"/>
+                <a:cs typeface="Trebuchet MS" pitchFamily="34" charset="-120"/>
+              </a:rPr>
+              <a:t>s</a:t>
+            </a:r>
+            <a:endParaRPr lang="en-US" sz="1300" dirty="0"/>
+          </a:p>
+        </p:txBody>
+      </p:sp>
+      <p:sp>
+        <p:nvSpPr>
+          <p:cNvPr id="24" name="Text 22"/>
+          <p:cNvSpPr/>
+          <p:nvPr/>
+        </p:nvSpPr>
+        <p:spPr>
+          <a:xfrm>
+            <a:off x="6519672" y="2569464"/>
+            <a:ext cx="1828800" cy="201168"/>
+          </a:xfrm>
+          <a:prstGeom prst="rect">
+            <a:avLst/>
+          </a:prstGeom>
+          <a:noFill/>
+          <a:ln/>
+        </p:spPr>
+        <p:txBody>
+          <a:bodyPr wrap="square" lIns="0" tIns="0" rIns="0" bIns="0" rtlCol="0" anchor="t"/>
+          <a:lstStyle/>
+          <a:p>
+            <a:pPr algn="ctr" indent="0" marL="0">
+              <a:buNone/>
+            </a:pPr>
+            <a:r>
+              <a:rPr lang="en-US" sz="850" dirty="0">
+                <a:solidFill>
+                  <a:srgbClr val="475569"/>
+                </a:solidFill>
+                <a:latin typeface="Calibri" pitchFamily="34" charset="0"/>
+                <a:ea typeface="Calibri" pitchFamily="34" charset="-122"/>
+                <a:cs typeface="Calibri" pitchFamily="34" charset="-120"/>
+              </a:rPr>
+              <a:t>plural or present tense</a:t>
+            </a:r>
+            <a:endParaRPr lang="en-US" sz="850" dirty="0"/>
+          </a:p>
+        </p:txBody>
+      </p:sp>
+      <p:sp>
+        <p:nvSpPr>
+          <p:cNvPr id="25" name="Shape 23"/>
+          <p:cNvSpPr/>
+          <p:nvPr/>
+        </p:nvSpPr>
+        <p:spPr>
+          <a:xfrm>
             <a:off x="365760" y="3273552"/>
             <a:ext cx="1371600" cy="658368"/>
           </a:xfrm>
@@ -31199,7 +31662,7 @@
       </p:sp>
       <p:sp>
         <p:nvSpPr>
-          <p:cNvPr id="23" name="Text 21"/>
+          <p:cNvPr id="26" name="Text 24"/>
           <p:cNvSpPr/>
           <p:nvPr/>
         </p:nvSpPr>
@@ -31238,7 +31701,7 @@
       </p:sp>
       <p:sp>
         <p:nvSpPr>
-          <p:cNvPr id="24" name="Shape 22"/>
+          <p:cNvPr id="27" name="Shape 25"/>
           <p:cNvSpPr/>
           <p:nvPr/>
         </p:nvSpPr>
@@ -31265,7 +31728,7 @@
       </p:sp>
       <p:sp>
         <p:nvSpPr>
-          <p:cNvPr id="25" name="Text 23"/>
+          <p:cNvPr id="28" name="Text 26"/>
           <p:cNvSpPr/>
           <p:nvPr/>
         </p:nvSpPr>
@@ -31304,7 +31767,7 @@
       </p:sp>
       <p:sp>
         <p:nvSpPr>
-          <p:cNvPr id="26" name="Shape 24"/>
+          <p:cNvPr id="29" name="Shape 27"/>
           <p:cNvSpPr/>
           <p:nvPr/>
         </p:nvSpPr>
@@ -31331,7 +31794,7 @@
       </p:sp>
       <p:sp>
         <p:nvSpPr>
-          <p:cNvPr id="27" name="Text 25"/>
+          <p:cNvPr id="30" name="Text 28"/>
           <p:cNvSpPr/>
           <p:nvPr/>
         </p:nvSpPr>
@@ -31370,7 +31833,7 @@
       </p:sp>
       <p:sp>
         <p:nvSpPr>
-          <p:cNvPr id="28" name="Shape 26"/>
+          <p:cNvPr id="31" name="Shape 29"/>
           <p:cNvSpPr/>
           <p:nvPr/>
         </p:nvSpPr>
@@ -31397,7 +31860,7 @@
       </p:sp>
       <p:sp>
         <p:nvSpPr>
-          <p:cNvPr id="29" name="Text 27"/>
+          <p:cNvPr id="32" name="Text 30"/>
           <p:cNvSpPr/>
           <p:nvPr/>
         </p:nvSpPr>
@@ -31720,7 +32183,7 @@
                 <a:ea typeface="Calibri" pitchFamily="34" charset="-122"/>
                 <a:cs typeface="Calibri" pitchFamily="34" charset="-120"/>
               </a:rPr>
-              <a:t>Word Labs  •  wordlabs.app  •  Root: 'meter' = measure or measuring instrument</a:t>
+              <a:t>Word Labs  •  wordlabs.app  •  Root: 'meter' = measure</a:t>
             </a:r>
             <a:endParaRPr lang="en-US" sz="800" dirty="0"/>
           </a:p>
@@ -31859,7 +32322,7 @@
                 <a:ea typeface="Trebuchet MS" pitchFamily="34" charset="-122"/>
                 <a:cs typeface="Trebuchet MS" pitchFamily="34" charset="-120"/>
               </a:rPr>
-              <a:t>perimeter</a:t>
+              <a:t>parameters</a:t>
             </a:r>
             <a:endParaRPr lang="en-US" sz="2800" dirty="0"/>
           </a:p>
@@ -31939,7 +32402,7 @@
         </p:nvSpPr>
         <p:spPr>
           <a:xfrm>
-            <a:off x="2938272" y="2258568"/>
+            <a:off x="2221992" y="2258568"/>
             <a:ext cx="1828800" cy="292608"/>
           </a:xfrm>
           <a:prstGeom prst="rect">
@@ -31973,7 +32436,7 @@
         </p:nvSpPr>
         <p:spPr>
           <a:xfrm>
-            <a:off x="2938272" y="2258568"/>
+            <a:off x="2221992" y="2258568"/>
             <a:ext cx="1828800" cy="292608"/>
           </a:xfrm>
           <a:prstGeom prst="rect">
@@ -31998,7 +32461,7 @@
                 <a:ea typeface="Trebuchet MS" pitchFamily="34" charset="-122"/>
                 <a:cs typeface="Trebuchet MS" pitchFamily="34" charset="-120"/>
               </a:rPr>
-              <a:t>peri</a:t>
+              <a:t>para</a:t>
             </a:r>
             <a:endParaRPr lang="en-US" sz="1300" dirty="0"/>
           </a:p>
@@ -32012,7 +32475,7 @@
         </p:nvSpPr>
         <p:spPr>
           <a:xfrm>
-            <a:off x="2938272" y="2569464"/>
+            <a:off x="2221992" y="2569464"/>
             <a:ext cx="1828800" cy="201168"/>
           </a:xfrm>
           <a:prstGeom prst="rect">
@@ -32037,7 +32500,7 @@
                 <a:ea typeface="Calibri" pitchFamily="34" charset="-122"/>
                 <a:cs typeface="Calibri" pitchFamily="34" charset="-120"/>
               </a:rPr>
-              <a:t>around</a:t>
+              <a:t>beside; beyond; against</a:t>
             </a:r>
             <a:endParaRPr lang="en-US" sz="850" dirty="0"/>
           </a:p>
@@ -32051,7 +32514,7 @@
         </p:nvSpPr>
         <p:spPr>
           <a:xfrm>
-            <a:off x="5803392" y="2258568"/>
+            <a:off x="4370832" y="2258568"/>
             <a:ext cx="1828800" cy="292608"/>
           </a:xfrm>
           <a:prstGeom prst="rect">
@@ -32085,7 +32548,7 @@
         </p:nvSpPr>
         <p:spPr>
           <a:xfrm>
-            <a:off x="5803392" y="2258568"/>
+            <a:off x="4370832" y="2258568"/>
             <a:ext cx="1828800" cy="292608"/>
           </a:xfrm>
           <a:prstGeom prst="rect">
@@ -32124,7 +32587,7 @@
         </p:nvSpPr>
         <p:spPr>
           <a:xfrm>
-            <a:off x="5803392" y="2569464"/>
+            <a:off x="4370832" y="2569464"/>
             <a:ext cx="1828800" cy="201168"/>
           </a:xfrm>
           <a:prstGeom prst="rect">
@@ -32163,6 +32626,118 @@
         </p:nvSpPr>
         <p:spPr>
           <a:xfrm>
+            <a:off x="6519672" y="2258568"/>
+            <a:ext cx="1828800" cy="292608"/>
+          </a:xfrm>
+          <a:prstGeom prst="rect">
+            <a:avLst>
+              <a:gd name="adj" fmla="val 25000"/>
+            </a:avLst>
+          </a:prstGeom>
+          <a:solidFill>
+            <a:srgbClr val="FCE7F3"/>
+          </a:solidFill>
+          <a:ln w="19050">
+            <a:solidFill>
+              <a:srgbClr val="DB2777"/>
+            </a:solidFill>
+            <a:prstDash val="solid"/>
+          </a:ln>
+          <a:effectLst>
+            <a:outerShdw sx="100000" sy="100000" kx="0" ky="0" algn="bl" rotWithShape="0" blurRad="101600" dist="38100" dir="8100000">
+              <a:srgbClr val="000000">
+                <a:alpha val="12000"/>
+              </a:srgbClr>
+            </a:outerShdw>
+          </a:effectLst>
+        </p:spPr>
+      </p:sp>
+      <p:sp>
+        <p:nvSpPr>
+          <p:cNvPr id="23" name="Text 21"/>
+          <p:cNvSpPr/>
+          <p:nvPr/>
+        </p:nvSpPr>
+        <p:spPr>
+          <a:xfrm>
+            <a:off x="6519672" y="2258568"/>
+            <a:ext cx="1828800" cy="292608"/>
+          </a:xfrm>
+          <a:prstGeom prst="rect">
+            <a:avLst/>
+          </a:prstGeom>
+          <a:noFill/>
+          <a:ln/>
+        </p:spPr>
+        <p:txBody>
+          <a:bodyPr wrap="square" lIns="0" tIns="0" rIns="0" bIns="0" rtlCol="0" anchor="ctr"/>
+          <a:lstStyle/>
+          <a:p>
+            <a:pPr algn="ctr" indent="0" marL="0">
+              <a:buNone/>
+            </a:pPr>
+            <a:r>
+              <a:rPr lang="en-US" sz="1300" b="1" dirty="0">
+                <a:solidFill>
+                  <a:srgbClr val="9D174D"/>
+                </a:solidFill>
+                <a:latin typeface="Trebuchet MS" pitchFamily="34" charset="0"/>
+                <a:ea typeface="Trebuchet MS" pitchFamily="34" charset="-122"/>
+                <a:cs typeface="Trebuchet MS" pitchFamily="34" charset="-120"/>
+              </a:rPr>
+              <a:t>s</a:t>
+            </a:r>
+            <a:endParaRPr lang="en-US" sz="1300" dirty="0"/>
+          </a:p>
+        </p:txBody>
+      </p:sp>
+      <p:sp>
+        <p:nvSpPr>
+          <p:cNvPr id="24" name="Text 22"/>
+          <p:cNvSpPr/>
+          <p:nvPr/>
+        </p:nvSpPr>
+        <p:spPr>
+          <a:xfrm>
+            <a:off x="6519672" y="2569464"/>
+            <a:ext cx="1828800" cy="201168"/>
+          </a:xfrm>
+          <a:prstGeom prst="rect">
+            <a:avLst/>
+          </a:prstGeom>
+          <a:noFill/>
+          <a:ln/>
+        </p:spPr>
+        <p:txBody>
+          <a:bodyPr wrap="square" lIns="0" tIns="0" rIns="0" bIns="0" rtlCol="0" anchor="t"/>
+          <a:lstStyle/>
+          <a:p>
+            <a:pPr algn="ctr" indent="0" marL="0">
+              <a:buNone/>
+            </a:pPr>
+            <a:r>
+              <a:rPr lang="en-US" sz="850" dirty="0">
+                <a:solidFill>
+                  <a:srgbClr val="475569"/>
+                </a:solidFill>
+                <a:latin typeface="Calibri" pitchFamily="34" charset="0"/>
+                <a:ea typeface="Calibri" pitchFamily="34" charset="-122"/>
+                <a:cs typeface="Calibri" pitchFamily="34" charset="-120"/>
+              </a:rPr>
+              <a:t>plural or present tense</a:t>
+            </a:r>
+            <a:endParaRPr lang="en-US" sz="850" dirty="0"/>
+          </a:p>
+        </p:txBody>
+      </p:sp>
+      <p:sp>
+        <p:nvSpPr>
+          <p:cNvPr id="25" name="Shape 23"/>
+          <p:cNvSpPr/>
+          <p:nvPr/>
+        </p:nvSpPr>
+        <p:spPr>
+          <a:xfrm>
             <a:off x="365760" y="3273552"/>
             <a:ext cx="1371600" cy="658368"/>
           </a:xfrm>
@@ -32184,7 +32759,7 @@
       </p:sp>
       <p:sp>
         <p:nvSpPr>
-          <p:cNvPr id="23" name="Text 21"/>
+          <p:cNvPr id="26" name="Text 24"/>
           <p:cNvSpPr/>
           <p:nvPr/>
         </p:nvSpPr>
@@ -32223,7 +32798,7 @@
       </p:sp>
       <p:sp>
         <p:nvSpPr>
-          <p:cNvPr id="24" name="Shape 22"/>
+          <p:cNvPr id="27" name="Shape 25"/>
           <p:cNvSpPr/>
           <p:nvPr/>
         </p:nvSpPr>
@@ -32250,7 +32825,7 @@
       </p:sp>
       <p:sp>
         <p:nvSpPr>
-          <p:cNvPr id="25" name="Shape 23"/>
+          <p:cNvPr id="28" name="Shape 26"/>
           <p:cNvSpPr/>
           <p:nvPr/>
         </p:nvSpPr>
@@ -32277,7 +32852,7 @@
       </p:sp>
       <p:sp>
         <p:nvSpPr>
-          <p:cNvPr id="26" name="Text 24"/>
+          <p:cNvPr id="29" name="Text 27"/>
           <p:cNvSpPr/>
           <p:nvPr/>
         </p:nvSpPr>
@@ -32308,7 +32883,7 @@
                 <a:ea typeface="Trebuchet MS" pitchFamily="34" charset="-122"/>
                 <a:cs typeface="Trebuchet MS" pitchFamily="34" charset="-120"/>
               </a:rPr>
-              <a:t>pe</a:t>
+              <a:t>pa</a:t>
             </a:r>
             <a:endParaRPr lang="en-US" sz="1400" dirty="0"/>
           </a:p>
@@ -32316,7 +32891,7 @@
       </p:sp>
       <p:sp>
         <p:nvSpPr>
-          <p:cNvPr id="27" name="Text 25"/>
+          <p:cNvPr id="30" name="Text 28"/>
           <p:cNvSpPr/>
           <p:nvPr/>
         </p:nvSpPr>
@@ -32355,7 +32930,7 @@
       </p:sp>
       <p:sp>
         <p:nvSpPr>
-          <p:cNvPr id="28" name="Shape 26"/>
+          <p:cNvPr id="31" name="Shape 29"/>
           <p:cNvSpPr/>
           <p:nvPr/>
         </p:nvSpPr>
@@ -32382,7 +32957,7 @@
       </p:sp>
       <p:sp>
         <p:nvSpPr>
-          <p:cNvPr id="29" name="Text 27"/>
+          <p:cNvPr id="32" name="Text 30"/>
           <p:cNvSpPr/>
           <p:nvPr/>
         </p:nvSpPr>
@@ -32413,7 +32988,7 @@
                 <a:ea typeface="Trebuchet MS" pitchFamily="34" charset="-122"/>
                 <a:cs typeface="Trebuchet MS" pitchFamily="34" charset="-120"/>
               </a:rPr>
-              <a:t>rim</a:t>
+              <a:t>ram</a:t>
             </a:r>
             <a:endParaRPr lang="en-US" sz="1400" dirty="0"/>
           </a:p>
@@ -32421,7 +32996,7 @@
       </p:sp>
       <p:sp>
         <p:nvSpPr>
-          <p:cNvPr id="30" name="Text 28"/>
+          <p:cNvPr id="33" name="Text 31"/>
           <p:cNvSpPr/>
           <p:nvPr/>
         </p:nvSpPr>
@@ -32460,7 +33035,7 @@
       </p:sp>
       <p:sp>
         <p:nvSpPr>
-          <p:cNvPr id="31" name="Shape 29"/>
+          <p:cNvPr id="34" name="Shape 32"/>
           <p:cNvSpPr/>
           <p:nvPr/>
         </p:nvSpPr>
@@ -32487,7 +33062,7 @@
       </p:sp>
       <p:sp>
         <p:nvSpPr>
-          <p:cNvPr id="32" name="Text 30"/>
+          <p:cNvPr id="35" name="Text 33"/>
           <p:cNvSpPr/>
           <p:nvPr/>
         </p:nvSpPr>
@@ -32526,7 +33101,7 @@
       </p:sp>
       <p:sp>
         <p:nvSpPr>
-          <p:cNvPr id="33" name="Text 31"/>
+          <p:cNvPr id="36" name="Text 34"/>
           <p:cNvSpPr/>
           <p:nvPr/>
         </p:nvSpPr>
@@ -32565,7 +33140,7 @@
       </p:sp>
       <p:sp>
         <p:nvSpPr>
-          <p:cNvPr id="34" name="Shape 32"/>
+          <p:cNvPr id="37" name="Shape 35"/>
           <p:cNvSpPr/>
           <p:nvPr/>
         </p:nvSpPr>
@@ -32592,7 +33167,7 @@
       </p:sp>
       <p:sp>
         <p:nvSpPr>
-          <p:cNvPr id="35" name="Text 33"/>
+          <p:cNvPr id="38" name="Text 36"/>
           <p:cNvSpPr/>
           <p:nvPr/>
         </p:nvSpPr>
@@ -32623,7 +33198,7 @@
                 <a:ea typeface="Trebuchet MS" pitchFamily="34" charset="-122"/>
                 <a:cs typeface="Trebuchet MS" pitchFamily="34" charset="-120"/>
               </a:rPr>
-              <a:t>ter</a:t>
+              <a:t>ters</a:t>
             </a:r>
             <a:endParaRPr lang="en-US" sz="1400" dirty="0"/>
           </a:p>
@@ -32631,7 +33206,7 @@
       </p:sp>
       <p:sp>
         <p:nvSpPr>
-          <p:cNvPr id="36" name="Shape 34"/>
+          <p:cNvPr id="39" name="Shape 37"/>
           <p:cNvSpPr/>
           <p:nvPr/>
         </p:nvSpPr>
@@ -32658,7 +33233,7 @@
       </p:sp>
       <p:sp>
         <p:nvSpPr>
-          <p:cNvPr id="37" name="Text 35"/>
+          <p:cNvPr id="40" name="Text 38"/>
           <p:cNvSpPr/>
           <p:nvPr/>
         </p:nvSpPr>
@@ -32697,7 +33272,7 @@
       </p:sp>
       <p:sp>
         <p:nvSpPr>
-          <p:cNvPr id="38" name="Shape 36"/>
+          <p:cNvPr id="41" name="Shape 39"/>
           <p:cNvSpPr/>
           <p:nvPr/>
         </p:nvSpPr>
@@ -32724,7 +33299,7 @@
       </p:sp>
       <p:sp>
         <p:nvSpPr>
-          <p:cNvPr id="39" name="Text 37"/>
+          <p:cNvPr id="42" name="Text 40"/>
           <p:cNvSpPr/>
           <p:nvPr/>
         </p:nvSpPr>
@@ -33047,7 +33622,7 @@
                 <a:ea typeface="Calibri" pitchFamily="34" charset="-122"/>
                 <a:cs typeface="Calibri" pitchFamily="34" charset="-120"/>
               </a:rPr>
-              <a:t>Word Labs  •  wordlabs.app  •  Root: 'meter' = measure or measuring instrument</a:t>
+              <a:t>Word Labs  •  wordlabs.app  •  Root: 'meter' = measure</a:t>
             </a:r>
             <a:endParaRPr lang="en-US" sz="800" dirty="0"/>
           </a:p>
@@ -33186,7 +33761,7 @@
                 <a:ea typeface="Trebuchet MS" pitchFamily="34" charset="-122"/>
                 <a:cs typeface="Trebuchet MS" pitchFamily="34" charset="-120"/>
               </a:rPr>
-              <a:t>perimeter</a:t>
+              <a:t>parameters</a:t>
             </a:r>
             <a:endParaRPr lang="en-US" sz="2800" dirty="0"/>
           </a:p>
@@ -33266,7 +33841,7 @@
         </p:nvSpPr>
         <p:spPr>
           <a:xfrm>
-            <a:off x="2938272" y="2258568"/>
+            <a:off x="2221992" y="2258568"/>
             <a:ext cx="1828800" cy="292608"/>
           </a:xfrm>
           <a:prstGeom prst="rect">
@@ -33300,7 +33875,7 @@
         </p:nvSpPr>
         <p:spPr>
           <a:xfrm>
-            <a:off x="2938272" y="2258568"/>
+            <a:off x="2221992" y="2258568"/>
             <a:ext cx="1828800" cy="292608"/>
           </a:xfrm>
           <a:prstGeom prst="rect">
@@ -33325,7 +33900,7 @@
                 <a:ea typeface="Trebuchet MS" pitchFamily="34" charset="-122"/>
                 <a:cs typeface="Trebuchet MS" pitchFamily="34" charset="-120"/>
               </a:rPr>
-              <a:t>peri</a:t>
+              <a:t>para</a:t>
             </a:r>
             <a:endParaRPr lang="en-US" sz="1300" dirty="0"/>
           </a:p>
@@ -33339,7 +33914,7 @@
         </p:nvSpPr>
         <p:spPr>
           <a:xfrm>
-            <a:off x="2938272" y="2569464"/>
+            <a:off x="2221992" y="2569464"/>
             <a:ext cx="1828800" cy="201168"/>
           </a:xfrm>
           <a:prstGeom prst="rect">
@@ -33364,7 +33939,7 @@
                 <a:ea typeface="Calibri" pitchFamily="34" charset="-122"/>
                 <a:cs typeface="Calibri" pitchFamily="34" charset="-120"/>
               </a:rPr>
-              <a:t>around</a:t>
+              <a:t>beside; beyond; against</a:t>
             </a:r>
             <a:endParaRPr lang="en-US" sz="850" dirty="0"/>
           </a:p>
@@ -33378,7 +33953,7 @@
         </p:nvSpPr>
         <p:spPr>
           <a:xfrm>
-            <a:off x="5803392" y="2258568"/>
+            <a:off x="4370832" y="2258568"/>
             <a:ext cx="1828800" cy="292608"/>
           </a:xfrm>
           <a:prstGeom prst="rect">
@@ -33412,7 +33987,7 @@
         </p:nvSpPr>
         <p:spPr>
           <a:xfrm>
-            <a:off x="5803392" y="2258568"/>
+            <a:off x="4370832" y="2258568"/>
             <a:ext cx="1828800" cy="292608"/>
           </a:xfrm>
           <a:prstGeom prst="rect">
@@ -33451,7 +34026,7 @@
         </p:nvSpPr>
         <p:spPr>
           <a:xfrm>
-            <a:off x="5803392" y="2569464"/>
+            <a:off x="4370832" y="2569464"/>
             <a:ext cx="1828800" cy="201168"/>
           </a:xfrm>
           <a:prstGeom prst="rect">
@@ -33490,6 +34065,118 @@
         </p:nvSpPr>
         <p:spPr>
           <a:xfrm>
+            <a:off x="6519672" y="2258568"/>
+            <a:ext cx="1828800" cy="292608"/>
+          </a:xfrm>
+          <a:prstGeom prst="rect">
+            <a:avLst>
+              <a:gd name="adj" fmla="val 25000"/>
+            </a:avLst>
+          </a:prstGeom>
+          <a:solidFill>
+            <a:srgbClr val="FCE7F3"/>
+          </a:solidFill>
+          <a:ln w="19050">
+            <a:solidFill>
+              <a:srgbClr val="DB2777"/>
+            </a:solidFill>
+            <a:prstDash val="solid"/>
+          </a:ln>
+          <a:effectLst>
+            <a:outerShdw sx="100000" sy="100000" kx="0" ky="0" algn="bl" rotWithShape="0" blurRad="101600" dist="38100" dir="8100000">
+              <a:srgbClr val="000000">
+                <a:alpha val="12000"/>
+              </a:srgbClr>
+            </a:outerShdw>
+          </a:effectLst>
+        </p:spPr>
+      </p:sp>
+      <p:sp>
+        <p:nvSpPr>
+          <p:cNvPr id="23" name="Text 21"/>
+          <p:cNvSpPr/>
+          <p:nvPr/>
+        </p:nvSpPr>
+        <p:spPr>
+          <a:xfrm>
+            <a:off x="6519672" y="2258568"/>
+            <a:ext cx="1828800" cy="292608"/>
+          </a:xfrm>
+          <a:prstGeom prst="rect">
+            <a:avLst/>
+          </a:prstGeom>
+          <a:noFill/>
+          <a:ln/>
+        </p:spPr>
+        <p:txBody>
+          <a:bodyPr wrap="square" lIns="0" tIns="0" rIns="0" bIns="0" rtlCol="0" anchor="ctr"/>
+          <a:lstStyle/>
+          <a:p>
+            <a:pPr algn="ctr" indent="0" marL="0">
+              <a:buNone/>
+            </a:pPr>
+            <a:r>
+              <a:rPr lang="en-US" sz="1300" b="1" dirty="0">
+                <a:solidFill>
+                  <a:srgbClr val="9D174D"/>
+                </a:solidFill>
+                <a:latin typeface="Trebuchet MS" pitchFamily="34" charset="0"/>
+                <a:ea typeface="Trebuchet MS" pitchFamily="34" charset="-122"/>
+                <a:cs typeface="Trebuchet MS" pitchFamily="34" charset="-120"/>
+              </a:rPr>
+              <a:t>s</a:t>
+            </a:r>
+            <a:endParaRPr lang="en-US" sz="1300" dirty="0"/>
+          </a:p>
+        </p:txBody>
+      </p:sp>
+      <p:sp>
+        <p:nvSpPr>
+          <p:cNvPr id="24" name="Text 22"/>
+          <p:cNvSpPr/>
+          <p:nvPr/>
+        </p:nvSpPr>
+        <p:spPr>
+          <a:xfrm>
+            <a:off x="6519672" y="2569464"/>
+            <a:ext cx="1828800" cy="201168"/>
+          </a:xfrm>
+          <a:prstGeom prst="rect">
+            <a:avLst/>
+          </a:prstGeom>
+          <a:noFill/>
+          <a:ln/>
+        </p:spPr>
+        <p:txBody>
+          <a:bodyPr wrap="square" lIns="0" tIns="0" rIns="0" bIns="0" rtlCol="0" anchor="t"/>
+          <a:lstStyle/>
+          <a:p>
+            <a:pPr algn="ctr" indent="0" marL="0">
+              <a:buNone/>
+            </a:pPr>
+            <a:r>
+              <a:rPr lang="en-US" sz="850" dirty="0">
+                <a:solidFill>
+                  <a:srgbClr val="475569"/>
+                </a:solidFill>
+                <a:latin typeface="Calibri" pitchFamily="34" charset="0"/>
+                <a:ea typeface="Calibri" pitchFamily="34" charset="-122"/>
+                <a:cs typeface="Calibri" pitchFamily="34" charset="-120"/>
+              </a:rPr>
+              <a:t>plural or present tense</a:t>
+            </a:r>
+            <a:endParaRPr lang="en-US" sz="850" dirty="0"/>
+          </a:p>
+        </p:txBody>
+      </p:sp>
+      <p:sp>
+        <p:nvSpPr>
+          <p:cNvPr id="25" name="Shape 23"/>
+          <p:cNvSpPr/>
+          <p:nvPr/>
+        </p:nvSpPr>
+        <p:spPr>
+          <a:xfrm>
             <a:off x="365760" y="3273552"/>
             <a:ext cx="1371600" cy="658368"/>
           </a:xfrm>
@@ -33511,7 +34198,7 @@
       </p:sp>
       <p:sp>
         <p:nvSpPr>
-          <p:cNvPr id="23" name="Text 21"/>
+          <p:cNvPr id="26" name="Text 24"/>
           <p:cNvSpPr/>
           <p:nvPr/>
         </p:nvSpPr>
@@ -33550,7 +34237,7 @@
       </p:sp>
       <p:sp>
         <p:nvSpPr>
-          <p:cNvPr id="24" name="Shape 22"/>
+          <p:cNvPr id="27" name="Shape 25"/>
           <p:cNvSpPr/>
           <p:nvPr/>
         </p:nvSpPr>
@@ -33577,7 +34264,7 @@
       </p:sp>
       <p:sp>
         <p:nvSpPr>
-          <p:cNvPr id="25" name="Shape 23"/>
+          <p:cNvPr id="28" name="Shape 26"/>
           <p:cNvSpPr/>
           <p:nvPr/>
         </p:nvSpPr>
@@ -33604,7 +34291,7 @@
       </p:sp>
       <p:sp>
         <p:nvSpPr>
-          <p:cNvPr id="26" name="Text 24"/>
+          <p:cNvPr id="29" name="Text 27"/>
           <p:cNvSpPr/>
           <p:nvPr/>
         </p:nvSpPr>
@@ -33635,7 +34322,7 @@
                 <a:ea typeface="Trebuchet MS" pitchFamily="34" charset="-122"/>
                 <a:cs typeface="Trebuchet MS" pitchFamily="34" charset="-120"/>
               </a:rPr>
-              <a:t>pe</a:t>
+              <a:t>pa</a:t>
             </a:r>
             <a:endParaRPr lang="en-US" sz="1400" dirty="0"/>
           </a:p>
@@ -33643,7 +34330,7 @@
       </p:sp>
       <p:sp>
         <p:nvSpPr>
-          <p:cNvPr id="27" name="Text 25"/>
+          <p:cNvPr id="30" name="Text 28"/>
           <p:cNvSpPr/>
           <p:nvPr/>
         </p:nvSpPr>
@@ -33682,7 +34369,7 @@
       </p:sp>
       <p:sp>
         <p:nvSpPr>
-          <p:cNvPr id="28" name="Shape 26"/>
+          <p:cNvPr id="31" name="Shape 29"/>
           <p:cNvSpPr/>
           <p:nvPr/>
         </p:nvSpPr>
@@ -33709,7 +34396,7 @@
       </p:sp>
       <p:sp>
         <p:nvSpPr>
-          <p:cNvPr id="29" name="Text 27"/>
+          <p:cNvPr id="32" name="Text 30"/>
           <p:cNvSpPr/>
           <p:nvPr/>
         </p:nvSpPr>
@@ -33740,7 +34427,7 @@
                 <a:ea typeface="Trebuchet MS" pitchFamily="34" charset="-122"/>
                 <a:cs typeface="Trebuchet MS" pitchFamily="34" charset="-120"/>
               </a:rPr>
-              <a:t>rim</a:t>
+              <a:t>ram</a:t>
             </a:r>
             <a:endParaRPr lang="en-US" sz="1400" dirty="0"/>
           </a:p>
@@ -33748,7 +34435,7 @@
       </p:sp>
       <p:sp>
         <p:nvSpPr>
-          <p:cNvPr id="30" name="Text 28"/>
+          <p:cNvPr id="33" name="Text 31"/>
           <p:cNvSpPr/>
           <p:nvPr/>
         </p:nvSpPr>
@@ -33787,7 +34474,7 @@
       </p:sp>
       <p:sp>
         <p:nvSpPr>
-          <p:cNvPr id="31" name="Shape 29"/>
+          <p:cNvPr id="34" name="Shape 32"/>
           <p:cNvSpPr/>
           <p:nvPr/>
         </p:nvSpPr>
@@ -33814,7 +34501,7 @@
       </p:sp>
       <p:sp>
         <p:nvSpPr>
-          <p:cNvPr id="32" name="Text 30"/>
+          <p:cNvPr id="35" name="Text 33"/>
           <p:cNvSpPr/>
           <p:nvPr/>
         </p:nvSpPr>
@@ -33853,7 +34540,7 @@
       </p:sp>
       <p:sp>
         <p:nvSpPr>
-          <p:cNvPr id="33" name="Text 31"/>
+          <p:cNvPr id="36" name="Text 34"/>
           <p:cNvSpPr/>
           <p:nvPr/>
         </p:nvSpPr>
@@ -33892,7 +34579,7 @@
       </p:sp>
       <p:sp>
         <p:nvSpPr>
-          <p:cNvPr id="34" name="Shape 32"/>
+          <p:cNvPr id="37" name="Shape 35"/>
           <p:cNvSpPr/>
           <p:nvPr/>
         </p:nvSpPr>
@@ -33919,7 +34606,7 @@
       </p:sp>
       <p:sp>
         <p:nvSpPr>
-          <p:cNvPr id="35" name="Text 33"/>
+          <p:cNvPr id="38" name="Text 36"/>
           <p:cNvSpPr/>
           <p:nvPr/>
         </p:nvSpPr>
@@ -33950,7 +34637,7 @@
                 <a:ea typeface="Trebuchet MS" pitchFamily="34" charset="-122"/>
                 <a:cs typeface="Trebuchet MS" pitchFamily="34" charset="-120"/>
               </a:rPr>
-              <a:t>ter</a:t>
+              <a:t>ters</a:t>
             </a:r>
             <a:endParaRPr lang="en-US" sz="1400" dirty="0"/>
           </a:p>
@@ -33958,7 +34645,7 @@
       </p:sp>
       <p:sp>
         <p:nvSpPr>
-          <p:cNvPr id="36" name="Shape 34"/>
+          <p:cNvPr id="39" name="Shape 37"/>
           <p:cNvSpPr/>
           <p:nvPr/>
         </p:nvSpPr>
@@ -33985,7 +34672,7 @@
       </p:sp>
       <p:sp>
         <p:nvSpPr>
-          <p:cNvPr id="37" name="Text 35"/>
+          <p:cNvPr id="40" name="Text 38"/>
           <p:cNvSpPr/>
           <p:nvPr/>
         </p:nvSpPr>
@@ -34024,7 +34711,7 @@
       </p:sp>
       <p:sp>
         <p:nvSpPr>
-          <p:cNvPr id="38" name="Shape 36"/>
+          <p:cNvPr id="41" name="Shape 39"/>
           <p:cNvSpPr/>
           <p:nvPr/>
         </p:nvSpPr>
@@ -34051,14 +34738,14 @@
       </p:sp>
       <p:sp>
         <p:nvSpPr>
-          <p:cNvPr id="39" name="Shape 37"/>
-          <p:cNvSpPr/>
-          <p:nvPr/>
-        </p:nvSpPr>
-        <p:spPr>
-          <a:xfrm>
-            <a:off x="2023872" y="4169664"/>
-            <a:ext cx="685800" cy="475488"/>
+          <p:cNvPr id="42" name="Shape 40"/>
+          <p:cNvSpPr/>
+          <p:nvPr/>
+        </p:nvSpPr>
+        <p:spPr>
+          <a:xfrm>
+            <a:off x="1951330" y="4169664"/>
+            <a:ext cx="676656" cy="475488"/>
           </a:xfrm>
           <a:prstGeom prst="rect">
             <a:avLst>
@@ -34078,14 +34765,14 @@
       </p:sp>
       <p:sp>
         <p:nvSpPr>
-          <p:cNvPr id="40" name="Text 38"/>
-          <p:cNvSpPr/>
-          <p:nvPr/>
-        </p:nvSpPr>
-        <p:spPr>
-          <a:xfrm>
-            <a:off x="2023872" y="4169664"/>
-            <a:ext cx="685800" cy="475488"/>
+          <p:cNvPr id="43" name="Text 41"/>
+          <p:cNvSpPr/>
+          <p:nvPr/>
+        </p:nvSpPr>
+        <p:spPr>
+          <a:xfrm>
+            <a:off x="1951330" y="4169664"/>
+            <a:ext cx="676656" cy="475488"/>
           </a:xfrm>
           <a:prstGeom prst="rect">
             <a:avLst/>
@@ -34117,14 +34804,14 @@
       </p:sp>
       <p:sp>
         <p:nvSpPr>
-          <p:cNvPr id="41" name="Shape 39"/>
-          <p:cNvSpPr/>
-          <p:nvPr/>
-        </p:nvSpPr>
-        <p:spPr>
-          <a:xfrm>
-            <a:off x="2831592" y="4169664"/>
-            <a:ext cx="685800" cy="475488"/>
+          <p:cNvPr id="44" name="Shape 42"/>
+          <p:cNvSpPr/>
+          <p:nvPr/>
+        </p:nvSpPr>
+        <p:spPr>
+          <a:xfrm>
+            <a:off x="2677363" y="4169664"/>
+            <a:ext cx="676656" cy="475488"/>
           </a:xfrm>
           <a:prstGeom prst="rect">
             <a:avLst>
@@ -34144,14 +34831,14 @@
       </p:sp>
       <p:sp>
         <p:nvSpPr>
-          <p:cNvPr id="42" name="Text 40"/>
-          <p:cNvSpPr/>
-          <p:nvPr/>
-        </p:nvSpPr>
-        <p:spPr>
-          <a:xfrm>
-            <a:off x="2831592" y="4169664"/>
-            <a:ext cx="685800" cy="475488"/>
+          <p:cNvPr id="45" name="Text 43"/>
+          <p:cNvSpPr/>
+          <p:nvPr/>
+        </p:nvSpPr>
+        <p:spPr>
+          <a:xfrm>
+            <a:off x="2677363" y="4169664"/>
+            <a:ext cx="676656" cy="475488"/>
           </a:xfrm>
           <a:prstGeom prst="rect">
             <a:avLst/>
@@ -34175,7 +34862,7 @@
                 <a:ea typeface="Trebuchet MS" pitchFamily="34" charset="-122"/>
                 <a:cs typeface="Trebuchet MS" pitchFamily="34" charset="-120"/>
               </a:rPr>
-              <a:t>e</a:t>
+              <a:t>a</a:t>
             </a:r>
             <a:endParaRPr lang="en-US" sz="900" dirty="0"/>
           </a:p>
@@ -34183,14 +34870,14 @@
       </p:sp>
       <p:sp>
         <p:nvSpPr>
-          <p:cNvPr id="43" name="Shape 41"/>
-          <p:cNvSpPr/>
-          <p:nvPr/>
-        </p:nvSpPr>
-        <p:spPr>
-          <a:xfrm>
-            <a:off x="3639312" y="4169664"/>
-            <a:ext cx="685800" cy="475488"/>
+          <p:cNvPr id="46" name="Shape 44"/>
+          <p:cNvSpPr/>
+          <p:nvPr/>
+        </p:nvSpPr>
+        <p:spPr>
+          <a:xfrm>
+            <a:off x="3403397" y="4169664"/>
+            <a:ext cx="676656" cy="475488"/>
           </a:xfrm>
           <a:prstGeom prst="rect">
             <a:avLst>
@@ -34210,14 +34897,14 @@
       </p:sp>
       <p:sp>
         <p:nvSpPr>
-          <p:cNvPr id="44" name="Text 42"/>
-          <p:cNvSpPr/>
-          <p:nvPr/>
-        </p:nvSpPr>
-        <p:spPr>
-          <a:xfrm>
-            <a:off x="3639312" y="4169664"/>
-            <a:ext cx="685800" cy="475488"/>
+          <p:cNvPr id="47" name="Text 45"/>
+          <p:cNvSpPr/>
+          <p:nvPr/>
+        </p:nvSpPr>
+        <p:spPr>
+          <a:xfrm>
+            <a:off x="3403397" y="4169664"/>
+            <a:ext cx="676656" cy="475488"/>
           </a:xfrm>
           <a:prstGeom prst="rect">
             <a:avLst/>
@@ -34249,14 +34936,14 @@
       </p:sp>
       <p:sp>
         <p:nvSpPr>
-          <p:cNvPr id="45" name="Shape 43"/>
-          <p:cNvSpPr/>
-          <p:nvPr/>
-        </p:nvSpPr>
-        <p:spPr>
-          <a:xfrm>
-            <a:off x="4447032" y="4169664"/>
-            <a:ext cx="685800" cy="475488"/>
+          <p:cNvPr id="48" name="Shape 46"/>
+          <p:cNvSpPr/>
+          <p:nvPr/>
+        </p:nvSpPr>
+        <p:spPr>
+          <a:xfrm>
+            <a:off x="4129430" y="4169664"/>
+            <a:ext cx="676656" cy="475488"/>
           </a:xfrm>
           <a:prstGeom prst="rect">
             <a:avLst>
@@ -34276,14 +34963,14 @@
       </p:sp>
       <p:sp>
         <p:nvSpPr>
-          <p:cNvPr id="46" name="Text 44"/>
-          <p:cNvSpPr/>
-          <p:nvPr/>
-        </p:nvSpPr>
-        <p:spPr>
-          <a:xfrm>
-            <a:off x="4447032" y="4169664"/>
-            <a:ext cx="685800" cy="475488"/>
+          <p:cNvPr id="49" name="Text 47"/>
+          <p:cNvSpPr/>
+          <p:nvPr/>
+        </p:nvSpPr>
+        <p:spPr>
+          <a:xfrm>
+            <a:off x="4129430" y="4169664"/>
+            <a:ext cx="676656" cy="475488"/>
           </a:xfrm>
           <a:prstGeom prst="rect">
             <a:avLst/>
@@ -34307,7 +34994,7 @@
                 <a:ea typeface="Trebuchet MS" pitchFamily="34" charset="-122"/>
                 <a:cs typeface="Trebuchet MS" pitchFamily="34" charset="-120"/>
               </a:rPr>
-              <a:t>i</a:t>
+              <a:t>a</a:t>
             </a:r>
             <a:endParaRPr lang="en-US" sz="900" dirty="0"/>
           </a:p>
@@ -34315,14 +35002,14 @@
       </p:sp>
       <p:sp>
         <p:nvSpPr>
-          <p:cNvPr id="47" name="Shape 45"/>
-          <p:cNvSpPr/>
-          <p:nvPr/>
-        </p:nvSpPr>
-        <p:spPr>
-          <a:xfrm>
-            <a:off x="5254752" y="4169664"/>
-            <a:ext cx="685800" cy="475488"/>
+          <p:cNvPr id="50" name="Shape 48"/>
+          <p:cNvSpPr/>
+          <p:nvPr/>
+        </p:nvSpPr>
+        <p:spPr>
+          <a:xfrm>
+            <a:off x="4855464" y="4169664"/>
+            <a:ext cx="676656" cy="475488"/>
           </a:xfrm>
           <a:prstGeom prst="rect">
             <a:avLst>
@@ -34342,14 +35029,14 @@
       </p:sp>
       <p:sp>
         <p:nvSpPr>
-          <p:cNvPr id="48" name="Text 46"/>
-          <p:cNvSpPr/>
-          <p:nvPr/>
-        </p:nvSpPr>
-        <p:spPr>
-          <a:xfrm>
-            <a:off x="5254752" y="4169664"/>
-            <a:ext cx="685800" cy="475488"/>
+          <p:cNvPr id="51" name="Text 49"/>
+          <p:cNvSpPr/>
+          <p:nvPr/>
+        </p:nvSpPr>
+        <p:spPr>
+          <a:xfrm>
+            <a:off x="4855464" y="4169664"/>
+            <a:ext cx="676656" cy="475488"/>
           </a:xfrm>
           <a:prstGeom prst="rect">
             <a:avLst/>
@@ -34381,14 +35068,14 @@
       </p:sp>
       <p:sp>
         <p:nvSpPr>
-          <p:cNvPr id="49" name="Shape 47"/>
-          <p:cNvSpPr/>
-          <p:nvPr/>
-        </p:nvSpPr>
-        <p:spPr>
-          <a:xfrm>
-            <a:off x="6062472" y="4169664"/>
-            <a:ext cx="685800" cy="475488"/>
+          <p:cNvPr id="52" name="Shape 50"/>
+          <p:cNvSpPr/>
+          <p:nvPr/>
+        </p:nvSpPr>
+        <p:spPr>
+          <a:xfrm>
+            <a:off x="5581498" y="4169664"/>
+            <a:ext cx="676656" cy="475488"/>
           </a:xfrm>
           <a:prstGeom prst="rect">
             <a:avLst>
@@ -34408,14 +35095,14 @@
       </p:sp>
       <p:sp>
         <p:nvSpPr>
-          <p:cNvPr id="50" name="Text 48"/>
-          <p:cNvSpPr/>
-          <p:nvPr/>
-        </p:nvSpPr>
-        <p:spPr>
-          <a:xfrm>
-            <a:off x="6062472" y="4169664"/>
-            <a:ext cx="685800" cy="475488"/>
+          <p:cNvPr id="53" name="Text 51"/>
+          <p:cNvSpPr/>
+          <p:nvPr/>
+        </p:nvSpPr>
+        <p:spPr>
+          <a:xfrm>
+            <a:off x="5581498" y="4169664"/>
+            <a:ext cx="676656" cy="475488"/>
           </a:xfrm>
           <a:prstGeom prst="rect">
             <a:avLst/>
@@ -34447,14 +35134,14 @@
       </p:sp>
       <p:sp>
         <p:nvSpPr>
-          <p:cNvPr id="51" name="Shape 49"/>
-          <p:cNvSpPr/>
-          <p:nvPr/>
-        </p:nvSpPr>
-        <p:spPr>
-          <a:xfrm>
-            <a:off x="6870192" y="4169664"/>
-            <a:ext cx="685800" cy="475488"/>
+          <p:cNvPr id="54" name="Shape 52"/>
+          <p:cNvSpPr/>
+          <p:nvPr/>
+        </p:nvSpPr>
+        <p:spPr>
+          <a:xfrm>
+            <a:off x="6307531" y="4169664"/>
+            <a:ext cx="676656" cy="475488"/>
           </a:xfrm>
           <a:prstGeom prst="rect">
             <a:avLst>
@@ -34474,14 +35161,14 @@
       </p:sp>
       <p:sp>
         <p:nvSpPr>
-          <p:cNvPr id="52" name="Text 50"/>
-          <p:cNvSpPr/>
-          <p:nvPr/>
-        </p:nvSpPr>
-        <p:spPr>
-          <a:xfrm>
-            <a:off x="6870192" y="4169664"/>
-            <a:ext cx="685800" cy="475488"/>
+          <p:cNvPr id="55" name="Text 53"/>
+          <p:cNvSpPr/>
+          <p:nvPr/>
+        </p:nvSpPr>
+        <p:spPr>
+          <a:xfrm>
+            <a:off x="6307531" y="4169664"/>
+            <a:ext cx="676656" cy="475488"/>
           </a:xfrm>
           <a:prstGeom prst="rect">
             <a:avLst/>
@@ -34513,14 +35200,14 @@
       </p:sp>
       <p:sp>
         <p:nvSpPr>
-          <p:cNvPr id="53" name="Shape 51"/>
-          <p:cNvSpPr/>
-          <p:nvPr/>
-        </p:nvSpPr>
-        <p:spPr>
-          <a:xfrm>
-            <a:off x="7677912" y="4169664"/>
-            <a:ext cx="685800" cy="475488"/>
+          <p:cNvPr id="56" name="Shape 54"/>
+          <p:cNvSpPr/>
+          <p:nvPr/>
+        </p:nvSpPr>
+        <p:spPr>
+          <a:xfrm>
+            <a:off x="7033565" y="4169664"/>
+            <a:ext cx="676656" cy="475488"/>
           </a:xfrm>
           <a:prstGeom prst="rect">
             <a:avLst>
@@ -34540,14 +35227,14 @@
       </p:sp>
       <p:sp>
         <p:nvSpPr>
-          <p:cNvPr id="54" name="Text 52"/>
-          <p:cNvSpPr/>
-          <p:nvPr/>
-        </p:nvSpPr>
-        <p:spPr>
-          <a:xfrm>
-            <a:off x="7677912" y="4169664"/>
-            <a:ext cx="685800" cy="475488"/>
+          <p:cNvPr id="57" name="Text 55"/>
+          <p:cNvSpPr/>
+          <p:nvPr/>
+        </p:nvSpPr>
+        <p:spPr>
+          <a:xfrm>
+            <a:off x="7033565" y="4169664"/>
+            <a:ext cx="676656" cy="475488"/>
           </a:xfrm>
           <a:prstGeom prst="rect">
             <a:avLst/>
@@ -34572,6 +35259,72 @@
                 <a:cs typeface="Trebuchet MS" pitchFamily="34" charset="-120"/>
               </a:rPr>
               <a:t>er</a:t>
+            </a:r>
+            <a:endParaRPr lang="en-US" sz="900" dirty="0"/>
+          </a:p>
+        </p:txBody>
+      </p:sp>
+      <p:sp>
+        <p:nvSpPr>
+          <p:cNvPr id="58" name="Shape 56"/>
+          <p:cNvSpPr/>
+          <p:nvPr/>
+        </p:nvSpPr>
+        <p:spPr>
+          <a:xfrm>
+            <a:off x="7759598" y="4169664"/>
+            <a:ext cx="676656" cy="475488"/>
+          </a:xfrm>
+          <a:prstGeom prst="rect">
+            <a:avLst>
+              <a:gd name="adj" fmla="val 7692"/>
+            </a:avLst>
+          </a:prstGeom>
+          <a:solidFill>
+            <a:srgbClr val="FFFFFF"/>
+          </a:solidFill>
+          <a:ln w="12700">
+            <a:solidFill>
+              <a:srgbClr val="DB2777"/>
+            </a:solidFill>
+            <a:prstDash val="solid"/>
+          </a:ln>
+        </p:spPr>
+      </p:sp>
+      <p:sp>
+        <p:nvSpPr>
+          <p:cNvPr id="59" name="Text 57"/>
+          <p:cNvSpPr/>
+          <p:nvPr/>
+        </p:nvSpPr>
+        <p:spPr>
+          <a:xfrm>
+            <a:off x="7759598" y="4169664"/>
+            <a:ext cx="676656" cy="475488"/>
+          </a:xfrm>
+          <a:prstGeom prst="rect">
+            <a:avLst/>
+          </a:prstGeom>
+          <a:noFill/>
+          <a:ln/>
+        </p:spPr>
+        <p:txBody>
+          <a:bodyPr wrap="square" lIns="0" tIns="0" rIns="0" bIns="0" rtlCol="0" anchor="ctr"/>
+          <a:lstStyle/>
+          <a:p>
+            <a:pPr algn="ctr" indent="0" marL="0">
+              <a:buNone/>
+            </a:pPr>
+            <a:r>
+              <a:rPr lang="en-US" sz="900" b="1" dirty="0">
+                <a:solidFill>
+                  <a:srgbClr val="9D174D"/>
+                </a:solidFill>
+                <a:latin typeface="Trebuchet MS" pitchFamily="34" charset="0"/>
+                <a:ea typeface="Trebuchet MS" pitchFamily="34" charset="-122"/>
+                <a:cs typeface="Trebuchet MS" pitchFamily="34" charset="-120"/>
+              </a:rPr>
+              <a:t>s</a:t>
             </a:r>
             <a:endParaRPr lang="en-US" sz="900" dirty="0"/>
           </a:p>
@@ -34863,7 +35616,7 @@
                 <a:ea typeface="Calibri" pitchFamily="34" charset="-122"/>
                 <a:cs typeface="Calibri" pitchFamily="34" charset="-120"/>
               </a:rPr>
-              <a:t>Word Labs  •  wordlabs.app  •  Root: 'meter' = measure or measuring instrument</a:t>
+              <a:t>Word Labs  •  wordlabs.app  •  Root: 'meter' = measure</a:t>
             </a:r>
             <a:endParaRPr lang="en-US" sz="800" dirty="0"/>
           </a:p>
@@ -36032,7 +36785,7 @@
                 <a:ea typeface="Calibri" pitchFamily="34" charset="-122"/>
                 <a:cs typeface="Calibri" pitchFamily="34" charset="-120"/>
               </a:rPr>
-              <a:t>Word Labs  •  wordlabs.app  •  Root: 'meter' = measure or measuring instrument</a:t>
+              <a:t>Word Labs  •  wordlabs.app  •  Root: 'meter' = measure</a:t>
             </a:r>
             <a:endParaRPr lang="en-US" sz="800" dirty="0"/>
           </a:p>
@@ -36333,7 +37086,7 @@
                 <a:ea typeface="Trebuchet MS" pitchFamily="34" charset="-122"/>
                 <a:cs typeface="Trebuchet MS" pitchFamily="34" charset="-120"/>
               </a:rPr>
-              <a:t>thermo-</a:t>
+              <a:t>chrono-</a:t>
             </a:r>
             <a:endParaRPr lang="en-US" sz="1300" dirty="0"/>
           </a:p>
@@ -36461,7 +37214,7 @@
                 <a:ea typeface="Trebuchet MS" pitchFamily="34" charset="-122"/>
                 <a:cs typeface="Trebuchet MS" pitchFamily="34" charset="-120"/>
               </a:rPr>
-              <a:t>-ing</a:t>
+              <a:t>-s</a:t>
             </a:r>
             <a:endParaRPr lang="en-US" sz="1300" dirty="0"/>
           </a:p>
@@ -36525,7 +37278,7 @@
                 <a:ea typeface="Trebuchet MS" pitchFamily="34" charset="-122"/>
                 <a:cs typeface="Trebuchet MS" pitchFamily="34" charset="-120"/>
               </a:rPr>
-              <a:t>baro-</a:t>
+              <a:t>dia-</a:t>
             </a:r>
             <a:endParaRPr lang="en-US" sz="1300" dirty="0"/>
           </a:p>
@@ -36678,7 +37431,7 @@
                 <a:ea typeface="Trebuchet MS" pitchFamily="34" charset="-122"/>
                 <a:cs typeface="Trebuchet MS" pitchFamily="34" charset="-120"/>
               </a:rPr>
-              <a:t>kilo-</a:t>
+              <a:t>para-</a:t>
             </a:r>
             <a:endParaRPr lang="en-US" sz="1300" dirty="0"/>
           </a:p>
@@ -36767,7 +37520,7 @@
                 <a:ea typeface="Trebuchet MS" pitchFamily="34" charset="-122"/>
                 <a:cs typeface="Trebuchet MS" pitchFamily="34" charset="-120"/>
               </a:rPr>
-              <a:t>-s</a:t>
+              <a:t>-ing</a:t>
             </a:r>
             <a:endParaRPr lang="en-US" sz="1300" dirty="0"/>
           </a:p>
@@ -36831,7 +37584,7 @@
                 <a:ea typeface="Trebuchet MS" pitchFamily="34" charset="-122"/>
                 <a:cs typeface="Trebuchet MS" pitchFamily="34" charset="-120"/>
               </a:rPr>
-              <a:t>centi-</a:t>
+              <a:t>peri-</a:t>
             </a:r>
             <a:endParaRPr lang="en-US" sz="1300" dirty="0"/>
           </a:p>
@@ -36877,7 +37630,7 @@
             <a:avLst/>
           </a:prstGeom>
           <a:solidFill>
-            <a:srgbClr val="FCE7F3"/>
+            <a:srgbClr val="F1F5F9"/>
           </a:solidFill>
           <a:ln w="12700">
             <a:solidFill>
@@ -36889,14 +37642,39 @@
       </p:sp>
       <p:sp>
         <p:nvSpPr>
-          <p:cNvPr id="37" name="Text 35"/>
-          <p:cNvSpPr/>
-          <p:nvPr/>
-        </p:nvSpPr>
-        <p:spPr>
-          <a:xfrm>
-            <a:off x="5943600" y="2825496"/>
-            <a:ext cx="2834640" cy="402336"/>
+          <p:cNvPr id="37" name="Shape 35"/>
+          <p:cNvSpPr/>
+          <p:nvPr/>
+        </p:nvSpPr>
+        <p:spPr>
+          <a:xfrm>
+            <a:off x="365760" y="3246120"/>
+            <a:ext cx="2468880" cy="402336"/>
+          </a:xfrm>
+          <a:prstGeom prst="rect">
+            <a:avLst/>
+          </a:prstGeom>
+          <a:solidFill>
+            <a:srgbClr val="DDD6FE"/>
+          </a:solidFill>
+          <a:ln w="12700">
+            <a:solidFill>
+              <a:srgbClr val="E2E8F0"/>
+            </a:solidFill>
+            <a:prstDash val="solid"/>
+          </a:ln>
+        </p:spPr>
+      </p:sp>
+      <p:sp>
+        <p:nvSpPr>
+          <p:cNvPr id="38" name="Text 36"/>
+          <p:cNvSpPr/>
+          <p:nvPr/>
+        </p:nvSpPr>
+        <p:spPr>
+          <a:xfrm>
+            <a:off x="365760" y="3246120"/>
+            <a:ext cx="2468880" cy="402336"/>
           </a:xfrm>
           <a:prstGeom prst="rect">
             <a:avLst/>
@@ -36914,13 +37692,13 @@
             <a:r>
               <a:rPr lang="en-US" sz="1300" b="1" dirty="0">
                 <a:solidFill>
-                  <a:srgbClr val="9D174D"/>
+                  <a:srgbClr val="4C1D95"/>
                 </a:solidFill>
                 <a:latin typeface="Trebuchet MS" pitchFamily="34" charset="0"/>
                 <a:ea typeface="Trebuchet MS" pitchFamily="34" charset="-122"/>
                 <a:cs typeface="Trebuchet MS" pitchFamily="34" charset="-120"/>
               </a:rPr>
-              <a:t>-er</a:t>
+              <a:t>thermo-</a:t>
             </a:r>
             <a:endParaRPr lang="en-US" sz="1300" dirty="0"/>
           </a:p>
@@ -36928,20 +37706,20 @@
       </p:sp>
       <p:sp>
         <p:nvSpPr>
-          <p:cNvPr id="38" name="Shape 36"/>
-          <p:cNvSpPr/>
-          <p:nvPr/>
-        </p:nvSpPr>
-        <p:spPr>
-          <a:xfrm>
-            <a:off x="365760" y="3246120"/>
-            <a:ext cx="2468880" cy="402336"/>
-          </a:xfrm>
-          <a:prstGeom prst="rect">
-            <a:avLst/>
-          </a:prstGeom>
-          <a:solidFill>
-            <a:srgbClr val="DDD6FE"/>
+          <p:cNvPr id="39" name="Shape 37"/>
+          <p:cNvSpPr/>
+          <p:nvPr/>
+        </p:nvSpPr>
+        <p:spPr>
+          <a:xfrm>
+            <a:off x="2971800" y="3246120"/>
+            <a:ext cx="2834640" cy="402336"/>
+          </a:xfrm>
+          <a:prstGeom prst="rect">
+            <a:avLst/>
+          </a:prstGeom>
+          <a:solidFill>
+            <a:srgbClr val="F8FAFC"/>
           </a:solidFill>
           <a:ln w="12700">
             <a:solidFill>
@@ -36953,166 +37731,195 @@
       </p:sp>
       <p:sp>
         <p:nvSpPr>
-          <p:cNvPr id="39" name="Text 37"/>
-          <p:cNvSpPr/>
-          <p:nvPr/>
-        </p:nvSpPr>
-        <p:spPr>
-          <a:xfrm>
-            <a:off x="365760" y="3246120"/>
-            <a:ext cx="2468880" cy="402336"/>
-          </a:xfrm>
-          <a:prstGeom prst="rect">
-            <a:avLst/>
-          </a:prstGeom>
-          <a:noFill/>
-          <a:ln/>
-        </p:spPr>
-        <p:txBody>
-          <a:bodyPr wrap="square" lIns="0" tIns="0" rIns="0" bIns="0" rtlCol="0" anchor="ctr"/>
-          <a:lstStyle/>
-          <a:p>
-            <a:pPr algn="ctr" indent="0" marL="0">
-              <a:buNone/>
-            </a:pPr>
-            <a:r>
-              <a:rPr lang="en-US" sz="1300" b="1" dirty="0">
-                <a:solidFill>
-                  <a:srgbClr val="4C1D95"/>
+          <p:cNvPr id="40" name="Shape 38"/>
+          <p:cNvSpPr/>
+          <p:nvPr/>
+        </p:nvSpPr>
+        <p:spPr>
+          <a:xfrm>
+            <a:off x="5943600" y="3246120"/>
+            <a:ext cx="2834640" cy="402336"/>
+          </a:xfrm>
+          <a:prstGeom prst="rect">
+            <a:avLst/>
+          </a:prstGeom>
+          <a:solidFill>
+            <a:srgbClr val="F8FAFC"/>
+          </a:solidFill>
+          <a:ln w="12700">
+            <a:solidFill>
+              <a:srgbClr val="E2E8F0"/>
+            </a:solidFill>
+            <a:prstDash val="solid"/>
+          </a:ln>
+        </p:spPr>
+      </p:sp>
+      <p:sp>
+        <p:nvSpPr>
+          <p:cNvPr id="41" name="Text 39"/>
+          <p:cNvSpPr/>
+          <p:nvPr/>
+        </p:nvSpPr>
+        <p:spPr>
+          <a:xfrm>
+            <a:off x="365760" y="3611880"/>
+            <a:ext cx="1828800" cy="347472"/>
+          </a:xfrm>
+          <a:prstGeom prst="rect">
+            <a:avLst/>
+          </a:prstGeom>
+          <a:noFill/>
+          <a:ln/>
+        </p:spPr>
+        <p:txBody>
+          <a:bodyPr wrap="square" lIns="0" tIns="0" rIns="0" bIns="0" rtlCol="0" anchor="ctr"/>
+          <a:lstStyle/>
+          <a:p>
+            <a:pPr algn="l" indent="0" marL="0">
+              <a:buNone/>
+            </a:pPr>
+            <a:r>
+              <a:rPr lang="en-US" sz="1200" b="1" dirty="0">
+                <a:solidFill>
+                  <a:srgbClr val="0F172A"/>
                 </a:solidFill>
                 <a:latin typeface="Trebuchet MS" pitchFamily="34" charset="0"/>
                 <a:ea typeface="Trebuchet MS" pitchFamily="34" charset="-122"/>
                 <a:cs typeface="Trebuchet MS" pitchFamily="34" charset="-120"/>
               </a:rPr>
-              <a:t>milli-</a:t>
-            </a:r>
-            <a:endParaRPr lang="en-US" sz="1300" dirty="0"/>
-          </a:p>
-        </p:txBody>
-      </p:sp>
-      <p:sp>
-        <p:nvSpPr>
-          <p:cNvPr id="40" name="Shape 38"/>
-          <p:cNvSpPr/>
-          <p:nvPr/>
-        </p:nvSpPr>
-        <p:spPr>
-          <a:xfrm>
-            <a:off x="2971800" y="3246120"/>
-            <a:ext cx="2834640" cy="402336"/>
-          </a:xfrm>
-          <a:prstGeom prst="rect">
-            <a:avLst/>
-          </a:prstGeom>
-          <a:solidFill>
-            <a:srgbClr val="F8FAFC"/>
-          </a:solidFill>
-          <a:ln w="12700">
-            <a:solidFill>
-              <a:srgbClr val="E2E8F0"/>
-            </a:solidFill>
-            <a:prstDash val="solid"/>
-          </a:ln>
-        </p:spPr>
-      </p:sp>
-      <p:sp>
-        <p:nvSpPr>
-          <p:cNvPr id="41" name="Shape 39"/>
-          <p:cNvSpPr/>
-          <p:nvPr/>
-        </p:nvSpPr>
-        <p:spPr>
-          <a:xfrm>
-            <a:off x="5943600" y="3246120"/>
-            <a:ext cx="2834640" cy="402336"/>
-          </a:xfrm>
-          <a:prstGeom prst="rect">
-            <a:avLst/>
-          </a:prstGeom>
-          <a:solidFill>
-            <a:srgbClr val="FCE7F3"/>
-          </a:solidFill>
-          <a:ln w="12700">
-            <a:solidFill>
-              <a:srgbClr val="E2E8F0"/>
-            </a:solidFill>
-            <a:prstDash val="solid"/>
-          </a:ln>
-        </p:spPr>
-      </p:sp>
-      <p:sp>
-        <p:nvSpPr>
-          <p:cNvPr id="42" name="Text 40"/>
-          <p:cNvSpPr/>
-          <p:nvPr/>
-        </p:nvSpPr>
-        <p:spPr>
-          <a:xfrm>
-            <a:off x="5943600" y="3246120"/>
-            <a:ext cx="2834640" cy="402336"/>
-          </a:xfrm>
-          <a:prstGeom prst="rect">
-            <a:avLst/>
-          </a:prstGeom>
-          <a:noFill/>
-          <a:ln/>
-        </p:spPr>
-        <p:txBody>
-          <a:bodyPr wrap="square" lIns="0" tIns="0" rIns="0" bIns="0" rtlCol="0" anchor="ctr"/>
-          <a:lstStyle/>
-          <a:p>
-            <a:pPr algn="ctr" indent="0" marL="0">
-              <a:buNone/>
-            </a:pPr>
-            <a:r>
-              <a:rPr lang="en-US" sz="1300" b="1" dirty="0">
-                <a:solidFill>
-                  <a:srgbClr val="9D174D"/>
+              <a:t>Sample words:</a:t>
+            </a:r>
+            <a:endParaRPr lang="en-US" sz="1200" dirty="0"/>
+          </a:p>
+        </p:txBody>
+      </p:sp>
+      <p:sp>
+        <p:nvSpPr>
+          <p:cNvPr id="42" name="Shape 40"/>
+          <p:cNvSpPr/>
+          <p:nvPr/>
+        </p:nvSpPr>
+        <p:spPr>
+          <a:xfrm>
+            <a:off x="365760" y="4023360"/>
+            <a:ext cx="2011680" cy="402336"/>
+          </a:xfrm>
+          <a:prstGeom prst="rect">
+            <a:avLst>
+              <a:gd name="adj" fmla="val 13636"/>
+            </a:avLst>
+          </a:prstGeom>
+          <a:solidFill>
+            <a:srgbClr val="EEF2FF"/>
+          </a:solidFill>
+          <a:ln w="12700">
+            <a:solidFill>
+              <a:srgbClr val="6366F1"/>
+            </a:solidFill>
+            <a:prstDash val="solid"/>
+          </a:ln>
+        </p:spPr>
+      </p:sp>
+      <p:sp>
+        <p:nvSpPr>
+          <p:cNvPr id="43" name="Text 41"/>
+          <p:cNvSpPr/>
+          <p:nvPr/>
+        </p:nvSpPr>
+        <p:spPr>
+          <a:xfrm>
+            <a:off x="365760" y="4023360"/>
+            <a:ext cx="2011680" cy="402336"/>
+          </a:xfrm>
+          <a:prstGeom prst="rect">
+            <a:avLst/>
+          </a:prstGeom>
+          <a:noFill/>
+          <a:ln/>
+        </p:spPr>
+        <p:txBody>
+          <a:bodyPr wrap="square" lIns="0" tIns="0" rIns="0" bIns="0" rtlCol="0" anchor="ctr"/>
+          <a:lstStyle/>
+          <a:p>
+            <a:pPr algn="ctr" indent="0" marL="0">
+              <a:buNone/>
+            </a:pPr>
+            <a:r>
+              <a:rPr lang="en-US" sz="1200" b="1" dirty="0">
+                <a:solidFill>
+                  <a:srgbClr val="4338CA"/>
                 </a:solidFill>
                 <a:latin typeface="Trebuchet MS" pitchFamily="34" charset="0"/>
                 <a:ea typeface="Trebuchet MS" pitchFamily="34" charset="-122"/>
                 <a:cs typeface="Trebuchet MS" pitchFamily="34" charset="-120"/>
               </a:rPr>
-              <a:t>-ic</a:t>
-            </a:r>
-            <a:endParaRPr lang="en-US" sz="1300" dirty="0"/>
-          </a:p>
-        </p:txBody>
-      </p:sp>
-      <p:sp>
-        <p:nvSpPr>
-          <p:cNvPr id="43" name="Text 41"/>
-          <p:cNvSpPr/>
-          <p:nvPr/>
-        </p:nvSpPr>
-        <p:spPr>
-          <a:xfrm>
-            <a:off x="365760" y="3611880"/>
-            <a:ext cx="1828800" cy="347472"/>
-          </a:xfrm>
-          <a:prstGeom prst="rect">
-            <a:avLst/>
-          </a:prstGeom>
-          <a:noFill/>
-          <a:ln/>
-        </p:spPr>
-        <p:txBody>
-          <a:bodyPr wrap="square" lIns="0" tIns="0" rIns="0" bIns="0" rtlCol="0" anchor="ctr"/>
-          <a:lstStyle/>
-          <a:p>
-            <a:pPr algn="l" indent="0" marL="0">
+              <a:t>meter</a:t>
+            </a:r>
+            <a:endParaRPr lang="en-US" sz="1200" dirty="0"/>
+          </a:p>
+        </p:txBody>
+      </p:sp>
+      <p:sp>
+        <p:nvSpPr>
+          <p:cNvPr id="44" name="Shape 42"/>
+          <p:cNvSpPr/>
+          <p:nvPr/>
+        </p:nvSpPr>
+        <p:spPr>
+          <a:xfrm>
+            <a:off x="2542032" y="4023360"/>
+            <a:ext cx="2011680" cy="402336"/>
+          </a:xfrm>
+          <a:prstGeom prst="rect">
+            <a:avLst>
+              <a:gd name="adj" fmla="val 13636"/>
+            </a:avLst>
+          </a:prstGeom>
+          <a:solidFill>
+            <a:srgbClr val="EEF2FF"/>
+          </a:solidFill>
+          <a:ln w="12700">
+            <a:solidFill>
+              <a:srgbClr val="6366F1"/>
+            </a:solidFill>
+            <a:prstDash val="solid"/>
+          </a:ln>
+        </p:spPr>
+      </p:sp>
+      <p:sp>
+        <p:nvSpPr>
+          <p:cNvPr id="45" name="Text 43"/>
+          <p:cNvSpPr/>
+          <p:nvPr/>
+        </p:nvSpPr>
+        <p:spPr>
+          <a:xfrm>
+            <a:off x="2542032" y="4023360"/>
+            <a:ext cx="2011680" cy="402336"/>
+          </a:xfrm>
+          <a:prstGeom prst="rect">
+            <a:avLst/>
+          </a:prstGeom>
+          <a:noFill/>
+          <a:ln/>
+        </p:spPr>
+        <p:txBody>
+          <a:bodyPr wrap="square" lIns="0" tIns="0" rIns="0" bIns="0" rtlCol="0" anchor="ctr"/>
+          <a:lstStyle/>
+          <a:p>
+            <a:pPr algn="ctr" indent="0" marL="0">
               <a:buNone/>
             </a:pPr>
             <a:r>
               <a:rPr lang="en-US" sz="1200" b="1" dirty="0">
                 <a:solidFill>
-                  <a:srgbClr val="0F172A"/>
+                  <a:srgbClr val="4338CA"/>
                 </a:solidFill>
                 <a:latin typeface="Trebuchet MS" pitchFamily="34" charset="0"/>
                 <a:ea typeface="Trebuchet MS" pitchFamily="34" charset="-122"/>
                 <a:cs typeface="Trebuchet MS" pitchFamily="34" charset="-120"/>
               </a:rPr>
-              <a:t>Sample words:</a:t>
+              <a:t>meters</a:t>
             </a:r>
             <a:endParaRPr lang="en-US" sz="1200" dirty="0"/>
           </a:p>
@@ -37120,13 +37927,13 @@
       </p:sp>
       <p:sp>
         <p:nvSpPr>
-          <p:cNvPr id="44" name="Shape 42"/>
-          <p:cNvSpPr/>
-          <p:nvPr/>
-        </p:nvSpPr>
-        <p:spPr>
-          <a:xfrm>
-            <a:off x="365760" y="4023360"/>
+          <p:cNvPr id="46" name="Shape 44"/>
+          <p:cNvSpPr/>
+          <p:nvPr/>
+        </p:nvSpPr>
+        <p:spPr>
+          <a:xfrm>
+            <a:off x="4718304" y="4023360"/>
             <a:ext cx="2011680" cy="402336"/>
           </a:xfrm>
           <a:prstGeom prst="rect">
@@ -37147,13 +37954,13 @@
       </p:sp>
       <p:sp>
         <p:nvSpPr>
-          <p:cNvPr id="45" name="Text 43"/>
-          <p:cNvSpPr/>
-          <p:nvPr/>
-        </p:nvSpPr>
-        <p:spPr>
-          <a:xfrm>
-            <a:off x="365760" y="4023360"/>
+          <p:cNvPr id="47" name="Text 45"/>
+          <p:cNvSpPr/>
+          <p:nvPr/>
+        </p:nvSpPr>
+        <p:spPr>
+          <a:xfrm>
+            <a:off x="4718304" y="4023360"/>
             <a:ext cx="2011680" cy="402336"/>
           </a:xfrm>
           <a:prstGeom prst="rect">
@@ -37178,7 +37985,7 @@
                 <a:ea typeface="Trebuchet MS" pitchFamily="34" charset="-122"/>
                 <a:cs typeface="Trebuchet MS" pitchFamily="34" charset="-120"/>
               </a:rPr>
-              <a:t>thermometer</a:t>
+              <a:t>metered</a:t>
             </a:r>
             <a:endParaRPr lang="en-US" sz="1200" dirty="0"/>
           </a:p>
@@ -37186,13 +37993,13 @@
       </p:sp>
       <p:sp>
         <p:nvSpPr>
-          <p:cNvPr id="46" name="Shape 44"/>
-          <p:cNvSpPr/>
-          <p:nvPr/>
-        </p:nvSpPr>
-        <p:spPr>
-          <a:xfrm>
-            <a:off x="2542032" y="4023360"/>
+          <p:cNvPr id="48" name="Shape 46"/>
+          <p:cNvSpPr/>
+          <p:nvPr/>
+        </p:nvSpPr>
+        <p:spPr>
+          <a:xfrm>
+            <a:off x="6894576" y="4023360"/>
             <a:ext cx="2011680" cy="402336"/>
           </a:xfrm>
           <a:prstGeom prst="rect">
@@ -37213,13 +38020,13 @@
       </p:sp>
       <p:sp>
         <p:nvSpPr>
-          <p:cNvPr id="47" name="Text 45"/>
-          <p:cNvSpPr/>
-          <p:nvPr/>
-        </p:nvSpPr>
-        <p:spPr>
-          <a:xfrm>
-            <a:off x="2542032" y="4023360"/>
+          <p:cNvPr id="49" name="Text 47"/>
+          <p:cNvSpPr/>
+          <p:nvPr/>
+        </p:nvSpPr>
+        <p:spPr>
+          <a:xfrm>
+            <a:off x="6894576" y="4023360"/>
             <a:ext cx="2011680" cy="402336"/>
           </a:xfrm>
           <a:prstGeom prst="rect">
@@ -37244,7 +38051,7 @@
                 <a:ea typeface="Trebuchet MS" pitchFamily="34" charset="-122"/>
                 <a:cs typeface="Trebuchet MS" pitchFamily="34" charset="-120"/>
               </a:rPr>
-              <a:t>barometer</a:t>
+              <a:t>metering</a:t>
             </a:r>
             <a:endParaRPr lang="en-US" sz="1200" dirty="0"/>
           </a:p>
@@ -37252,13 +38059,13 @@
       </p:sp>
       <p:sp>
         <p:nvSpPr>
-          <p:cNvPr id="48" name="Shape 46"/>
-          <p:cNvSpPr/>
-          <p:nvPr/>
-        </p:nvSpPr>
-        <p:spPr>
-          <a:xfrm>
-            <a:off x="4718304" y="4023360"/>
+          <p:cNvPr id="50" name="Shape 48"/>
+          <p:cNvSpPr/>
+          <p:nvPr/>
+        </p:nvSpPr>
+        <p:spPr>
+          <a:xfrm>
+            <a:off x="365760" y="4498848"/>
             <a:ext cx="2011680" cy="402336"/>
           </a:xfrm>
           <a:prstGeom prst="rect">
@@ -37279,13 +38086,13 @@
       </p:sp>
       <p:sp>
         <p:nvSpPr>
-          <p:cNvPr id="49" name="Text 47"/>
-          <p:cNvSpPr/>
-          <p:nvPr/>
-        </p:nvSpPr>
-        <p:spPr>
-          <a:xfrm>
-            <a:off x="4718304" y="4023360"/>
+          <p:cNvPr id="51" name="Text 49"/>
+          <p:cNvSpPr/>
+          <p:nvPr/>
+        </p:nvSpPr>
+        <p:spPr>
+          <a:xfrm>
+            <a:off x="365760" y="4498848"/>
             <a:ext cx="2011680" cy="402336"/>
           </a:xfrm>
           <a:prstGeom prst="rect">
@@ -37310,7 +38117,7 @@
                 <a:ea typeface="Trebuchet MS" pitchFamily="34" charset="-122"/>
                 <a:cs typeface="Trebuchet MS" pitchFamily="34" charset="-120"/>
               </a:rPr>
-              <a:t>kilometer</a:t>
+              <a:t>diameter</a:t>
             </a:r>
             <a:endParaRPr lang="en-US" sz="1200" dirty="0"/>
           </a:p>
@@ -37318,13 +38125,13 @@
       </p:sp>
       <p:sp>
         <p:nvSpPr>
-          <p:cNvPr id="50" name="Shape 48"/>
-          <p:cNvSpPr/>
-          <p:nvPr/>
-        </p:nvSpPr>
-        <p:spPr>
-          <a:xfrm>
-            <a:off x="6894576" y="4023360"/>
+          <p:cNvPr id="52" name="Shape 50"/>
+          <p:cNvSpPr/>
+          <p:nvPr/>
+        </p:nvSpPr>
+        <p:spPr>
+          <a:xfrm>
+            <a:off x="2542032" y="4498848"/>
             <a:ext cx="2011680" cy="402336"/>
           </a:xfrm>
           <a:prstGeom prst="rect">
@@ -37345,13 +38152,13 @@
       </p:sp>
       <p:sp>
         <p:nvSpPr>
-          <p:cNvPr id="51" name="Text 49"/>
-          <p:cNvSpPr/>
-          <p:nvPr/>
-        </p:nvSpPr>
-        <p:spPr>
-          <a:xfrm>
-            <a:off x="6894576" y="4023360"/>
+          <p:cNvPr id="53" name="Text 51"/>
+          <p:cNvSpPr/>
+          <p:nvPr/>
+        </p:nvSpPr>
+        <p:spPr>
+          <a:xfrm>
+            <a:off x="2542032" y="4498848"/>
             <a:ext cx="2011680" cy="402336"/>
           </a:xfrm>
           <a:prstGeom prst="rect">
@@ -37384,13 +38191,13 @@
       </p:sp>
       <p:sp>
         <p:nvSpPr>
-          <p:cNvPr id="52" name="Shape 50"/>
-          <p:cNvSpPr/>
-          <p:nvPr/>
-        </p:nvSpPr>
-        <p:spPr>
-          <a:xfrm>
-            <a:off x="365760" y="4498848"/>
+          <p:cNvPr id="54" name="Shape 52"/>
+          <p:cNvSpPr/>
+          <p:nvPr/>
+        </p:nvSpPr>
+        <p:spPr>
+          <a:xfrm>
+            <a:off x="4718304" y="4498848"/>
             <a:ext cx="2011680" cy="402336"/>
           </a:xfrm>
           <a:prstGeom prst="rect">
@@ -37411,13 +38218,13 @@
       </p:sp>
       <p:sp>
         <p:nvSpPr>
-          <p:cNvPr id="53" name="Text 51"/>
-          <p:cNvSpPr/>
-          <p:nvPr/>
-        </p:nvSpPr>
-        <p:spPr>
-          <a:xfrm>
-            <a:off x="365760" y="4498848"/>
+          <p:cNvPr id="55" name="Text 53"/>
+          <p:cNvSpPr/>
+          <p:nvPr/>
+        </p:nvSpPr>
+        <p:spPr>
+          <a:xfrm>
+            <a:off x="4718304" y="4498848"/>
             <a:ext cx="2011680" cy="402336"/>
           </a:xfrm>
           <a:prstGeom prst="rect">
@@ -37442,205 +38249,7 @@
                 <a:ea typeface="Trebuchet MS" pitchFamily="34" charset="-122"/>
                 <a:cs typeface="Trebuchet MS" pitchFamily="34" charset="-120"/>
               </a:rPr>
-              <a:t>speedometer</a:t>
-            </a:r>
-            <a:endParaRPr lang="en-US" sz="1200" dirty="0"/>
-          </a:p>
-        </p:txBody>
-      </p:sp>
-      <p:sp>
-        <p:nvSpPr>
-          <p:cNvPr id="54" name="Shape 52"/>
-          <p:cNvSpPr/>
-          <p:nvPr/>
-        </p:nvSpPr>
-        <p:spPr>
-          <a:xfrm>
-            <a:off x="2542032" y="4498848"/>
-            <a:ext cx="2011680" cy="402336"/>
-          </a:xfrm>
-          <a:prstGeom prst="rect">
-            <a:avLst>
-              <a:gd name="adj" fmla="val 13636"/>
-            </a:avLst>
-          </a:prstGeom>
-          <a:solidFill>
-            <a:srgbClr val="EEF2FF"/>
-          </a:solidFill>
-          <a:ln w="12700">
-            <a:solidFill>
-              <a:srgbClr val="6366F1"/>
-            </a:solidFill>
-            <a:prstDash val="solid"/>
-          </a:ln>
-        </p:spPr>
-      </p:sp>
-      <p:sp>
-        <p:nvSpPr>
-          <p:cNvPr id="55" name="Text 53"/>
-          <p:cNvSpPr/>
-          <p:nvPr/>
-        </p:nvSpPr>
-        <p:spPr>
-          <a:xfrm>
-            <a:off x="2542032" y="4498848"/>
-            <a:ext cx="2011680" cy="402336"/>
-          </a:xfrm>
-          <a:prstGeom prst="rect">
-            <a:avLst/>
-          </a:prstGeom>
-          <a:noFill/>
-          <a:ln/>
-        </p:spPr>
-        <p:txBody>
-          <a:bodyPr wrap="square" lIns="0" tIns="0" rIns="0" bIns="0" rtlCol="0" anchor="ctr"/>
-          <a:lstStyle/>
-          <a:p>
-            <a:pPr algn="ctr" indent="0" marL="0">
-              <a:buNone/>
-            </a:pPr>
-            <a:r>
-              <a:rPr lang="en-US" sz="1200" b="1" dirty="0">
-                <a:solidFill>
-                  <a:srgbClr val="4338CA"/>
-                </a:solidFill>
-                <a:latin typeface="Trebuchet MS" pitchFamily="34" charset="0"/>
-                <a:ea typeface="Trebuchet MS" pitchFamily="34" charset="-122"/>
-                <a:cs typeface="Trebuchet MS" pitchFamily="34" charset="-120"/>
-              </a:rPr>
-              <a:t>centimeter</a:t>
-            </a:r>
-            <a:endParaRPr lang="en-US" sz="1200" dirty="0"/>
-          </a:p>
-        </p:txBody>
-      </p:sp>
-      <p:sp>
-        <p:nvSpPr>
-          <p:cNvPr id="56" name="Shape 54"/>
-          <p:cNvSpPr/>
-          <p:nvPr/>
-        </p:nvSpPr>
-        <p:spPr>
-          <a:xfrm>
-            <a:off x="4718304" y="4498848"/>
-            <a:ext cx="2011680" cy="402336"/>
-          </a:xfrm>
-          <a:prstGeom prst="rect">
-            <a:avLst>
-              <a:gd name="adj" fmla="val 13636"/>
-            </a:avLst>
-          </a:prstGeom>
-          <a:solidFill>
-            <a:srgbClr val="EEF2FF"/>
-          </a:solidFill>
-          <a:ln w="12700">
-            <a:solidFill>
-              <a:srgbClr val="6366F1"/>
-            </a:solidFill>
-            <a:prstDash val="solid"/>
-          </a:ln>
-        </p:spPr>
-      </p:sp>
-      <p:sp>
-        <p:nvSpPr>
-          <p:cNvPr id="57" name="Text 55"/>
-          <p:cNvSpPr/>
-          <p:nvPr/>
-        </p:nvSpPr>
-        <p:spPr>
-          <a:xfrm>
-            <a:off x="4718304" y="4498848"/>
-            <a:ext cx="2011680" cy="402336"/>
-          </a:xfrm>
-          <a:prstGeom prst="rect">
-            <a:avLst/>
-          </a:prstGeom>
-          <a:noFill/>
-          <a:ln/>
-        </p:spPr>
-        <p:txBody>
-          <a:bodyPr wrap="square" lIns="0" tIns="0" rIns="0" bIns="0" rtlCol="0" anchor="ctr"/>
-          <a:lstStyle/>
-          <a:p>
-            <a:pPr algn="ctr" indent="0" marL="0">
-              <a:buNone/>
-            </a:pPr>
-            <a:r>
-              <a:rPr lang="en-US" sz="1200" b="1" dirty="0">
-                <a:solidFill>
-                  <a:srgbClr val="4338CA"/>
-                </a:solidFill>
-                <a:latin typeface="Trebuchet MS" pitchFamily="34" charset="0"/>
-                <a:ea typeface="Trebuchet MS" pitchFamily="34" charset="-122"/>
-                <a:cs typeface="Trebuchet MS" pitchFamily="34" charset="-120"/>
-              </a:rPr>
-              <a:t>diameter</a:t>
-            </a:r>
-            <a:endParaRPr lang="en-US" sz="1200" dirty="0"/>
-          </a:p>
-        </p:txBody>
-      </p:sp>
-      <p:sp>
-        <p:nvSpPr>
-          <p:cNvPr id="58" name="Shape 56"/>
-          <p:cNvSpPr/>
-          <p:nvPr/>
-        </p:nvSpPr>
-        <p:spPr>
-          <a:xfrm>
-            <a:off x="6894576" y="4498848"/>
-            <a:ext cx="2011680" cy="402336"/>
-          </a:xfrm>
-          <a:prstGeom prst="rect">
-            <a:avLst>
-              <a:gd name="adj" fmla="val 13636"/>
-            </a:avLst>
-          </a:prstGeom>
-          <a:solidFill>
-            <a:srgbClr val="EEF2FF"/>
-          </a:solidFill>
-          <a:ln w="12700">
-            <a:solidFill>
-              <a:srgbClr val="6366F1"/>
-            </a:solidFill>
-            <a:prstDash val="solid"/>
-          </a:ln>
-        </p:spPr>
-      </p:sp>
-      <p:sp>
-        <p:nvSpPr>
-          <p:cNvPr id="59" name="Text 57"/>
-          <p:cNvSpPr/>
-          <p:nvPr/>
-        </p:nvSpPr>
-        <p:spPr>
-          <a:xfrm>
-            <a:off x="6894576" y="4498848"/>
-            <a:ext cx="2011680" cy="402336"/>
-          </a:xfrm>
-          <a:prstGeom prst="rect">
-            <a:avLst/>
-          </a:prstGeom>
-          <a:noFill/>
-          <a:ln/>
-        </p:spPr>
-        <p:txBody>
-          <a:bodyPr wrap="square" lIns="0" tIns="0" rIns="0" bIns="0" rtlCol="0" anchor="ctr"/>
-          <a:lstStyle/>
-          <a:p>
-            <a:pPr algn="ctr" indent="0" marL="0">
-              <a:buNone/>
-            </a:pPr>
-            <a:r>
-              <a:rPr lang="en-US" sz="1200" b="1" dirty="0">
-                <a:solidFill>
-                  <a:srgbClr val="4338CA"/>
-                </a:solidFill>
-                <a:latin typeface="Trebuchet MS" pitchFamily="34" charset="0"/>
-                <a:ea typeface="Trebuchet MS" pitchFamily="34" charset="-122"/>
-                <a:cs typeface="Trebuchet MS" pitchFamily="34" charset="-120"/>
-              </a:rPr>
-              <a:t>altimeter</a:t>
+              <a:t>perimeters</a:t>
             </a:r>
             <a:endParaRPr lang="en-US" sz="1200" dirty="0"/>
           </a:p>
@@ -37932,7 +38541,7 @@
                 <a:ea typeface="Calibri" pitchFamily="34" charset="-122"/>
                 <a:cs typeface="Calibri" pitchFamily="34" charset="-120"/>
               </a:rPr>
-              <a:t>Word Labs  •  wordlabs.app  •  Root: 'meter' = measure or measuring instrument</a:t>
+              <a:t>Word Labs  •  wordlabs.app  •  Root: 'meter' = measure</a:t>
             </a:r>
             <a:endParaRPr lang="en-US" sz="800" dirty="0"/>
           </a:p>
@@ -38096,7 +38705,7 @@
                 <a:ea typeface="Calibri" pitchFamily="34" charset="-122"/>
                 <a:cs typeface="Calibri" pitchFamily="34" charset="-120"/>
               </a:rPr>
-              <a:t>The core part of a word carrying its basic meaning. For example, 'meter' means 'measure or measuring instrument'.</a:t>
+              <a:t>The core part of a word carrying its basic meaning. For example, 'meter' means 'measure'.</a:t>
             </a:r>
             <a:endParaRPr lang="en-US" sz="1350" dirty="0"/>
           </a:p>
@@ -38716,7 +39325,7 @@
                 <a:ea typeface="Calibri" pitchFamily="34" charset="-122"/>
                 <a:cs typeface="Calibri" pitchFamily="34" charset="-120"/>
               </a:rPr>
-              <a:t>Word Labs  •  wordlabs.app  •  Root: 'meter' = measure or measuring instrument</a:t>
+              <a:t>Word Labs  •  wordlabs.app  •  Root: 'meter' = measure</a:t>
             </a:r>
             <a:endParaRPr lang="en-US" sz="800" dirty="0"/>
           </a:p>
@@ -38828,7 +39437,7 @@
                 <a:ea typeface="Calibri" pitchFamily="34" charset="-122"/>
                 <a:cs typeface="Calibri" pitchFamily="34" charset="-120"/>
               </a:rPr>
-              <a:t>1.  A barometer is used to measure the distance between two cities.</a:t>
+              <a:t>1.  'meter' means 'a unit used to measure length'.</a:t>
             </a:r>
             <a:endParaRPr lang="en-US" sz="1300" dirty="0"/>
           </a:p>
@@ -38967,7 +39576,7 @@
                 <a:ea typeface="Calibri" pitchFamily="34" charset="-122"/>
                 <a:cs typeface="Calibri" pitchFamily="34" charset="-120"/>
               </a:rPr>
-              <a:t>2.  A thermometer is used to measure temperature.</a:t>
+              <a:t>2.  'meters' means 'small clocks that only show the date'.</a:t>
             </a:r>
             <a:endParaRPr lang="en-US" sz="1300" dirty="0"/>
           </a:p>
@@ -38990,11 +39599,11 @@
             </a:avLst>
           </a:prstGeom>
           <a:solidFill>
-            <a:srgbClr val="DCFCE7"/>
-          </a:solidFill>
-          <a:ln w="12700">
-            <a:solidFill>
-              <a:srgbClr val="16A34A"/>
+            <a:srgbClr val="FEE2E2"/>
+          </a:solidFill>
+          <a:ln w="12700">
+            <a:solidFill>
+              <a:srgbClr val="DC2626"/>
             </a:solidFill>
             <a:prstDash val="solid"/>
           </a:ln>
@@ -39027,13 +39636,13 @@
             <a:r>
               <a:rPr lang="en-US" sz="1100" b="1" dirty="0">
                 <a:solidFill>
-                  <a:srgbClr val="16A34A"/>
+                  <a:srgbClr val="DC2626"/>
                 </a:solidFill>
                 <a:latin typeface="Trebuchet MS" pitchFamily="34" charset="0"/>
                 <a:ea typeface="Trebuchet MS" pitchFamily="34" charset="-122"/>
                 <a:cs typeface="Trebuchet MS" pitchFamily="34" charset="-120"/>
               </a:rPr>
-              <a:t>TRUE</a:t>
+              <a:t>FALSE</a:t>
             </a:r>
             <a:endParaRPr lang="en-US" sz="1100" dirty="0"/>
           </a:p>
@@ -39106,7 +39715,7 @@
                 <a:ea typeface="Calibri" pitchFamily="34" charset="-122"/>
                 <a:cs typeface="Calibri" pitchFamily="34" charset="-120"/>
               </a:rPr>
-              <a:t>3.  The root 'meter' comes from a Latin word meaning 'to write'.</a:t>
+              <a:t>3.  'meter' means 'measure'.</a:t>
             </a:r>
             <a:endParaRPr lang="en-US" sz="1300" dirty="0"/>
           </a:p>
@@ -39129,11 +39738,11 @@
             </a:avLst>
           </a:prstGeom>
           <a:solidFill>
-            <a:srgbClr val="FEE2E2"/>
-          </a:solidFill>
-          <a:ln w="12700">
-            <a:solidFill>
-              <a:srgbClr val="DC2626"/>
+            <a:srgbClr val="DCFCE7"/>
+          </a:solidFill>
+          <a:ln w="12700">
+            <a:solidFill>
+              <a:srgbClr val="16A34A"/>
             </a:solidFill>
             <a:prstDash val="solid"/>
           </a:ln>
@@ -39166,13 +39775,13 @@
             <a:r>
               <a:rPr lang="en-US" sz="1100" b="1" dirty="0">
                 <a:solidFill>
-                  <a:srgbClr val="DC2626"/>
+                  <a:srgbClr val="16A34A"/>
                 </a:solidFill>
                 <a:latin typeface="Trebuchet MS" pitchFamily="34" charset="0"/>
                 <a:ea typeface="Trebuchet MS" pitchFamily="34" charset="-122"/>
                 <a:cs typeface="Trebuchet MS" pitchFamily="34" charset="-120"/>
               </a:rPr>
-              <a:t>FALSE</a:t>
+              <a:t>TRUE</a:t>
             </a:r>
             <a:endParaRPr lang="en-US" sz="1100" dirty="0"/>
           </a:p>
@@ -39245,7 +39854,7 @@
                 <a:ea typeface="Calibri" pitchFamily="34" charset="-122"/>
                 <a:cs typeface="Calibri" pitchFamily="34" charset="-120"/>
               </a:rPr>
-              <a:t>4.  The word 'perimeter' contains the root 'meter' meaning measure.</a:t>
+              <a:t>4.  'meter' means 'a device that measures and records an amount, such as electricity or gas used'.</a:t>
             </a:r>
             <a:endParaRPr lang="en-US" sz="1300" dirty="0"/>
           </a:p>
@@ -39384,7 +39993,7 @@
                 <a:ea typeface="Calibri" pitchFamily="34" charset="-122"/>
                 <a:cs typeface="Calibri" pitchFamily="34" charset="-120"/>
               </a:rPr>
-              <a:t>5.  A speedometer measures how fast something is moving.</a:t>
+              <a:t>5.  'meters' means 'devices that measure or record an amount, such as electricity, gas, or parking time'.</a:t>
             </a:r>
             <a:endParaRPr lang="en-US" sz="1300" dirty="0"/>
           </a:p>
@@ -39742,7 +40351,7 @@
                 <a:ea typeface="Calibri" pitchFamily="34" charset="-122"/>
                 <a:cs typeface="Calibri" pitchFamily="34" charset="-120"/>
               </a:rPr>
-              <a:t>Word Labs  •  wordlabs.app  •  Root: 'meter' = measure or measuring instrument</a:t>
+              <a:t>Word Labs  •  wordlabs.app  •  Root: 'meter' = measure</a:t>
             </a:r>
             <a:endParaRPr lang="en-US" sz="800" dirty="0"/>
           </a:p>
@@ -39879,7 +40488,7 @@
                 <a:ea typeface="Trebuchet MS" pitchFamily="34" charset="-122"/>
                 <a:cs typeface="Trebuchet MS" pitchFamily="34" charset="-120"/>
               </a:rPr>
-              <a:t>measure or measuring instrument</a:t>
+              <a:t>measure</a:t>
             </a:r>
             <a:endParaRPr lang="en-US" sz="2000" dirty="0"/>
           </a:p>
@@ -39918,7 +40527,7 @@
                 <a:ea typeface="Calibri" pitchFamily="34" charset="-122"/>
                 <a:cs typeface="Calibri" pitchFamily="34" charset="-120"/>
               </a:rPr>
-              <a:t>Origin: Greek: metron</a:t>
+              <a:t>Origin: Greek root</a:t>
             </a:r>
             <a:endParaRPr lang="en-US" sz="1100" dirty="0"/>
           </a:p>
@@ -40023,7 +40632,7 @@
                 <a:ea typeface="Trebuchet MS" pitchFamily="34" charset="-122"/>
                 <a:cs typeface="Trebuchet MS" pitchFamily="34" charset="-120"/>
               </a:rPr>
-              <a:t>thermometer</a:t>
+              <a:t>meter</a:t>
             </a:r>
             <a:endParaRPr lang="en-US" sz="1300" dirty="0"/>
           </a:p>
@@ -40089,7 +40698,7 @@
                 <a:ea typeface="Trebuchet MS" pitchFamily="34" charset="-122"/>
                 <a:cs typeface="Trebuchet MS" pitchFamily="34" charset="-120"/>
               </a:rPr>
-              <a:t>barometer</a:t>
+              <a:t>meters</a:t>
             </a:r>
             <a:endParaRPr lang="en-US" sz="1300" dirty="0"/>
           </a:p>
@@ -40155,7 +40764,7 @@
                 <a:ea typeface="Trebuchet MS" pitchFamily="34" charset="-122"/>
                 <a:cs typeface="Trebuchet MS" pitchFamily="34" charset="-120"/>
               </a:rPr>
-              <a:t>kilometer</a:t>
+              <a:t>metered</a:t>
             </a:r>
             <a:endParaRPr lang="en-US" sz="1300" dirty="0"/>
           </a:p>
@@ -40221,7 +40830,7 @@
                 <a:ea typeface="Trebuchet MS" pitchFamily="34" charset="-122"/>
                 <a:cs typeface="Trebuchet MS" pitchFamily="34" charset="-120"/>
               </a:rPr>
-              <a:t>perimeter</a:t>
+              <a:t>metering</a:t>
             </a:r>
             <a:endParaRPr lang="en-US" sz="1300" dirty="0"/>
           </a:p>
@@ -40287,7 +40896,7 @@
                 <a:ea typeface="Trebuchet MS" pitchFamily="34" charset="-122"/>
                 <a:cs typeface="Trebuchet MS" pitchFamily="34" charset="-120"/>
               </a:rPr>
-              <a:t>speedometer</a:t>
+              <a:t>diameter</a:t>
             </a:r>
             <a:endParaRPr lang="en-US" sz="1300" dirty="0"/>
           </a:p>
@@ -40353,7 +40962,7 @@
                 <a:ea typeface="Trebuchet MS" pitchFamily="34" charset="-122"/>
                 <a:cs typeface="Trebuchet MS" pitchFamily="34" charset="-120"/>
               </a:rPr>
-              <a:t>centimeter</a:t>
+              <a:t>perimeter</a:t>
             </a:r>
             <a:endParaRPr lang="en-US" sz="1300" dirty="0"/>
           </a:p>
@@ -40419,7 +41028,7 @@
                 <a:ea typeface="Trebuchet MS" pitchFamily="34" charset="-122"/>
                 <a:cs typeface="Trebuchet MS" pitchFamily="34" charset="-120"/>
               </a:rPr>
-              <a:t>diameter</a:t>
+              <a:t>perimeters</a:t>
             </a:r>
             <a:endParaRPr lang="en-US" sz="1300" dirty="0"/>
           </a:p>
@@ -40711,7 +41320,7 @@
                 <a:ea typeface="Calibri" pitchFamily="34" charset="-122"/>
                 <a:cs typeface="Calibri" pitchFamily="34" charset="-120"/>
               </a:rPr>
-              <a:t>Word Labs  •  wordlabs.app  •  Root: 'meter' = measure or measuring instrument</a:t>
+              <a:t>Word Labs  •  wordlabs.app  •  Root: 'meter' = measure</a:t>
             </a:r>
             <a:endParaRPr lang="en-US" sz="800" dirty="0"/>
           </a:p>
@@ -41012,7 +41621,7 @@
                 <a:ea typeface="Trebuchet MS" pitchFamily="34" charset="-122"/>
                 <a:cs typeface="Trebuchet MS" pitchFamily="34" charset="-120"/>
               </a:rPr>
-              <a:t>thermo-</a:t>
+              <a:t>chrono-</a:t>
             </a:r>
             <a:endParaRPr lang="en-US" sz="1300" dirty="0"/>
           </a:p>
@@ -41140,7 +41749,7 @@
                 <a:ea typeface="Trebuchet MS" pitchFamily="34" charset="-122"/>
                 <a:cs typeface="Trebuchet MS" pitchFamily="34" charset="-120"/>
               </a:rPr>
-              <a:t>-ing</a:t>
+              <a:t>-s</a:t>
             </a:r>
             <a:endParaRPr lang="en-US" sz="1300" dirty="0"/>
           </a:p>
@@ -41204,7 +41813,7 @@
                 <a:ea typeface="Trebuchet MS" pitchFamily="34" charset="-122"/>
                 <a:cs typeface="Trebuchet MS" pitchFamily="34" charset="-120"/>
               </a:rPr>
-              <a:t>baro-</a:t>
+              <a:t>dia-</a:t>
             </a:r>
             <a:endParaRPr lang="en-US" sz="1300" dirty="0"/>
           </a:p>
@@ -41357,7 +41966,7 @@
                 <a:ea typeface="Trebuchet MS" pitchFamily="34" charset="-122"/>
                 <a:cs typeface="Trebuchet MS" pitchFamily="34" charset="-120"/>
               </a:rPr>
-              <a:t>kilo-</a:t>
+              <a:t>para-</a:t>
             </a:r>
             <a:endParaRPr lang="en-US" sz="1300" dirty="0"/>
           </a:p>
@@ -41446,7 +42055,7 @@
                 <a:ea typeface="Trebuchet MS" pitchFamily="34" charset="-122"/>
                 <a:cs typeface="Trebuchet MS" pitchFamily="34" charset="-120"/>
               </a:rPr>
-              <a:t>-s</a:t>
+              <a:t>-ing</a:t>
             </a:r>
             <a:endParaRPr lang="en-US" sz="1300" dirty="0"/>
           </a:p>
@@ -41510,7 +42119,7 @@
                 <a:ea typeface="Trebuchet MS" pitchFamily="34" charset="-122"/>
                 <a:cs typeface="Trebuchet MS" pitchFamily="34" charset="-120"/>
               </a:rPr>
-              <a:t>centi-</a:t>
+              <a:t>peri-</a:t>
             </a:r>
             <a:endParaRPr lang="en-US" sz="1300" dirty="0"/>
           </a:p>
@@ -41556,7 +42165,7 @@
             <a:avLst/>
           </a:prstGeom>
           <a:solidFill>
-            <a:srgbClr val="FCE7F3"/>
+            <a:srgbClr val="F1F5F9"/>
           </a:solidFill>
           <a:ln w="12700">
             <a:solidFill>
@@ -41568,18 +42177,43 @@
       </p:sp>
       <p:sp>
         <p:nvSpPr>
-          <p:cNvPr id="37" name="Text 35"/>
-          <p:cNvSpPr/>
-          <p:nvPr/>
-        </p:nvSpPr>
-        <p:spPr>
-          <a:xfrm>
-            <a:off x="5943600" y="3127248"/>
+          <p:cNvPr id="37" name="Shape 35"/>
+          <p:cNvSpPr/>
+          <p:nvPr/>
+        </p:nvSpPr>
+        <p:spPr>
+          <a:xfrm>
+            <a:off x="640080" y="3584448"/>
             <a:ext cx="1463040" cy="420624"/>
           </a:xfrm>
           <a:prstGeom prst="rect">
             <a:avLst/>
           </a:prstGeom>
+          <a:solidFill>
+            <a:srgbClr val="DDD6FE"/>
+          </a:solidFill>
+          <a:ln w="12700">
+            <a:solidFill>
+              <a:srgbClr val="E5E7EB"/>
+            </a:solidFill>
+            <a:prstDash val="solid"/>
+          </a:ln>
+        </p:spPr>
+      </p:sp>
+      <p:sp>
+        <p:nvSpPr>
+          <p:cNvPr id="38" name="Text 36"/>
+          <p:cNvSpPr/>
+          <p:nvPr/>
+        </p:nvSpPr>
+        <p:spPr>
+          <a:xfrm>
+            <a:off x="640080" y="3584448"/>
+            <a:ext cx="1463040" cy="420624"/>
+          </a:xfrm>
+          <a:prstGeom prst="rect">
+            <a:avLst/>
+          </a:prstGeom>
           <a:noFill/>
           <a:ln/>
         </p:spPr>
@@ -41593,13 +42227,13 @@
             <a:r>
               <a:rPr lang="en-US" sz="1300" b="1" dirty="0">
                 <a:solidFill>
-                  <a:srgbClr val="9D174D"/>
+                  <a:srgbClr val="4C1D95"/>
                 </a:solidFill>
                 <a:latin typeface="Trebuchet MS" pitchFamily="34" charset="0"/>
                 <a:ea typeface="Trebuchet MS" pitchFamily="34" charset="-122"/>
                 <a:cs typeface="Trebuchet MS" pitchFamily="34" charset="-120"/>
               </a:rPr>
-              <a:t>-er</a:t>
+              <a:t>thermo-</a:t>
             </a:r>
             <a:endParaRPr lang="en-US" sz="1300" dirty="0"/>
           </a:p>
@@ -41607,71 +42241,7 @@
       </p:sp>
       <p:sp>
         <p:nvSpPr>
-          <p:cNvPr id="38" name="Shape 36"/>
-          <p:cNvSpPr/>
-          <p:nvPr/>
-        </p:nvSpPr>
-        <p:spPr>
-          <a:xfrm>
-            <a:off x="640080" y="3584448"/>
-            <a:ext cx="1463040" cy="420624"/>
-          </a:xfrm>
-          <a:prstGeom prst="rect">
-            <a:avLst/>
-          </a:prstGeom>
-          <a:solidFill>
-            <a:srgbClr val="DDD6FE"/>
-          </a:solidFill>
-          <a:ln w="12700">
-            <a:solidFill>
-              <a:srgbClr val="E5E7EB"/>
-            </a:solidFill>
-            <a:prstDash val="solid"/>
-          </a:ln>
-        </p:spPr>
-      </p:sp>
-      <p:sp>
-        <p:nvSpPr>
-          <p:cNvPr id="39" name="Text 37"/>
-          <p:cNvSpPr/>
-          <p:nvPr/>
-        </p:nvSpPr>
-        <p:spPr>
-          <a:xfrm>
-            <a:off x="640080" y="3584448"/>
-            <a:ext cx="1463040" cy="420624"/>
-          </a:xfrm>
-          <a:prstGeom prst="rect">
-            <a:avLst/>
-          </a:prstGeom>
-          <a:noFill/>
-          <a:ln/>
-        </p:spPr>
-        <p:txBody>
-          <a:bodyPr wrap="square" lIns="0" tIns="0" rIns="0" bIns="0" rtlCol="0" anchor="ctr"/>
-          <a:lstStyle/>
-          <a:p>
-            <a:pPr algn="ctr" indent="0" marL="0">
-              <a:buNone/>
-            </a:pPr>
-            <a:r>
-              <a:rPr lang="en-US" sz="1300" b="1" dirty="0">
-                <a:solidFill>
-                  <a:srgbClr val="4C1D95"/>
-                </a:solidFill>
-                <a:latin typeface="Trebuchet MS" pitchFamily="34" charset="0"/>
-                <a:ea typeface="Trebuchet MS" pitchFamily="34" charset="-122"/>
-                <a:cs typeface="Trebuchet MS" pitchFamily="34" charset="-120"/>
-              </a:rPr>
-              <a:t>milli-</a:t>
-            </a:r>
-            <a:endParaRPr lang="en-US" sz="1300" dirty="0"/>
-          </a:p>
-        </p:txBody>
-      </p:sp>
-      <p:sp>
-        <p:nvSpPr>
-          <p:cNvPr id="40" name="Shape 38"/>
+          <p:cNvPr id="39" name="Shape 37"/>
           <p:cNvSpPr/>
           <p:nvPr/>
         </p:nvSpPr>
@@ -41696,7 +42266,7 @@
       </p:sp>
       <p:sp>
         <p:nvSpPr>
-          <p:cNvPr id="41" name="Shape 39"/>
+          <p:cNvPr id="40" name="Shape 38"/>
           <p:cNvSpPr/>
           <p:nvPr/>
         </p:nvSpPr>
@@ -41709,7 +42279,7 @@
             <a:avLst/>
           </a:prstGeom>
           <a:solidFill>
-            <a:srgbClr val="FCE7F3"/>
+            <a:srgbClr val="F8FAFC"/>
           </a:solidFill>
           <a:ln w="12700">
             <a:solidFill>
@@ -41721,46 +42291,7 @@
       </p:sp>
       <p:sp>
         <p:nvSpPr>
-          <p:cNvPr id="42" name="Text 40"/>
-          <p:cNvSpPr/>
-          <p:nvPr/>
-        </p:nvSpPr>
-        <p:spPr>
-          <a:xfrm>
-            <a:off x="5943600" y="3584448"/>
-            <a:ext cx="1463040" cy="420624"/>
-          </a:xfrm>
-          <a:prstGeom prst="rect">
-            <a:avLst/>
-          </a:prstGeom>
-          <a:noFill/>
-          <a:ln/>
-        </p:spPr>
-        <p:txBody>
-          <a:bodyPr wrap="square" lIns="0" tIns="0" rIns="0" bIns="0" rtlCol="0" anchor="ctr"/>
-          <a:lstStyle/>
-          <a:p>
-            <a:pPr algn="ctr" indent="0" marL="0">
-              <a:buNone/>
-            </a:pPr>
-            <a:r>
-              <a:rPr lang="en-US" sz="1300" b="1" dirty="0">
-                <a:solidFill>
-                  <a:srgbClr val="9D174D"/>
-                </a:solidFill>
-                <a:latin typeface="Trebuchet MS" pitchFamily="34" charset="0"/>
-                <a:ea typeface="Trebuchet MS" pitchFamily="34" charset="-122"/>
-                <a:cs typeface="Trebuchet MS" pitchFamily="34" charset="-120"/>
-              </a:rPr>
-              <a:t>-ic</a:t>
-            </a:r>
-            <a:endParaRPr lang="en-US" sz="1300" dirty="0"/>
-          </a:p>
-        </p:txBody>
-      </p:sp>
-      <p:sp>
-        <p:nvSpPr>
-          <p:cNvPr id="43" name="Text 41"/>
+          <p:cNvPr id="41" name="Text 39"/>
           <p:cNvSpPr/>
           <p:nvPr/>
         </p:nvSpPr>
@@ -41799,7 +42330,7 @@
       </p:sp>
       <p:sp>
         <p:nvSpPr>
-          <p:cNvPr id="44" name="Shape 42"/>
+          <p:cNvPr id="42" name="Shape 40"/>
           <p:cNvSpPr/>
           <p:nvPr/>
         </p:nvSpPr>
@@ -41833,7 +42364,7 @@
       </p:sp>
       <p:sp>
         <p:nvSpPr>
-          <p:cNvPr id="45" name="Text 43"/>
+          <p:cNvPr id="43" name="Text 41"/>
           <p:cNvSpPr/>
           <p:nvPr/>
         </p:nvSpPr>
@@ -41864,7 +42395,7 @@
                 <a:ea typeface="Trebuchet MS" pitchFamily="34" charset="-122"/>
                 <a:cs typeface="Trebuchet MS" pitchFamily="34" charset="-120"/>
               </a:rPr>
-              <a:t>thermo-</a:t>
+              <a:t>chrono-</a:t>
             </a:r>
             <a:endParaRPr lang="en-US" sz="1300" dirty="0"/>
           </a:p>
@@ -41872,7 +42403,7 @@
       </p:sp>
       <p:sp>
         <p:nvSpPr>
-          <p:cNvPr id="46" name="Text 44"/>
+          <p:cNvPr id="44" name="Text 42"/>
           <p:cNvSpPr/>
           <p:nvPr/>
         </p:nvSpPr>
@@ -41911,7 +42442,7 @@
       </p:sp>
       <p:sp>
         <p:nvSpPr>
-          <p:cNvPr id="47" name="Shape 45"/>
+          <p:cNvPr id="45" name="Shape 43"/>
           <p:cNvSpPr/>
           <p:nvPr/>
         </p:nvSpPr>
@@ -41945,7 +42476,7 @@
       </p:sp>
       <p:sp>
         <p:nvSpPr>
-          <p:cNvPr id="48" name="Text 46"/>
+          <p:cNvPr id="46" name="Text 44"/>
           <p:cNvSpPr/>
           <p:nvPr/>
         </p:nvSpPr>
@@ -41984,7 +42515,7 @@
       </p:sp>
       <p:sp>
         <p:nvSpPr>
-          <p:cNvPr id="49" name="Text 47"/>
+          <p:cNvPr id="47" name="Text 45"/>
           <p:cNvSpPr/>
           <p:nvPr/>
         </p:nvSpPr>
@@ -42023,14 +42554,14 @@
       </p:sp>
       <p:sp>
         <p:nvSpPr>
-          <p:cNvPr id="50" name="Shape 48"/>
+          <p:cNvPr id="48" name="Shape 46"/>
           <p:cNvSpPr/>
           <p:nvPr/>
         </p:nvSpPr>
         <p:spPr>
           <a:xfrm>
             <a:off x="5038344" y="4178808"/>
-            <a:ext cx="950976" cy="420624"/>
+            <a:ext cx="822960" cy="420624"/>
           </a:xfrm>
           <a:prstGeom prst="rect">
             <a:avLst>
@@ -42057,14 +42588,14 @@
       </p:sp>
       <p:sp>
         <p:nvSpPr>
-          <p:cNvPr id="51" name="Text 49"/>
+          <p:cNvPr id="49" name="Text 47"/>
           <p:cNvSpPr/>
           <p:nvPr/>
         </p:nvSpPr>
         <p:spPr>
           <a:xfrm>
             <a:off x="5038344" y="4178808"/>
-            <a:ext cx="950976" cy="420624"/>
+            <a:ext cx="822960" cy="420624"/>
           </a:xfrm>
           <a:prstGeom prst="rect">
             <a:avLst/>
@@ -42088,7 +42619,7 @@
                 <a:ea typeface="Trebuchet MS" pitchFamily="34" charset="-122"/>
                 <a:cs typeface="Trebuchet MS" pitchFamily="34" charset="-120"/>
               </a:rPr>
-              <a:t>-ing</a:t>
+              <a:t>-s</a:t>
             </a:r>
             <a:endParaRPr lang="en-US" sz="1300" dirty="0"/>
           </a:p>
@@ -42096,13 +42627,13 @@
       </p:sp>
       <p:sp>
         <p:nvSpPr>
-          <p:cNvPr id="52" name="Text 50"/>
-          <p:cNvSpPr/>
-          <p:nvPr/>
-        </p:nvSpPr>
-        <p:spPr>
-          <a:xfrm>
-            <a:off x="6062472" y="4178808"/>
+          <p:cNvPr id="50" name="Text 48"/>
+          <p:cNvSpPr/>
+          <p:nvPr/>
+        </p:nvSpPr>
+        <p:spPr>
+          <a:xfrm>
+            <a:off x="5934456" y="4178808"/>
             <a:ext cx="365760" cy="420624"/>
           </a:xfrm>
           <a:prstGeom prst="rect">
@@ -42135,13 +42666,13 @@
       </p:sp>
       <p:sp>
         <p:nvSpPr>
-          <p:cNvPr id="53" name="Shape 51"/>
-          <p:cNvSpPr/>
-          <p:nvPr/>
-        </p:nvSpPr>
-        <p:spPr>
-          <a:xfrm>
-            <a:off x="6473952" y="4178808"/>
+          <p:cNvPr id="51" name="Shape 49"/>
+          <p:cNvSpPr/>
+          <p:nvPr/>
+        </p:nvSpPr>
+        <p:spPr>
+          <a:xfrm>
+            <a:off x="6345936" y="4178808"/>
             <a:ext cx="2194560" cy="420624"/>
           </a:xfrm>
           <a:prstGeom prst="rect">
@@ -42162,13 +42693,13 @@
       </p:sp>
       <p:sp>
         <p:nvSpPr>
-          <p:cNvPr id="54" name="Text 52"/>
-          <p:cNvSpPr/>
-          <p:nvPr/>
-        </p:nvSpPr>
-        <p:spPr>
-          <a:xfrm>
-            <a:off x="6473952" y="4178808"/>
+          <p:cNvPr id="52" name="Text 50"/>
+          <p:cNvSpPr/>
+          <p:nvPr/>
+        </p:nvSpPr>
+        <p:spPr>
+          <a:xfrm>
+            <a:off x="6345936" y="4178808"/>
             <a:ext cx="2194560" cy="420624"/>
           </a:xfrm>
           <a:prstGeom prst="rect">
@@ -42193,7 +42724,7 @@
                 <a:ea typeface="Trebuchet MS" pitchFamily="34" charset="-122"/>
                 <a:cs typeface="Trebuchet MS" pitchFamily="34" charset="-120"/>
               </a:rPr>
-              <a:t>thermometer</a:t>
+              <a:t>meter</a:t>
             </a:r>
             <a:endParaRPr lang="en-US" sz="1400" dirty="0"/>
           </a:p>
@@ -42485,7 +43016,7 @@
                 <a:ea typeface="Calibri" pitchFamily="34" charset="-122"/>
                 <a:cs typeface="Calibri" pitchFamily="34" charset="-120"/>
               </a:rPr>
-              <a:t>Word Labs  •  wordlabs.app  •  Root: 'meter' = measure or measuring instrument</a:t>
+              <a:t>Word Labs  •  wordlabs.app  •  Root: 'meter' = measure</a:t>
             </a:r>
             <a:endParaRPr lang="en-US" sz="800" dirty="0"/>
           </a:p>
@@ -42597,7 +43128,7 @@
                 <a:ea typeface="Trebuchet MS" pitchFamily="34" charset="-122"/>
                 <a:cs typeface="Trebuchet MS" pitchFamily="34" charset="-120"/>
               </a:rPr>
-              <a:t>thermometer</a:t>
+              <a:t>meter</a:t>
             </a:r>
             <a:endParaRPr lang="en-US" sz="1200" dirty="0"/>
           </a:p>
@@ -42663,7 +43194,7 @@
                 <a:ea typeface="Calibri" pitchFamily="34" charset="-122"/>
                 <a:cs typeface="Calibri" pitchFamily="34" charset="-120"/>
               </a:rPr>
-              <a:t>A straight line that passes through the centre of a circle from one side to the other.</a:t>
+              <a:t>the total distances around the outside edges of shapes or areas</a:t>
             </a:r>
             <a:endParaRPr lang="en-US" sz="1200" dirty="0"/>
           </a:p>
@@ -42736,7 +43267,7 @@
                 <a:ea typeface="Trebuchet MS" pitchFamily="34" charset="-122"/>
                 <a:cs typeface="Trebuchet MS" pitchFamily="34" charset="-120"/>
               </a:rPr>
-              <a:t>barometer</a:t>
+              <a:t>meters</a:t>
             </a:r>
             <a:endParaRPr lang="en-US" sz="1200" dirty="0"/>
           </a:p>
@@ -42802,7 +43333,7 @@
                 <a:ea typeface="Calibri" pitchFamily="34" charset="-122"/>
                 <a:cs typeface="Calibri" pitchFamily="34" charset="-120"/>
               </a:rPr>
-              <a:t>The total distance around the outside of a shape.</a:t>
+              <a:t>measuring and recording the amount of something used, such as electricity or water</a:t>
             </a:r>
             <a:endParaRPr lang="en-US" sz="1200" dirty="0"/>
           </a:p>
@@ -42875,7 +43406,7 @@
                 <a:ea typeface="Trebuchet MS" pitchFamily="34" charset="-122"/>
                 <a:cs typeface="Trebuchet MS" pitchFamily="34" charset="-120"/>
               </a:rPr>
-              <a:t>kilometer</a:t>
+              <a:t>metered</a:t>
             </a:r>
             <a:endParaRPr lang="en-US" sz="1200" dirty="0"/>
           </a:p>
@@ -42941,7 +43472,7 @@
                 <a:ea typeface="Calibri" pitchFamily="34" charset="-122"/>
                 <a:cs typeface="Calibri" pitchFamily="34" charset="-120"/>
               </a:rPr>
-              <a:t>A device in a vehicle that measures how fast it is travelling.</a:t>
+              <a:t>a straight line passing through the centre of a circle, touching both sides</a:t>
             </a:r>
             <a:endParaRPr lang="en-US" sz="1200" dirty="0"/>
           </a:p>
@@ -43014,7 +43545,7 @@
                 <a:ea typeface="Trebuchet MS" pitchFamily="34" charset="-122"/>
                 <a:cs typeface="Trebuchet MS" pitchFamily="34" charset="-120"/>
               </a:rPr>
-              <a:t>perimeter</a:t>
+              <a:t>metering</a:t>
             </a:r>
             <a:endParaRPr lang="en-US" sz="1200" dirty="0"/>
           </a:p>
@@ -43080,7 +43611,7 @@
                 <a:ea typeface="Calibri" pitchFamily="34" charset="-122"/>
                 <a:cs typeface="Calibri" pitchFamily="34" charset="-120"/>
               </a:rPr>
-              <a:t>A unit of length equal to one thousand metres.</a:t>
+              <a:t>measured and recorded by a meter, especially for a service like parking or electricity</a:t>
             </a:r>
             <a:endParaRPr lang="en-US" sz="1200" dirty="0"/>
           </a:p>
@@ -43153,7 +43684,7 @@
                 <a:ea typeface="Trebuchet MS" pitchFamily="34" charset="-122"/>
                 <a:cs typeface="Trebuchet MS" pitchFamily="34" charset="-120"/>
               </a:rPr>
-              <a:t>speedometer</a:t>
+              <a:t>diameter</a:t>
             </a:r>
             <a:endParaRPr lang="en-US" sz="1200" dirty="0"/>
           </a:p>
@@ -43219,7 +43750,7 @@
                 <a:ea typeface="Calibri" pitchFamily="34" charset="-122"/>
                 <a:cs typeface="Calibri" pitchFamily="34" charset="-120"/>
               </a:rPr>
-              <a:t>A unit of length that is one hundredth of a metre.</a:t>
+              <a:t>the total distance around the outside edge of a shape or area</a:t>
             </a:r>
             <a:endParaRPr lang="en-US" sz="1200" dirty="0"/>
           </a:p>
@@ -43292,7 +43823,7 @@
                 <a:ea typeface="Trebuchet MS" pitchFamily="34" charset="-122"/>
                 <a:cs typeface="Trebuchet MS" pitchFamily="34" charset="-120"/>
               </a:rPr>
-              <a:t>centimeter</a:t>
+              <a:t>perimeter</a:t>
             </a:r>
             <a:endParaRPr lang="en-US" sz="1200" dirty="0"/>
           </a:p>
@@ -43358,7 +43889,7 @@
                 <a:ea typeface="Calibri" pitchFamily="34" charset="-122"/>
                 <a:cs typeface="Calibri" pitchFamily="34" charset="-120"/>
               </a:rPr>
-              <a:t>A tool that measures how hot or cold something is.</a:t>
+              <a:t>a device that measures and records an amount, such as electricity or gas used</a:t>
             </a:r>
             <a:endParaRPr lang="en-US" sz="1200" dirty="0"/>
           </a:p>
@@ -43431,7 +43962,7 @@
                 <a:ea typeface="Trebuchet MS" pitchFamily="34" charset="-122"/>
                 <a:cs typeface="Trebuchet MS" pitchFamily="34" charset="-120"/>
               </a:rPr>
-              <a:t>diameter</a:t>
+              <a:t>perimeters</a:t>
             </a:r>
             <a:endParaRPr lang="en-US" sz="1200" dirty="0"/>
           </a:p>
@@ -43497,7 +44028,7 @@
                 <a:ea typeface="Calibri" pitchFamily="34" charset="-122"/>
                 <a:cs typeface="Calibri" pitchFamily="34" charset="-120"/>
               </a:rPr>
-              <a:t>A tool that measures air pressure to help predict the weather.</a:t>
+              <a:t>devices that measure or record an amount, such as electricity, gas, or parking time</a:t>
             </a:r>
             <a:endParaRPr lang="en-US" sz="1200" dirty="0"/>
           </a:p>
@@ -43789,7 +44320,7 @@
                 <a:ea typeface="Calibri" pitchFamily="34" charset="-122"/>
                 <a:cs typeface="Calibri" pitchFamily="34" charset="-120"/>
               </a:rPr>
-              <a:t>Word Labs  •  wordlabs.app  •  Root: 'meter' = measure or measuring instrument</a:t>
+              <a:t>Word Labs  •  wordlabs.app  •  Root: 'meter' = measure</a:t>
             </a:r>
             <a:endParaRPr lang="en-US" sz="800" dirty="0"/>
           </a:p>
@@ -43992,7 +44523,7 @@
                 <a:ea typeface="Calibri" pitchFamily="34" charset="-122"/>
                 <a:cs typeface="Calibri" pitchFamily="34" charset="-120"/>
               </a:rPr>
-              <a:t>The nurse used a thermometer to check if the student had a fever.</a:t>
+              <a:t>The electrician checked the meter to see how much power the house had used.</a:t>
             </a:r>
             <a:endParaRPr lang="en-US" sz="1500" dirty="0"/>
           </a:p>
@@ -44156,7 +44687,7 @@
                 <a:ea typeface="Calibri" pitchFamily="34" charset="-122"/>
                 <a:cs typeface="Calibri" pitchFamily="34" charset="-120"/>
               </a:rPr>
-              <a:t>We used a ruler to measure the perimeter of the rectangle in maths today.</a:t>
+              <a:t>The electricity meters on the wall showed how much power the house had used.</a:t>
             </a:r>
             <a:endParaRPr lang="en-US" sz="1500" dirty="0"/>
           </a:p>
@@ -44320,7 +44851,7 @@
                 <a:ea typeface="Calibri" pitchFamily="34" charset="-122"/>
                 <a:cs typeface="Calibri" pitchFamily="34" charset="-120"/>
               </a:rPr>
-              <a:t>The pilot checked the altimeter to see how high the plane was flying.</a:t>
+              <a:t>The car park has metered parking, so you must pay for each hour.</a:t>
             </a:r>
             <a:endParaRPr lang="en-US" sz="1500" dirty="0"/>
           </a:p>
